--- a/artifacts/Planwise-Klassniy-Chas.pptx
+++ b/artifacts/Planwise-Klassniy-Chas.pptx
@@ -16,9 +16,10 @@
     <p:sldId id="264" r:id="rId10"/>
     <p:sldId id="265" r:id="rId11"/>
     <p:sldId id="266" r:id="rId12"/>
+    <p:sldId id="267" r:id="rId13"/>
   </p:sldIdLst>
   <p:notesMasterIdLst>
-    <p:notesMasterId r:id="rId13"/>
+    <p:notesMasterId r:id="rId14"/>
   </p:notesMasterIdLst>
   <p:sldSz cx="12192000" cy="6858000"/>
   <p:notesSz cx="6858000" cy="12192000"/>
@@ -712,6 +713,94 @@
             <a:fld id="{F7021451-1387-4CA6-816F-3879F97B5CBC}" type="slidenum">
               <a:rPr lang="en-US"/>
               <a:t>11</a:t>
+            </a:fld>
+            <a:endParaRPr lang="en-US"/>
+          </a:p>
+        </p:txBody>
+      </p:sp>
+    </p:spTree>
+    <p:extLst>
+      <p:ext uri="{BB962C8B-B14F-4D97-AF65-F5344CB8AC3E}">
+        <p14:creationId xmlns:p14="http://schemas.microsoft.com/office/powerpoint/2010/main" val="1024086991"/>
+      </p:ext>
+    </p:extLst>
+  </p:cSld>
+  <p:clrMapOvr>
+    <a:masterClrMapping/>
+  </p:clrMapOvr>
+</p:notes>
+</file>
+
+<file path=ppt/notesSlides/notesSlide12.xml><?xml version="1.0" encoding="utf-8"?>
+<p:notes xmlns:a="http://schemas.openxmlformats.org/drawingml/2006/main" xmlns:r="http://schemas.openxmlformats.org/officeDocument/2006/relationships" xmlns:p="http://schemas.openxmlformats.org/presentationml/2006/main">
+  <p:cSld>
+    <p:spTree>
+      <p:nvGrpSpPr>
+        <p:cNvPr id="1" name=""/>
+        <p:cNvGrpSpPr/>
+        <p:nvPr/>
+      </p:nvGrpSpPr>
+      <p:grpSpPr>
+        <a:xfrm>
+          <a:off x="0" y="0"/>
+          <a:ext cx="0" cy="0"/>
+          <a:chOff x="0" y="0"/>
+          <a:chExt cx="0" cy="0"/>
+        </a:xfrm>
+      </p:grpSpPr>
+      <p:sp>
+        <p:nvSpPr>
+          <p:cNvPr id="2" name="Slide Image Placeholder 1"/>
+          <p:cNvSpPr>
+            <a:spLocks noGrp="1" noRot="1" noChangeAspect="1"/>
+          </p:cNvSpPr>
+          <p:nvPr>
+            <p:ph type="sldImg"/>
+          </p:nvPr>
+        </p:nvSpPr>
+        <p:spPr/>
+      </p:sp>
+      <p:sp>
+        <p:nvSpPr>
+          <p:cNvPr id="3" name="Notes Placeholder 2"/>
+          <p:cNvSpPr>
+            <a:spLocks noGrp="1"/>
+          </p:cNvSpPr>
+          <p:nvPr>
+            <p:ph type="body" idx="1"/>
+          </p:nvPr>
+        </p:nvSpPr>
+        <p:spPr/>
+        <p:txBody>
+          <a:bodyPr/>
+          <a:lstStyle/>
+          <a:p>
+            <a:r>
+              <a:rPr lang="en-US" dirty="0"/>
+              <a:t/>
+            </a:r>
+            <a:endParaRPr lang="en-US" dirty="0"/>
+          </a:p>
+        </p:txBody>
+      </p:sp>
+      <p:sp>
+        <p:nvSpPr>
+          <p:cNvPr id="4" name="Slide Number Placeholder 3"/>
+          <p:cNvSpPr>
+            <a:spLocks noGrp="1"/>
+          </p:cNvSpPr>
+          <p:nvPr>
+            <p:ph type="sldNum" sz="quarter" idx="10"/>
+          </p:nvPr>
+        </p:nvSpPr>
+        <p:spPr/>
+        <p:txBody>
+          <a:bodyPr/>
+          <a:lstStyle/>
+          <a:p>
+            <a:fld id="{F7021451-1387-4CA6-816F-3879F97B5CBC}" type="slidenum">
+              <a:rPr lang="en-US"/>
+              <a:t>12</a:t>
             </a:fld>
             <a:endParaRPr lang="en-US"/>
           </a:p>
@@ -4696,6 +4785,657 @@
 </p:sld>
 </file>
 
+<file path=ppt/slides/slide12.xml><?xml version="1.0" encoding="utf-8"?>
+<p:sld xmlns:a="http://schemas.openxmlformats.org/drawingml/2006/main" xmlns:r="http://schemas.openxmlformats.org/officeDocument/2006/relationships" xmlns:p="http://schemas.openxmlformats.org/presentationml/2006/main">
+  <p:cSld name="Slide 12">
+    <p:bg>
+      <p:bgPr>
+        <a:solidFill>
+          <a:srgbClr val="F8F9F7"/>
+        </a:solidFill>
+      </p:bgPr>
+    </p:bg>
+    <p:spTree>
+      <p:nvGrpSpPr>
+        <p:cNvPr id="1" name=""/>
+        <p:cNvGrpSpPr/>
+        <p:nvPr/>
+      </p:nvGrpSpPr>
+      <p:grpSpPr>
+        <a:xfrm>
+          <a:off x="0" y="0"/>
+          <a:ext cx="0" cy="0"/>
+          <a:chOff x="0" y="0"/>
+          <a:chExt cx="0" cy="0"/>
+        </a:xfrm>
+      </p:grpSpPr>
+      <p:sp>
+        <p:nvSpPr>
+          <p:cNvPr id="2" name="Shape 0"/>
+          <p:cNvSpPr/>
+          <p:nvPr/>
+        </p:nvSpPr>
+        <p:spPr>
+          <a:xfrm>
+            <a:off x="640080" y="566928"/>
+            <a:ext cx="310896" cy="310896"/>
+          </a:xfrm>
+          <a:prstGeom prst="rect">
+            <a:avLst/>
+          </a:prstGeom>
+          <a:solidFill>
+            <a:srgbClr val="F5B800"/>
+          </a:solidFill>
+          <a:ln/>
+        </p:spPr>
+      </p:sp>
+      <p:sp>
+        <p:nvSpPr>
+          <p:cNvPr id="3" name="Text 1"/>
+          <p:cNvSpPr/>
+          <p:nvPr/>
+        </p:nvSpPr>
+        <p:spPr>
+          <a:xfrm>
+            <a:off x="1060704" y="457200"/>
+            <a:ext cx="8229600" cy="502920"/>
+          </a:xfrm>
+          <a:prstGeom prst="rect">
+            <a:avLst/>
+          </a:prstGeom>
+          <a:noFill/>
+          <a:ln/>
+        </p:spPr>
+        <p:txBody>
+          <a:bodyPr wrap="square" rtlCol="0" anchor="ctr"/>
+          <a:lstStyle/>
+          <a:p>
+            <a:pPr indent="0" marL="0">
+              <a:buNone/>
+            </a:pPr>
+            <a:r>
+              <a:rPr lang="en-US" sz="1300" b="1" spc="200" kern="0" dirty="0">
+                <a:solidFill>
+                  <a:srgbClr val="21A663"/>
+                </a:solidFill>
+                <a:latin typeface="Calibri" pitchFamily="34" charset="0"/>
+                <a:ea typeface="Calibri" pitchFamily="34" charset="-122"/>
+                <a:cs typeface="Calibri" pitchFamily="34" charset="-120"/>
+              </a:rPr>
+              <a:t>+ ДОПОЛНИТЕЛЬНО</a:t>
+            </a:r>
+            <a:endParaRPr lang="en-US" sz="1300" dirty="0"/>
+          </a:p>
+        </p:txBody>
+      </p:sp>
+      <p:sp>
+        <p:nvSpPr>
+          <p:cNvPr id="4" name="Text 2"/>
+          <p:cNvSpPr/>
+          <p:nvPr/>
+        </p:nvSpPr>
+        <p:spPr>
+          <a:xfrm>
+            <a:off x="640080" y="868680"/>
+            <a:ext cx="10881360" cy="868680"/>
+          </a:xfrm>
+          <a:prstGeom prst="rect">
+            <a:avLst/>
+          </a:prstGeom>
+          <a:noFill/>
+          <a:ln/>
+        </p:spPr>
+        <p:txBody>
+          <a:bodyPr wrap="square" rtlCol="0" anchor="ctr"/>
+          <a:lstStyle/>
+          <a:p>
+            <a:pPr indent="0" marL="0">
+              <a:buNone/>
+            </a:pPr>
+            <a:r>
+              <a:rPr lang="en-US" sz="3200" b="1" dirty="0">
+                <a:solidFill>
+                  <a:srgbClr val="14160F"/>
+                </a:solidFill>
+                <a:latin typeface="Georgia" pitchFamily="34" charset="0"/>
+                <a:ea typeface="Georgia" pitchFamily="34" charset="-122"/>
+                <a:cs typeface="Georgia" pitchFamily="34" charset="-120"/>
+              </a:rPr>
+              <a:t>Чем ещё хочется поделиться</a:t>
+            </a:r>
+            <a:endParaRPr lang="en-US" sz="3200" dirty="0"/>
+          </a:p>
+        </p:txBody>
+      </p:sp>
+      <p:sp>
+        <p:nvSpPr>
+          <p:cNvPr id="5" name="Shape 3"/>
+          <p:cNvSpPr/>
+          <p:nvPr/>
+        </p:nvSpPr>
+        <p:spPr>
+          <a:xfrm>
+            <a:off x="640080" y="1920240"/>
+            <a:ext cx="5349240" cy="4343400"/>
+          </a:xfrm>
+          <a:prstGeom prst="rect">
+            <a:avLst/>
+          </a:prstGeom>
+          <a:solidFill>
+            <a:srgbClr val="FFFFFF"/>
+          </a:solidFill>
+          <a:ln w="12700">
+            <a:solidFill>
+              <a:srgbClr val="E4E6E1"/>
+            </a:solidFill>
+            <a:prstDash val="solid"/>
+          </a:ln>
+          <a:effectLst>
+            <a:outerShdw sx="100000" sy="100000" kx="0" ky="0" algn="bl" rotWithShape="0" blurRad="101600" dist="38100" dir="8100000">
+              <a:srgbClr val="000000">
+                <a:alpha val="12000"/>
+              </a:srgbClr>
+            </a:outerShdw>
+          </a:effectLst>
+        </p:spPr>
+      </p:sp>
+      <p:sp>
+        <p:nvSpPr>
+          <p:cNvPr id="6" name="Shape 4"/>
+          <p:cNvSpPr/>
+          <p:nvPr/>
+        </p:nvSpPr>
+        <p:spPr>
+          <a:xfrm>
+            <a:off x="640080" y="1920240"/>
+            <a:ext cx="5349240" cy="109728"/>
+          </a:xfrm>
+          <a:prstGeom prst="rect">
+            <a:avLst/>
+          </a:prstGeom>
+          <a:solidFill>
+            <a:srgbClr val="21A663"/>
+          </a:solidFill>
+          <a:ln/>
+        </p:spPr>
+      </p:sp>
+      <p:sp>
+        <p:nvSpPr>
+          <p:cNvPr id="7" name="Shape 5"/>
+          <p:cNvSpPr/>
+          <p:nvPr/>
+        </p:nvSpPr>
+        <p:spPr>
+          <a:xfrm>
+            <a:off x="868680" y="2194560"/>
+            <a:ext cx="548640" cy="548640"/>
+          </a:xfrm>
+          <a:prstGeom prst="ellipse">
+            <a:avLst/>
+          </a:prstGeom>
+          <a:solidFill>
+            <a:srgbClr val="093520"/>
+          </a:solidFill>
+          <a:ln/>
+        </p:spPr>
+      </p:sp>
+      <p:pic>
+        <p:nvPicPr>
+          <p:cNvPr id="8" name="Image 0" descr="preencoded.png">    </p:cNvPr>
+          <p:cNvPicPr>
+            <a:picLocks noChangeAspect="1"/>
+          </p:cNvPicPr>
+          <p:nvPr/>
+        </p:nvPicPr>
+        <p:blipFill>
+          <a:blip r:embed="rId1"/>
+          <a:stretch>
+            <a:fillRect/>
+          </a:stretch>
+        </p:blipFill>
+        <p:spPr>
+          <a:xfrm>
+            <a:off x="1011326" y="2337206"/>
+            <a:ext cx="263347" cy="263347"/>
+          </a:xfrm>
+          <a:prstGeom prst="rect">
+            <a:avLst/>
+          </a:prstGeom>
+        </p:spPr>
+      </p:pic>
+      <p:sp>
+        <p:nvSpPr>
+          <p:cNvPr id="9" name="Text 6"/>
+          <p:cNvSpPr/>
+          <p:nvPr/>
+        </p:nvSpPr>
+        <p:spPr>
+          <a:xfrm>
+            <a:off x="1554480" y="2194560"/>
+            <a:ext cx="4297680" cy="548640"/>
+          </a:xfrm>
+          <a:prstGeom prst="rect">
+            <a:avLst/>
+          </a:prstGeom>
+          <a:noFill/>
+          <a:ln/>
+        </p:spPr>
+        <p:txBody>
+          <a:bodyPr wrap="square" rtlCol="0" anchor="ctr"/>
+          <a:lstStyle/>
+          <a:p>
+            <a:pPr indent="0" marL="0">
+              <a:buNone/>
+            </a:pPr>
+            <a:r>
+              <a:rPr lang="en-US" sz="1600" b="1" dirty="0">
+                <a:solidFill>
+                  <a:srgbClr val="14160F"/>
+                </a:solidFill>
+                <a:latin typeface="Georgia" pitchFamily="34" charset="0"/>
+                <a:ea typeface="Georgia" pitchFamily="34" charset="-122"/>
+                <a:cs typeface="Georgia" pitchFamily="34" charset="-120"/>
+              </a:rPr>
+              <a:t>Суверенность данных и развёртывание</a:t>
+            </a:r>
+            <a:endParaRPr lang="en-US" sz="1600" dirty="0"/>
+          </a:p>
+        </p:txBody>
+      </p:sp>
+      <p:sp>
+        <p:nvSpPr>
+          <p:cNvPr id="10" name="Text 7"/>
+          <p:cNvSpPr/>
+          <p:nvPr/>
+        </p:nvSpPr>
+        <p:spPr>
+          <a:xfrm>
+            <a:off x="914400" y="2926080"/>
+            <a:ext cx="4892040" cy="2651760"/>
+          </a:xfrm>
+          <a:prstGeom prst="rect">
+            <a:avLst/>
+          </a:prstGeom>
+          <a:noFill/>
+          <a:ln/>
+        </p:spPr>
+        <p:txBody>
+          <a:bodyPr wrap="square" rtlCol="0" anchor="t"/>
+          <a:lstStyle/>
+          <a:p>
+            <a:pPr marL="342900" indent="-342900">
+              <a:spcAft>
+                <a:spcPts val="800"/>
+              </a:spcAft>
+              <a:buSzPct val="100000"/>
+              <a:buChar char="•"/>
+            </a:pPr>
+            <a:r>
+              <a:rPr lang="en-US" sz="1300" dirty="0">
+                <a:solidFill>
+                  <a:srgbClr val="14160F"/>
+                </a:solidFill>
+                <a:latin typeface="Calibri" pitchFamily="34" charset="0"/>
+                <a:ea typeface="Calibri" pitchFamily="34" charset="-122"/>
+                <a:cs typeface="Calibri" pitchFamily="34" charset="-120"/>
+              </a:rPr>
+              <a:t>docker compose up — БД, миграции и приложение одной командой</a:t>
+            </a:r>
+            <a:endParaRPr lang="en-US" sz="1300" dirty="0"/>
+          </a:p>
+          <a:p>
+            <a:pPr marL="342900" indent="-342900">
+              <a:spcAft>
+                <a:spcPts val="800"/>
+              </a:spcAft>
+              <a:buSzPct val="100000"/>
+              <a:buChar char="•"/>
+            </a:pPr>
+            <a:r>
+              <a:rPr lang="en-US" sz="1300" dirty="0">
+                <a:solidFill>
+                  <a:srgbClr val="14160F"/>
+                </a:solidFill>
+                <a:latin typeface="Calibri" pitchFamily="34" charset="0"/>
+                <a:ea typeface="Calibri" pitchFamily="34" charset="-122"/>
+                <a:cs typeface="Calibri" pitchFamily="34" charset="-120"/>
+              </a:rPr>
+              <a:t>Переключаемая через env LLM (LLM_PROVIDER): GigaChat или локальная / OpenAI-совместимая (Ollama, LM Studio, vLLM)</a:t>
+            </a:r>
+            <a:endParaRPr lang="en-US" sz="1300" dirty="0"/>
+          </a:p>
+          <a:p>
+            <a:pPr marL="342900" indent="-342900">
+              <a:spcAft>
+                <a:spcPts val="800"/>
+              </a:spcAft>
+              <a:buSzPct val="100000"/>
+              <a:buChar char="•"/>
+            </a:pPr>
+            <a:r>
+              <a:rPr lang="en-US" sz="1300" b="1" dirty="0">
+                <a:solidFill>
+                  <a:srgbClr val="21A663"/>
+                </a:solidFill>
+                <a:latin typeface="Calibri" pitchFamily="34" charset="0"/>
+                <a:ea typeface="Calibri" pitchFamily="34" charset="-122"/>
+                <a:cs typeface="Calibri" pitchFamily="34" charset="-120"/>
+              </a:rPr>
+              <a:t>Данные детей могут не покидать контур школы — модель поднимается на своём железе</a:t>
+            </a:r>
+            <a:endParaRPr lang="en-US" sz="1300" dirty="0"/>
+          </a:p>
+          <a:p>
+            <a:pPr marL="342900" indent="-342900">
+              <a:spcAft>
+                <a:spcPts val="800"/>
+              </a:spcAft>
+              <a:buSzPct val="100000"/>
+              <a:buChar char="•"/>
+            </a:pPr>
+            <a:r>
+              <a:rPr lang="en-US" sz="1300" dirty="0">
+                <a:solidFill>
+                  <a:srgbClr val="14160F"/>
+                </a:solidFill>
+                <a:latin typeface="Calibri" pitchFamily="34" charset="0"/>
+                <a:ea typeface="Calibri" pitchFamily="34" charset="-122"/>
+                <a:cs typeface="Calibri" pitchFamily="34" charset="-120"/>
+              </a:rPr>
+              <a:t>TLS к GigaChat через вшитые сертификаты Минцифры РФ — без обхода проверки</a:t>
+            </a:r>
+            <a:endParaRPr lang="en-US" sz="1300" dirty="0"/>
+          </a:p>
+        </p:txBody>
+      </p:sp>
+      <p:sp>
+        <p:nvSpPr>
+          <p:cNvPr id="11" name="Text 8"/>
+          <p:cNvSpPr/>
+          <p:nvPr/>
+        </p:nvSpPr>
+        <p:spPr>
+          <a:xfrm>
+            <a:off x="914400" y="5806440"/>
+            <a:ext cx="4892040" cy="320040"/>
+          </a:xfrm>
+          <a:prstGeom prst="rect">
+            <a:avLst/>
+          </a:prstGeom>
+          <a:noFill/>
+          <a:ln/>
+        </p:spPr>
+        <p:txBody>
+          <a:bodyPr wrap="square" rtlCol="0" anchor="ctr"/>
+          <a:lstStyle/>
+          <a:p>
+            <a:pPr indent="0" marL="0">
+              <a:buNone/>
+            </a:pPr>
+            <a:r>
+              <a:rPr lang="en-US" sz="1200" i="1" dirty="0">
+                <a:solidFill>
+                  <a:srgbClr val="717670"/>
+                </a:solidFill>
+                <a:latin typeface="Calibri" pitchFamily="34" charset="0"/>
+                <a:ea typeface="Calibri" pitchFamily="34" charset="-122"/>
+                <a:cs typeface="Calibri" pitchFamily="34" charset="-120"/>
+              </a:rPr>
+              <a:t>Публичный репозиторий: </a:t>
+            </a:r>
+            <a:pPr indent="0" marL="0">
+              <a:buNone/>
+            </a:pPr>
+            <a:r>
+              <a:rPr lang="en-US" sz="1200" b="1" i="1" u="sng" dirty="0">
+                <a:solidFill>
+                  <a:srgbClr val="21A663"/>
+                </a:solidFill>
+                <a:latin typeface="Calibri" pitchFamily="34" charset="0"/>
+                <a:ea typeface="Calibri" pitchFamily="34" charset="-122"/>
+                <a:cs typeface="Calibri" pitchFamily="34" charset="-120"/>
+                <a:hlinkClick r:id="rId2" invalidUrl="" action="" tgtFrame="" tooltip="" history="1" highlightClick="0" endSnd="0">
+                  <a:extLst>
+                    <a:ext uri="{A12FA001-AC4F-418D-AE19-62706E023703}">
+                      <ahyp:hlinkClr xmlns:ahyp="http://schemas.microsoft.com/office/drawing/2018/hyperlinkcolor" val="tx"/>
+                    </a:ext>
+                  </a:extLst>
+                </a:hlinkClick>
+              </a:rPr>
+              <a:t>github.com/Caspernik-dev/planwise</a:t>
+            </a:r>
+            <a:endParaRPr lang="en-US" sz="1200" dirty="0"/>
+          </a:p>
+        </p:txBody>
+      </p:sp>
+      <p:sp>
+        <p:nvSpPr>
+          <p:cNvPr id="12" name="Shape 9"/>
+          <p:cNvSpPr/>
+          <p:nvPr/>
+        </p:nvSpPr>
+        <p:spPr>
+          <a:xfrm>
+            <a:off x="6172200" y="1920240"/>
+            <a:ext cx="5349240" cy="4343400"/>
+          </a:xfrm>
+          <a:prstGeom prst="rect">
+            <a:avLst/>
+          </a:prstGeom>
+          <a:solidFill>
+            <a:srgbClr val="FFFFFF"/>
+          </a:solidFill>
+          <a:ln w="12700">
+            <a:solidFill>
+              <a:srgbClr val="E4E6E1"/>
+            </a:solidFill>
+            <a:prstDash val="solid"/>
+          </a:ln>
+          <a:effectLst>
+            <a:outerShdw sx="100000" sy="100000" kx="0" ky="0" algn="bl" rotWithShape="0" blurRad="101600" dist="38100" dir="8100000">
+              <a:srgbClr val="000000">
+                <a:alpha val="12000"/>
+              </a:srgbClr>
+            </a:outerShdw>
+          </a:effectLst>
+        </p:spPr>
+      </p:sp>
+      <p:sp>
+        <p:nvSpPr>
+          <p:cNvPr id="13" name="Shape 10"/>
+          <p:cNvSpPr/>
+          <p:nvPr/>
+        </p:nvSpPr>
+        <p:spPr>
+          <a:xfrm>
+            <a:off x="6172200" y="1920240"/>
+            <a:ext cx="5349240" cy="109728"/>
+          </a:xfrm>
+          <a:prstGeom prst="rect">
+            <a:avLst/>
+          </a:prstGeom>
+          <a:solidFill>
+            <a:srgbClr val="F5B800"/>
+          </a:solidFill>
+          <a:ln/>
+        </p:spPr>
+      </p:sp>
+      <p:sp>
+        <p:nvSpPr>
+          <p:cNvPr id="14" name="Shape 11"/>
+          <p:cNvSpPr/>
+          <p:nvPr/>
+        </p:nvSpPr>
+        <p:spPr>
+          <a:xfrm>
+            <a:off x="6400800" y="2194560"/>
+            <a:ext cx="548640" cy="548640"/>
+          </a:xfrm>
+          <a:prstGeom prst="ellipse">
+            <a:avLst/>
+          </a:prstGeom>
+          <a:solidFill>
+            <a:srgbClr val="093520"/>
+          </a:solidFill>
+          <a:ln/>
+        </p:spPr>
+      </p:sp>
+      <p:pic>
+        <p:nvPicPr>
+          <p:cNvPr id="15" name="Image 1" descr="preencoded.png">    </p:cNvPr>
+          <p:cNvPicPr>
+            <a:picLocks noChangeAspect="1"/>
+          </p:cNvPicPr>
+          <p:nvPr/>
+        </p:nvPicPr>
+        <p:blipFill>
+          <a:blip r:embed="rId3"/>
+          <a:stretch>
+            <a:fillRect/>
+          </a:stretch>
+        </p:blipFill>
+        <p:spPr>
+          <a:xfrm>
+            <a:off x="6543446" y="2337206"/>
+            <a:ext cx="263347" cy="263347"/>
+          </a:xfrm>
+          <a:prstGeom prst="rect">
+            <a:avLst/>
+          </a:prstGeom>
+        </p:spPr>
+      </p:pic>
+      <p:sp>
+        <p:nvSpPr>
+          <p:cNvPr id="16" name="Text 12"/>
+          <p:cNvSpPr/>
+          <p:nvPr/>
+        </p:nvSpPr>
+        <p:spPr>
+          <a:xfrm>
+            <a:off x="7086600" y="2194560"/>
+            <a:ext cx="4206240" cy="548640"/>
+          </a:xfrm>
+          <a:prstGeom prst="rect">
+            <a:avLst/>
+          </a:prstGeom>
+          <a:noFill/>
+          <a:ln/>
+        </p:spPr>
+        <p:txBody>
+          <a:bodyPr wrap="square" rtlCol="0" anchor="ctr"/>
+          <a:lstStyle/>
+          <a:p>
+            <a:pPr indent="0" marL="0">
+              <a:buNone/>
+            </a:pPr>
+            <a:r>
+              <a:rPr lang="en-US" sz="1600" b="1" dirty="0">
+                <a:solidFill>
+                  <a:srgbClr val="14160F"/>
+                </a:solidFill>
+                <a:latin typeface="Georgia" pitchFamily="34" charset="0"/>
+                <a:ea typeface="Georgia" pitchFamily="34" charset="-122"/>
+                <a:cs typeface="Georgia" pitchFamily="34" charset="-120"/>
+              </a:rPr>
+              <a:t>Уроки и инсайты</a:t>
+            </a:r>
+            <a:endParaRPr lang="en-US" sz="1600" dirty="0"/>
+          </a:p>
+        </p:txBody>
+      </p:sp>
+      <p:sp>
+        <p:nvSpPr>
+          <p:cNvPr id="17" name="Text 13"/>
+          <p:cNvSpPr/>
+          <p:nvPr/>
+        </p:nvSpPr>
+        <p:spPr>
+          <a:xfrm>
+            <a:off x="6446520" y="2926080"/>
+            <a:ext cx="4892040" cy="3200400"/>
+          </a:xfrm>
+          <a:prstGeom prst="rect">
+            <a:avLst/>
+          </a:prstGeom>
+          <a:noFill/>
+          <a:ln/>
+        </p:spPr>
+        <p:txBody>
+          <a:bodyPr wrap="square" rtlCol="0" anchor="t"/>
+          <a:lstStyle/>
+          <a:p>
+            <a:pPr marL="342900" indent="-342900">
+              <a:spcAft>
+                <a:spcPts val="1000"/>
+              </a:spcAft>
+              <a:buSzPct val="100000"/>
+              <a:buChar char="•"/>
+            </a:pPr>
+            <a:r>
+              <a:rPr lang="en-US" sz="1300" dirty="0">
+                <a:solidFill>
+                  <a:srgbClr val="14160F"/>
+                </a:solidFill>
+                <a:latin typeface="Calibri" pitchFamily="34" charset="0"/>
+                <a:ea typeface="Calibri" pitchFamily="34" charset="-122"/>
+                <a:cs typeface="Calibri" pitchFamily="34" charset="-120"/>
+              </a:rPr>
+              <a:t>Генерация по блокам дала объём ×3 (≈15 КБ, РоВ-уровень) — масштаб числом блоков, а не «уговорами» модели</a:t>
+            </a:r>
+            <a:endParaRPr lang="en-US" sz="1300" dirty="0"/>
+          </a:p>
+          <a:p>
+            <a:pPr marL="342900" indent="-342900">
+              <a:spcAft>
+                <a:spcPts val="1000"/>
+              </a:spcAft>
+              <a:buSzPct val="100000"/>
+              <a:buChar char="•"/>
+            </a:pPr>
+            <a:r>
+              <a:rPr lang="en-US" sz="1300" dirty="0">
+                <a:solidFill>
+                  <a:srgbClr val="14160F"/>
+                </a:solidFill>
+                <a:latin typeface="Calibri" pitchFamily="34" charset="0"/>
+                <a:ea typeface="Calibri" pitchFamily="34" charset="-122"/>
+                <a:cs typeface="Calibri" pitchFamily="34" charset="-120"/>
+              </a:rPr>
+              <a:t>Гейт качества без LLM-судьи: детерминированные проверки длины, многоходовости «Учитель: …» и числа вопросов — LLM-судья оказался ненадёжным</a:t>
+            </a:r>
+            <a:endParaRPr lang="en-US" sz="1300" dirty="0"/>
+          </a:p>
+          <a:p>
+            <a:pPr marL="342900" indent="-342900">
+              <a:spcAft>
+                <a:spcPts val="1000"/>
+              </a:spcAft>
+              <a:buSzPct val="100000"/>
+              <a:buChar char="•"/>
+            </a:pPr>
+            <a:r>
+              <a:rPr lang="en-US" sz="1300" b="1" dirty="0">
+                <a:solidFill>
+                  <a:srgbClr val="B07800"/>
+                </a:solidFill>
+                <a:latin typeface="Calibri" pitchFamily="34" charset="0"/>
+                <a:ea typeface="Calibri" pitchFamily="34" charset="-122"/>
+                <a:cs typeface="Calibri" pitchFamily="34" charset="-120"/>
+              </a:rPr>
+              <a:t>Главный урок: статика и моки не ловят баги живой модели (пустой adaptations, формат «дебаты») — обязателен живой прогон</a:t>
+            </a:r>
+            <a:endParaRPr lang="en-US" sz="1300" dirty="0"/>
+          </a:p>
+        </p:txBody>
+      </p:sp>
+    </p:spTree>
+  </p:cSld>
+  <p:clrMapOvr>
+    <a:masterClrMapping/>
+  </p:clrMapOvr>
+</p:sld>
+</file>
+
 <file path=ppt/slides/slide2.xml><?xml version="1.0" encoding="utf-8"?>
 <p:sld xmlns:a="http://schemas.openxmlformats.org/drawingml/2006/main" xmlns:r="http://schemas.openxmlformats.org/officeDocument/2006/relationships" xmlns:p="http://schemas.openxmlformats.org/presentationml/2006/main">
   <p:cSld name="Slide 2">

--- a/artifacts/Planwise-Klassniy-Chas.pptx
+++ b/artifacts/Planwise-Klassniy-Chas.pptx
@@ -17,9 +17,10 @@
     <p:sldId id="265" r:id="rId11"/>
     <p:sldId id="266" r:id="rId12"/>
     <p:sldId id="267" r:id="rId13"/>
+    <p:sldId id="268" r:id="rId14"/>
   </p:sldIdLst>
   <p:notesMasterIdLst>
-    <p:notesMasterId r:id="rId14"/>
+    <p:notesMasterId r:id="rId15"/>
   </p:notesMasterIdLst>
   <p:sldSz cx="12192000" cy="6858000"/>
   <p:notesSz cx="6858000" cy="12192000"/>
@@ -801,6 +802,94 @@
             <a:fld id="{F7021451-1387-4CA6-816F-3879F97B5CBC}" type="slidenum">
               <a:rPr lang="en-US"/>
               <a:t>12</a:t>
+            </a:fld>
+            <a:endParaRPr lang="en-US"/>
+          </a:p>
+        </p:txBody>
+      </p:sp>
+    </p:spTree>
+    <p:extLst>
+      <p:ext uri="{BB962C8B-B14F-4D97-AF65-F5344CB8AC3E}">
+        <p14:creationId xmlns:p14="http://schemas.microsoft.com/office/powerpoint/2010/main" val="1024086991"/>
+      </p:ext>
+    </p:extLst>
+  </p:cSld>
+  <p:clrMapOvr>
+    <a:masterClrMapping/>
+  </p:clrMapOvr>
+</p:notes>
+</file>
+
+<file path=ppt/notesSlides/notesSlide13.xml><?xml version="1.0" encoding="utf-8"?>
+<p:notes xmlns:a="http://schemas.openxmlformats.org/drawingml/2006/main" xmlns:r="http://schemas.openxmlformats.org/officeDocument/2006/relationships" xmlns:p="http://schemas.openxmlformats.org/presentationml/2006/main">
+  <p:cSld>
+    <p:spTree>
+      <p:nvGrpSpPr>
+        <p:cNvPr id="1" name=""/>
+        <p:cNvGrpSpPr/>
+        <p:nvPr/>
+      </p:nvGrpSpPr>
+      <p:grpSpPr>
+        <a:xfrm>
+          <a:off x="0" y="0"/>
+          <a:ext cx="0" cy="0"/>
+          <a:chOff x="0" y="0"/>
+          <a:chExt cx="0" cy="0"/>
+        </a:xfrm>
+      </p:grpSpPr>
+      <p:sp>
+        <p:nvSpPr>
+          <p:cNvPr id="2" name="Slide Image Placeholder 1"/>
+          <p:cNvSpPr>
+            <a:spLocks noGrp="1" noRot="1" noChangeAspect="1"/>
+          </p:cNvSpPr>
+          <p:nvPr>
+            <p:ph type="sldImg"/>
+          </p:nvPr>
+        </p:nvSpPr>
+        <p:spPr/>
+      </p:sp>
+      <p:sp>
+        <p:nvSpPr>
+          <p:cNvPr id="3" name="Notes Placeholder 2"/>
+          <p:cNvSpPr>
+            <a:spLocks noGrp="1"/>
+          </p:cNvSpPr>
+          <p:nvPr>
+            <p:ph type="body" idx="1"/>
+          </p:nvPr>
+        </p:nvSpPr>
+        <p:spPr/>
+        <p:txBody>
+          <a:bodyPr/>
+          <a:lstStyle/>
+          <a:p>
+            <a:r>
+              <a:rPr lang="en-US" dirty="0"/>
+              <a:t/>
+            </a:r>
+            <a:endParaRPr lang="en-US" dirty="0"/>
+          </a:p>
+        </p:txBody>
+      </p:sp>
+      <p:sp>
+        <p:nvSpPr>
+          <p:cNvPr id="4" name="Slide Number Placeholder 3"/>
+          <p:cNvSpPr>
+            <a:spLocks noGrp="1"/>
+          </p:cNvSpPr>
+          <p:nvPr>
+            <p:ph type="sldNum" sz="quarter" idx="10"/>
+          </p:nvPr>
+        </p:nvSpPr>
+        <p:spPr/>
+        <p:txBody>
+          <a:bodyPr/>
+          <a:lstStyle/>
+          <a:p>
+            <a:fld id="{F7021451-1387-4CA6-816F-3879F97B5CBC}" type="slidenum">
+              <a:rPr lang="en-US"/>
+              <a:t>13</a:t>
             </a:fld>
             <a:endParaRPr lang="en-US"/>
           </a:p>
@@ -5436,6 +5525,1039 @@
 </p:sld>
 </file>
 
+<file path=ppt/slides/slide13.xml><?xml version="1.0" encoding="utf-8"?>
+<p:sld xmlns:a="http://schemas.openxmlformats.org/drawingml/2006/main" xmlns:r="http://schemas.openxmlformats.org/officeDocument/2006/relationships" xmlns:p="http://schemas.openxmlformats.org/presentationml/2006/main">
+  <p:cSld name="Slide 13">
+    <p:bg>
+      <p:bgPr>
+        <a:solidFill>
+          <a:srgbClr val="F8F9F7"/>
+        </a:solidFill>
+      </p:bgPr>
+    </p:bg>
+    <p:spTree>
+      <p:nvGrpSpPr>
+        <p:cNvPr id="1" name=""/>
+        <p:cNvGrpSpPr/>
+        <p:nvPr/>
+      </p:nvGrpSpPr>
+      <p:grpSpPr>
+        <a:xfrm>
+          <a:off x="0" y="0"/>
+          <a:ext cx="0" cy="0"/>
+          <a:chOff x="0" y="0"/>
+          <a:chExt cx="0" cy="0"/>
+        </a:xfrm>
+      </p:grpSpPr>
+      <p:sp>
+        <p:nvSpPr>
+          <p:cNvPr id="2" name="Shape 0"/>
+          <p:cNvSpPr/>
+          <p:nvPr/>
+        </p:nvSpPr>
+        <p:spPr>
+          <a:xfrm>
+            <a:off x="640080" y="566928"/>
+            <a:ext cx="310896" cy="310896"/>
+          </a:xfrm>
+          <a:prstGeom prst="rect">
+            <a:avLst/>
+          </a:prstGeom>
+          <a:solidFill>
+            <a:srgbClr val="F5B800"/>
+          </a:solidFill>
+          <a:ln/>
+        </p:spPr>
+      </p:sp>
+      <p:sp>
+        <p:nvSpPr>
+          <p:cNvPr id="3" name="Text 1"/>
+          <p:cNvSpPr/>
+          <p:nvPr/>
+        </p:nvSpPr>
+        <p:spPr>
+          <a:xfrm>
+            <a:off x="1060704" y="457200"/>
+            <a:ext cx="8229600" cy="502920"/>
+          </a:xfrm>
+          <a:prstGeom prst="rect">
+            <a:avLst/>
+          </a:prstGeom>
+          <a:noFill/>
+          <a:ln/>
+        </p:spPr>
+        <p:txBody>
+          <a:bodyPr wrap="square" rtlCol="0" anchor="ctr"/>
+          <a:lstStyle/>
+          <a:p>
+            <a:pPr indent="0" marL="0">
+              <a:buNone/>
+            </a:pPr>
+            <a:r>
+              <a:rPr lang="en-US" sz="1300" b="1" spc="200" kern="0" dirty="0">
+                <a:solidFill>
+                  <a:srgbClr val="21A663"/>
+                </a:solidFill>
+                <a:latin typeface="Calibri" pitchFamily="34" charset="0"/>
+                <a:ea typeface="Calibri" pitchFamily="34" charset="-122"/>
+                <a:cs typeface="Calibri" pitchFamily="34" charset="-120"/>
+              </a:rPr>
+              <a:t>+ ЧТО ДАЛЬШЕ</a:t>
+            </a:r>
+            <a:endParaRPr lang="en-US" sz="1300" dirty="0"/>
+          </a:p>
+        </p:txBody>
+      </p:sp>
+      <p:sp>
+        <p:nvSpPr>
+          <p:cNvPr id="4" name="Text 2"/>
+          <p:cNvSpPr/>
+          <p:nvPr/>
+        </p:nvSpPr>
+        <p:spPr>
+          <a:xfrm>
+            <a:off x="640080" y="868680"/>
+            <a:ext cx="10881360" cy="868680"/>
+          </a:xfrm>
+          <a:prstGeom prst="rect">
+            <a:avLst/>
+          </a:prstGeom>
+          <a:noFill/>
+          <a:ln/>
+        </p:spPr>
+        <p:txBody>
+          <a:bodyPr wrap="square" rtlCol="0" anchor="ctr"/>
+          <a:lstStyle/>
+          <a:p>
+            <a:pPr indent="0" marL="0">
+              <a:buNone/>
+            </a:pPr>
+            <a:r>
+              <a:rPr lang="en-US" sz="3200" b="1" dirty="0">
+                <a:solidFill>
+                  <a:srgbClr val="14160F"/>
+                </a:solidFill>
+                <a:latin typeface="Georgia" pitchFamily="34" charset="0"/>
+                <a:ea typeface="Georgia" pitchFamily="34" charset="-122"/>
+                <a:cs typeface="Georgia" pitchFamily="34" charset="-120"/>
+              </a:rPr>
+              <a:t>В работе и в дорожной карте</a:t>
+            </a:r>
+            <a:endParaRPr lang="en-US" sz="3200" dirty="0"/>
+          </a:p>
+        </p:txBody>
+      </p:sp>
+      <p:sp>
+        <p:nvSpPr>
+          <p:cNvPr id="5" name="Text 3"/>
+          <p:cNvSpPr/>
+          <p:nvPr/>
+        </p:nvSpPr>
+        <p:spPr>
+          <a:xfrm>
+            <a:off x="640080" y="1691640"/>
+            <a:ext cx="10881360" cy="365760"/>
+          </a:xfrm>
+          <a:prstGeom prst="rect">
+            <a:avLst/>
+          </a:prstGeom>
+          <a:noFill/>
+          <a:ln/>
+        </p:spPr>
+        <p:txBody>
+          <a:bodyPr wrap="square" rtlCol="0" anchor="ctr"/>
+          <a:lstStyle/>
+          <a:p>
+            <a:pPr indent="0" marL="0">
+              <a:buNone/>
+            </a:pPr>
+            <a:r>
+              <a:rPr lang="en-US" sz="1300" i="1" dirty="0">
+                <a:solidFill>
+                  <a:srgbClr val="717670"/>
+                </a:solidFill>
+                <a:latin typeface="Calibri" pitchFamily="34" charset="0"/>
+                <a:ea typeface="Calibri" pitchFamily="34" charset="-122"/>
+                <a:cs typeface="Calibri" pitchFamily="34" charset="-120"/>
+              </a:rPr>
+              <a:t>Конкретные доработки из бэклога — что уже в работе и в ближайших спринтах после MVP</a:t>
+            </a:r>
+            <a:endParaRPr lang="en-US" sz="1300" dirty="0"/>
+          </a:p>
+        </p:txBody>
+      </p:sp>
+      <p:sp>
+        <p:nvSpPr>
+          <p:cNvPr id="6" name="Shape 4"/>
+          <p:cNvSpPr/>
+          <p:nvPr/>
+        </p:nvSpPr>
+        <p:spPr>
+          <a:xfrm>
+            <a:off x="640080" y="2194560"/>
+            <a:ext cx="3520440" cy="4160520"/>
+          </a:xfrm>
+          <a:prstGeom prst="rect">
+            <a:avLst/>
+          </a:prstGeom>
+          <a:solidFill>
+            <a:srgbClr val="FFFFFF"/>
+          </a:solidFill>
+          <a:ln w="12700">
+            <a:solidFill>
+              <a:srgbClr val="E4E6E1"/>
+            </a:solidFill>
+            <a:prstDash val="solid"/>
+          </a:ln>
+          <a:effectLst>
+            <a:outerShdw sx="100000" sy="100000" kx="0" ky="0" algn="bl" rotWithShape="0" blurRad="101600" dist="38100" dir="8100000">
+              <a:srgbClr val="000000">
+                <a:alpha val="12000"/>
+              </a:srgbClr>
+            </a:outerShdw>
+          </a:effectLst>
+        </p:spPr>
+      </p:sp>
+      <p:sp>
+        <p:nvSpPr>
+          <p:cNvPr id="7" name="Shape 5"/>
+          <p:cNvSpPr/>
+          <p:nvPr/>
+        </p:nvSpPr>
+        <p:spPr>
+          <a:xfrm>
+            <a:off x="640080" y="2194560"/>
+            <a:ext cx="3520440" cy="777240"/>
+          </a:xfrm>
+          <a:prstGeom prst="rect">
+            <a:avLst/>
+          </a:prstGeom>
+          <a:solidFill>
+            <a:srgbClr val="093520"/>
+          </a:solidFill>
+          <a:ln/>
+        </p:spPr>
+      </p:sp>
+      <p:sp>
+        <p:nvSpPr>
+          <p:cNvPr id="8" name="Shape 6"/>
+          <p:cNvSpPr/>
+          <p:nvPr/>
+        </p:nvSpPr>
+        <p:spPr>
+          <a:xfrm>
+            <a:off x="841248" y="2304288"/>
+            <a:ext cx="548640" cy="548640"/>
+          </a:xfrm>
+          <a:prstGeom prst="ellipse">
+            <a:avLst/>
+          </a:prstGeom>
+          <a:solidFill>
+            <a:srgbClr val="F5B800"/>
+          </a:solidFill>
+          <a:ln/>
+        </p:spPr>
+      </p:sp>
+      <p:pic>
+        <p:nvPicPr>
+          <p:cNvPr id="9" name="Image 0" descr="preencoded.png">    </p:cNvPr>
+          <p:cNvPicPr>
+            <a:picLocks noChangeAspect="1"/>
+          </p:cNvPicPr>
+          <p:nvPr/>
+        </p:nvPicPr>
+        <p:blipFill>
+          <a:blip r:embed="rId1"/>
+          <a:stretch>
+            <a:fillRect/>
+          </a:stretch>
+        </p:blipFill>
+        <p:spPr>
+          <a:xfrm>
+            <a:off x="983894" y="2446934"/>
+            <a:ext cx="263347" cy="263347"/>
+          </a:xfrm>
+          <a:prstGeom prst="rect">
+            <a:avLst/>
+          </a:prstGeom>
+        </p:spPr>
+      </p:pic>
+      <p:sp>
+        <p:nvSpPr>
+          <p:cNvPr id="10" name="Text 7"/>
+          <p:cNvSpPr/>
+          <p:nvPr/>
+        </p:nvSpPr>
+        <p:spPr>
+          <a:xfrm>
+            <a:off x="1508760" y="2212848"/>
+            <a:ext cx="2560320" cy="749808"/>
+          </a:xfrm>
+          <a:prstGeom prst="rect">
+            <a:avLst/>
+          </a:prstGeom>
+          <a:noFill/>
+          <a:ln/>
+        </p:spPr>
+        <p:txBody>
+          <a:bodyPr wrap="square" rtlCol="0" anchor="ctr"/>
+          <a:lstStyle/>
+          <a:p>
+            <a:pPr indent="0" marL="0">
+              <a:buNone/>
+            </a:pPr>
+            <a:r>
+              <a:rPr lang="en-US" sz="1400" b="1" dirty="0">
+                <a:solidFill>
+                  <a:srgbClr val="FFFFFF"/>
+                </a:solidFill>
+                <a:latin typeface="Georgia" pitchFamily="34" charset="0"/>
+                <a:ea typeface="Georgia" pitchFamily="34" charset="-122"/>
+                <a:cs typeface="Georgia" pitchFamily="34" charset="-120"/>
+              </a:rPr>
+              <a:t>Продукт для учителя</a:t>
+            </a:r>
+            <a:endParaRPr lang="en-US" sz="1400" dirty="0"/>
+          </a:p>
+        </p:txBody>
+      </p:sp>
+      <p:sp>
+        <p:nvSpPr>
+          <p:cNvPr id="11" name="Text 8"/>
+          <p:cNvSpPr/>
+          <p:nvPr/>
+        </p:nvSpPr>
+        <p:spPr>
+          <a:xfrm>
+            <a:off x="868680" y="3108960"/>
+            <a:ext cx="3108960" cy="3154680"/>
+          </a:xfrm>
+          <a:prstGeom prst="rect">
+            <a:avLst/>
+          </a:prstGeom>
+          <a:noFill/>
+          <a:ln/>
+        </p:spPr>
+        <p:txBody>
+          <a:bodyPr wrap="square" rtlCol="0" anchor="t"/>
+          <a:lstStyle/>
+          <a:p>
+            <a:pPr marL="342900" indent="-342900">
+              <a:spcAft>
+                <a:spcPts val="600"/>
+              </a:spcAft>
+              <a:buSzPct val="100000"/>
+              <a:buChar char="•"/>
+            </a:pPr>
+            <a:r>
+              <a:rPr lang="en-US" sz="1150" dirty="0">
+                <a:solidFill>
+                  <a:srgbClr val="14160F"/>
+                </a:solidFill>
+                <a:latin typeface="Calibri" pitchFamily="34" charset="0"/>
+                <a:ea typeface="Calibri" pitchFamily="34" charset="-122"/>
+                <a:cs typeface="Calibri" pitchFamily="34" charset="-120"/>
+              </a:rPr>
+              <a:t>Кастомные инструкции — «стиль учителя» (тон, игровость, ОВЗ)</a:t>
+            </a:r>
+            <a:endParaRPr lang="en-US" sz="1150" dirty="0"/>
+          </a:p>
+          <a:p>
+            <a:pPr marL="342900" indent="-342900">
+              <a:spcAft>
+                <a:spcPts val="600"/>
+              </a:spcAft>
+              <a:buSzPct val="100000"/>
+              <a:buChar char="•"/>
+            </a:pPr>
+            <a:r>
+              <a:rPr lang="en-US" sz="1150" dirty="0">
+                <a:solidFill>
+                  <a:srgbClr val="14160F"/>
+                </a:solidFill>
+                <a:latin typeface="Calibri" pitchFamily="34" charset="0"/>
+                <a:ea typeface="Calibri" pitchFamily="34" charset="-122"/>
+                <a:cs typeface="Calibri" pitchFamily="34" charset="-120"/>
+              </a:rPr>
+              <a:t>Адаптация сценария под другой класс / длительность одной кнопкой</a:t>
+            </a:r>
+            <a:endParaRPr lang="en-US" sz="1150" dirty="0"/>
+          </a:p>
+          <a:p>
+            <a:pPr marL="342900" indent="-342900">
+              <a:spcAft>
+                <a:spcPts val="600"/>
+              </a:spcAft>
+              <a:buSzPct val="100000"/>
+              <a:buChar char="•"/>
+            </a:pPr>
+            <a:r>
+              <a:rPr lang="en-US" sz="1150" dirty="0">
+                <a:solidFill>
+                  <a:srgbClr val="14160F"/>
+                </a:solidFill>
+                <a:latin typeface="Calibri" pitchFamily="34" charset="0"/>
+                <a:ea typeface="Calibri" pitchFamily="34" charset="-122"/>
+                <a:cs typeface="Calibri" pitchFamily="34" charset="-120"/>
+              </a:rPr>
+              <a:t>Предпросмотр документа перед экспортом</a:t>
+            </a:r>
+            <a:endParaRPr lang="en-US" sz="1150" dirty="0"/>
+          </a:p>
+          <a:p>
+            <a:pPr marL="342900" indent="-342900">
+              <a:spcAft>
+                <a:spcPts val="600"/>
+              </a:spcAft>
+              <a:buSzPct val="100000"/>
+              <a:buChar char="•"/>
+            </a:pPr>
+            <a:r>
+              <a:rPr lang="en-US" sz="1150" dirty="0">
+                <a:solidFill>
+                  <a:srgbClr val="14160F"/>
+                </a:solidFill>
+                <a:latin typeface="Calibri" pitchFamily="34" charset="0"/>
+                <a:ea typeface="Calibri" pitchFamily="34" charset="-122"/>
+                <a:cs typeface="Calibri" pitchFamily="34" charset="-120"/>
+              </a:rPr>
+              <a:t>Режим проведения с телефона + потоковый текст блока в реальном времени</a:t>
+            </a:r>
+            <a:endParaRPr lang="en-US" sz="1150" dirty="0"/>
+          </a:p>
+          <a:p>
+            <a:pPr marL="342900" indent="-342900">
+              <a:spcAft>
+                <a:spcPts val="600"/>
+              </a:spcAft>
+              <a:buSzPct val="100000"/>
+              <a:buChar char="•"/>
+            </a:pPr>
+            <a:r>
+              <a:rPr lang="en-US" sz="1150" dirty="0">
+                <a:solidFill>
+                  <a:srgbClr val="14160F"/>
+                </a:solidFill>
+                <a:latin typeface="Calibri" pitchFamily="34" charset="0"/>
+                <a:ea typeface="Calibri" pitchFamily="34" charset="-122"/>
+                <a:cs typeface="Calibri" pitchFamily="34" charset="-120"/>
+              </a:rPr>
+              <a:t>Загрузка плана картинкой (OCR) — фото с телефона</a:t>
+            </a:r>
+            <a:endParaRPr lang="en-US" sz="1150" dirty="0"/>
+          </a:p>
+        </p:txBody>
+      </p:sp>
+      <p:sp>
+        <p:nvSpPr>
+          <p:cNvPr id="12" name="Shape 9"/>
+          <p:cNvSpPr/>
+          <p:nvPr/>
+        </p:nvSpPr>
+        <p:spPr>
+          <a:xfrm>
+            <a:off x="4343400" y="2194560"/>
+            <a:ext cx="3520440" cy="4160520"/>
+          </a:xfrm>
+          <a:prstGeom prst="rect">
+            <a:avLst/>
+          </a:prstGeom>
+          <a:solidFill>
+            <a:srgbClr val="FFFFFF"/>
+          </a:solidFill>
+          <a:ln w="12700">
+            <a:solidFill>
+              <a:srgbClr val="E4E6E1"/>
+            </a:solidFill>
+            <a:prstDash val="solid"/>
+          </a:ln>
+          <a:effectLst>
+            <a:outerShdw sx="100000" sy="100000" kx="0" ky="0" algn="bl" rotWithShape="0" blurRad="101600" dist="38100" dir="8100000">
+              <a:srgbClr val="000000">
+                <a:alpha val="12000"/>
+              </a:srgbClr>
+            </a:outerShdw>
+          </a:effectLst>
+        </p:spPr>
+      </p:sp>
+      <p:sp>
+        <p:nvSpPr>
+          <p:cNvPr id="13" name="Shape 10"/>
+          <p:cNvSpPr/>
+          <p:nvPr/>
+        </p:nvSpPr>
+        <p:spPr>
+          <a:xfrm>
+            <a:off x="4343400" y="2194560"/>
+            <a:ext cx="3520440" cy="777240"/>
+          </a:xfrm>
+          <a:prstGeom prst="rect">
+            <a:avLst/>
+          </a:prstGeom>
+          <a:solidFill>
+            <a:srgbClr val="0E4F30"/>
+          </a:solidFill>
+          <a:ln/>
+        </p:spPr>
+      </p:sp>
+      <p:sp>
+        <p:nvSpPr>
+          <p:cNvPr id="14" name="Shape 11"/>
+          <p:cNvSpPr/>
+          <p:nvPr/>
+        </p:nvSpPr>
+        <p:spPr>
+          <a:xfrm>
+            <a:off x="4544568" y="2304288"/>
+            <a:ext cx="548640" cy="548640"/>
+          </a:xfrm>
+          <a:prstGeom prst="ellipse">
+            <a:avLst/>
+          </a:prstGeom>
+          <a:solidFill>
+            <a:srgbClr val="F5B800"/>
+          </a:solidFill>
+          <a:ln/>
+        </p:spPr>
+      </p:sp>
+      <p:pic>
+        <p:nvPicPr>
+          <p:cNvPr id="15" name="Image 1" descr="preencoded.png">    </p:cNvPr>
+          <p:cNvPicPr>
+            <a:picLocks noChangeAspect="1"/>
+          </p:cNvPicPr>
+          <p:nvPr/>
+        </p:nvPicPr>
+        <p:blipFill>
+          <a:blip r:embed="rId2"/>
+          <a:stretch>
+            <a:fillRect/>
+          </a:stretch>
+        </p:blipFill>
+        <p:spPr>
+          <a:xfrm>
+            <a:off x="4687214" y="2446934"/>
+            <a:ext cx="263347" cy="263347"/>
+          </a:xfrm>
+          <a:prstGeom prst="rect">
+            <a:avLst/>
+          </a:prstGeom>
+        </p:spPr>
+      </p:pic>
+      <p:sp>
+        <p:nvSpPr>
+          <p:cNvPr id="16" name="Text 12"/>
+          <p:cNvSpPr/>
+          <p:nvPr/>
+        </p:nvSpPr>
+        <p:spPr>
+          <a:xfrm>
+            <a:off x="5212080" y="2212848"/>
+            <a:ext cx="2560320" cy="749808"/>
+          </a:xfrm>
+          <a:prstGeom prst="rect">
+            <a:avLst/>
+          </a:prstGeom>
+          <a:noFill/>
+          <a:ln/>
+        </p:spPr>
+        <p:txBody>
+          <a:bodyPr wrap="square" rtlCol="0" anchor="ctr"/>
+          <a:lstStyle/>
+          <a:p>
+            <a:pPr indent="0" marL="0">
+              <a:buNone/>
+            </a:pPr>
+            <a:r>
+              <a:rPr lang="en-US" sz="1400" b="1" dirty="0">
+                <a:solidFill>
+                  <a:srgbClr val="FFFFFF"/>
+                </a:solidFill>
+                <a:latin typeface="Georgia" pitchFamily="34" charset="0"/>
+                <a:ea typeface="Georgia" pitchFamily="34" charset="-122"/>
+                <a:cs typeface="Georgia" pitchFamily="34" charset="-120"/>
+              </a:rPr>
+              <a:t>Сообщество и обнаруживаемость</a:t>
+            </a:r>
+            <a:endParaRPr lang="en-US" sz="1400" dirty="0"/>
+          </a:p>
+        </p:txBody>
+      </p:sp>
+      <p:sp>
+        <p:nvSpPr>
+          <p:cNvPr id="17" name="Text 13"/>
+          <p:cNvSpPr/>
+          <p:nvPr/>
+        </p:nvSpPr>
+        <p:spPr>
+          <a:xfrm>
+            <a:off x="4572000" y="3108960"/>
+            <a:ext cx="3108960" cy="3154680"/>
+          </a:xfrm>
+          <a:prstGeom prst="rect">
+            <a:avLst/>
+          </a:prstGeom>
+          <a:noFill/>
+          <a:ln/>
+        </p:spPr>
+        <p:txBody>
+          <a:bodyPr wrap="square" rtlCol="0" anchor="t"/>
+          <a:lstStyle/>
+          <a:p>
+            <a:pPr marL="342900" indent="-342900">
+              <a:spcAft>
+                <a:spcPts val="600"/>
+              </a:spcAft>
+              <a:buSzPct val="100000"/>
+              <a:buChar char="•"/>
+            </a:pPr>
+            <a:r>
+              <a:rPr lang="en-US" sz="1150" dirty="0">
+                <a:solidFill>
+                  <a:srgbClr val="14160F"/>
+                </a:solidFill>
+                <a:latin typeface="Calibri" pitchFamily="34" charset="0"/>
+                <a:ea typeface="Calibri" pitchFamily="34" charset="-122"/>
+                <a:cs typeface="Calibri" pitchFamily="34" charset="-120"/>
+              </a:rPr>
+              <a:t>Комментарии и отзывы коллег под сценариями</a:t>
+            </a:r>
+            <a:endParaRPr lang="en-US" sz="1150" dirty="0"/>
+          </a:p>
+          <a:p>
+            <a:pPr marL="342900" indent="-342900">
+              <a:spcAft>
+                <a:spcPts val="600"/>
+              </a:spcAft>
+              <a:buSzPct val="100000"/>
+              <a:buChar char="•"/>
+            </a:pPr>
+            <a:r>
+              <a:rPr lang="en-US" sz="1150" dirty="0">
+                <a:solidFill>
+                  <a:srgbClr val="14160F"/>
+                </a:solidFill>
+                <a:latin typeface="Calibri" pitchFamily="34" charset="0"/>
+                <a:ea typeface="Calibri" pitchFamily="34" charset="-122"/>
+                <a:cs typeface="Calibri" pitchFamily="34" charset="-120"/>
+              </a:rPr>
+              <a:t>Теги и «топ недели» в библиотеке</a:t>
+            </a:r>
+            <a:endParaRPr lang="en-US" sz="1150" dirty="0"/>
+          </a:p>
+          <a:p>
+            <a:pPr marL="342900" indent="-342900">
+              <a:spcAft>
+                <a:spcPts val="600"/>
+              </a:spcAft>
+              <a:buSzPct val="100000"/>
+              <a:buChar char="•"/>
+            </a:pPr>
+            <a:r>
+              <a:rPr lang="en-US" sz="1150" dirty="0">
+                <a:solidFill>
+                  <a:srgbClr val="14160F"/>
+                </a:solidFill>
+                <a:latin typeface="Calibri" pitchFamily="34" charset="0"/>
+                <a:ea typeface="Calibri" pitchFamily="34" charset="-122"/>
+                <a:cs typeface="Calibri" pitchFamily="34" charset="-120"/>
+              </a:rPr>
+              <a:t>Модерация: «сообщить о проблеме» → admin</a:t>
+            </a:r>
+            <a:endParaRPr lang="en-US" sz="1150" dirty="0"/>
+          </a:p>
+          <a:p>
+            <a:pPr marL="342900" indent="-342900">
+              <a:spcAft>
+                <a:spcPts val="600"/>
+              </a:spcAft>
+              <a:buSzPct val="100000"/>
+              <a:buChar char="•"/>
+            </a:pPr>
+            <a:r>
+              <a:rPr lang="en-US" sz="1150" dirty="0">
+                <a:solidFill>
+                  <a:srgbClr val="14160F"/>
+                </a:solidFill>
+                <a:latin typeface="Calibri" pitchFamily="34" charset="0"/>
+                <a:ea typeface="Calibri" pitchFamily="34" charset="-122"/>
+                <a:cs typeface="Calibri" pitchFamily="34" charset="-120"/>
+              </a:rPr>
+              <a:t>Личная аналитика педагога: сценарии, направления, динамика</a:t>
+            </a:r>
+            <a:endParaRPr lang="en-US" sz="1150" dirty="0"/>
+          </a:p>
+          <a:p>
+            <a:pPr marL="342900" indent="-342900">
+              <a:spcAft>
+                <a:spcPts val="600"/>
+              </a:spcAft>
+              <a:buSzPct val="100000"/>
+              <a:buChar char="•"/>
+            </a:pPr>
+            <a:r>
+              <a:rPr lang="en-US" sz="1150" dirty="0">
+                <a:solidFill>
+                  <a:srgbClr val="14160F"/>
+                </a:solidFill>
+                <a:latin typeface="Calibri" pitchFamily="34" charset="0"/>
+                <a:ea typeface="Calibri" pitchFamily="34" charset="-122"/>
+                <a:cs typeface="Calibri" pitchFamily="34" charset="-120"/>
+              </a:rPr>
+              <a:t>Опц. публичные профили учителей (opt-in, репутация)</a:t>
+            </a:r>
+            <a:endParaRPr lang="en-US" sz="1150" dirty="0"/>
+          </a:p>
+        </p:txBody>
+      </p:sp>
+      <p:sp>
+        <p:nvSpPr>
+          <p:cNvPr id="18" name="Shape 14"/>
+          <p:cNvSpPr/>
+          <p:nvPr/>
+        </p:nvSpPr>
+        <p:spPr>
+          <a:xfrm>
+            <a:off x="8046720" y="2194560"/>
+            <a:ext cx="3520440" cy="4160520"/>
+          </a:xfrm>
+          <a:prstGeom prst="rect">
+            <a:avLst/>
+          </a:prstGeom>
+          <a:solidFill>
+            <a:srgbClr val="FFFFFF"/>
+          </a:solidFill>
+          <a:ln w="12700">
+            <a:solidFill>
+              <a:srgbClr val="E4E6E1"/>
+            </a:solidFill>
+            <a:prstDash val="solid"/>
+          </a:ln>
+          <a:effectLst>
+            <a:outerShdw sx="100000" sy="100000" kx="0" ky="0" algn="bl" rotWithShape="0" blurRad="101600" dist="38100" dir="8100000">
+              <a:srgbClr val="000000">
+                <a:alpha val="12000"/>
+              </a:srgbClr>
+            </a:outerShdw>
+          </a:effectLst>
+        </p:spPr>
+      </p:sp>
+      <p:sp>
+        <p:nvSpPr>
+          <p:cNvPr id="19" name="Shape 15"/>
+          <p:cNvSpPr/>
+          <p:nvPr/>
+        </p:nvSpPr>
+        <p:spPr>
+          <a:xfrm>
+            <a:off x="8046720" y="2194560"/>
+            <a:ext cx="3520440" cy="777240"/>
+          </a:xfrm>
+          <a:prstGeom prst="rect">
+            <a:avLst/>
+          </a:prstGeom>
+          <a:solidFill>
+            <a:srgbClr val="093520"/>
+          </a:solidFill>
+          <a:ln/>
+        </p:spPr>
+      </p:sp>
+      <p:sp>
+        <p:nvSpPr>
+          <p:cNvPr id="20" name="Shape 16"/>
+          <p:cNvSpPr/>
+          <p:nvPr/>
+        </p:nvSpPr>
+        <p:spPr>
+          <a:xfrm>
+            <a:off x="8247888" y="2304288"/>
+            <a:ext cx="548640" cy="548640"/>
+          </a:xfrm>
+          <a:prstGeom prst="ellipse">
+            <a:avLst/>
+          </a:prstGeom>
+          <a:solidFill>
+            <a:srgbClr val="F5B800"/>
+          </a:solidFill>
+          <a:ln/>
+        </p:spPr>
+      </p:sp>
+      <p:pic>
+        <p:nvPicPr>
+          <p:cNvPr id="21" name="Image 2" descr="preencoded.png">    </p:cNvPr>
+          <p:cNvPicPr>
+            <a:picLocks noChangeAspect="1"/>
+          </p:cNvPicPr>
+          <p:nvPr/>
+        </p:nvPicPr>
+        <p:blipFill>
+          <a:blip r:embed="rId3"/>
+          <a:stretch>
+            <a:fillRect/>
+          </a:stretch>
+        </p:blipFill>
+        <p:spPr>
+          <a:xfrm>
+            <a:off x="8390534" y="2446934"/>
+            <a:ext cx="263347" cy="263347"/>
+          </a:xfrm>
+          <a:prstGeom prst="rect">
+            <a:avLst/>
+          </a:prstGeom>
+        </p:spPr>
+      </p:pic>
+      <p:sp>
+        <p:nvSpPr>
+          <p:cNvPr id="22" name="Text 17"/>
+          <p:cNvSpPr/>
+          <p:nvPr/>
+        </p:nvSpPr>
+        <p:spPr>
+          <a:xfrm>
+            <a:off x="8915400" y="2212848"/>
+            <a:ext cx="2560320" cy="749808"/>
+          </a:xfrm>
+          <a:prstGeom prst="rect">
+            <a:avLst/>
+          </a:prstGeom>
+          <a:noFill/>
+          <a:ln/>
+        </p:spPr>
+        <p:txBody>
+          <a:bodyPr wrap="square" rtlCol="0" anchor="ctr"/>
+          <a:lstStyle/>
+          <a:p>
+            <a:pPr indent="0" marL="0">
+              <a:buNone/>
+            </a:pPr>
+            <a:r>
+              <a:rPr lang="en-US" sz="1400" b="1" dirty="0">
+                <a:solidFill>
+                  <a:srgbClr val="FFFFFF"/>
+                </a:solidFill>
+                <a:latin typeface="Georgia" pitchFamily="34" charset="0"/>
+                <a:ea typeface="Georgia" pitchFamily="34" charset="-122"/>
+                <a:cs typeface="Georgia" pitchFamily="34" charset="-120"/>
+              </a:rPr>
+              <a:t>Масштаб и качество</a:t>
+            </a:r>
+            <a:endParaRPr lang="en-US" sz="1400" dirty="0"/>
+          </a:p>
+        </p:txBody>
+      </p:sp>
+      <p:sp>
+        <p:nvSpPr>
+          <p:cNvPr id="23" name="Text 18"/>
+          <p:cNvSpPr/>
+          <p:nvPr/>
+        </p:nvSpPr>
+        <p:spPr>
+          <a:xfrm>
+            <a:off x="8275320" y="3108960"/>
+            <a:ext cx="3108960" cy="3154680"/>
+          </a:xfrm>
+          <a:prstGeom prst="rect">
+            <a:avLst/>
+          </a:prstGeom>
+          <a:noFill/>
+          <a:ln/>
+        </p:spPr>
+        <p:txBody>
+          <a:bodyPr wrap="square" rtlCol="0" anchor="t"/>
+          <a:lstStyle/>
+          <a:p>
+            <a:pPr marL="342900" indent="-342900">
+              <a:spcAft>
+                <a:spcPts val="600"/>
+              </a:spcAft>
+              <a:buSzPct val="100000"/>
+              <a:buChar char="•"/>
+            </a:pPr>
+            <a:r>
+              <a:rPr lang="en-US" sz="1150" dirty="0">
+                <a:solidFill>
+                  <a:srgbClr val="14160F"/>
+                </a:solidFill>
+                <a:latin typeface="Calibri" pitchFamily="34" charset="0"/>
+                <a:ea typeface="Calibri" pitchFamily="34" charset="-122"/>
+                <a:cs typeface="Calibri" pitchFamily="34" charset="-120"/>
+              </a:rPr>
+              <a:t>Очередь + семафор к GigaChat — под рост тарифной концурентности</a:t>
+            </a:r>
+            <a:endParaRPr lang="en-US" sz="1150" dirty="0"/>
+          </a:p>
+          <a:p>
+            <a:pPr marL="342900" indent="-342900">
+              <a:spcAft>
+                <a:spcPts val="600"/>
+              </a:spcAft>
+              <a:buSzPct val="100000"/>
+              <a:buChar char="•"/>
+            </a:pPr>
+            <a:r>
+              <a:rPr lang="en-US" sz="1150" dirty="0">
+                <a:solidFill>
+                  <a:srgbClr val="14160F"/>
+                </a:solidFill>
+                <a:latin typeface="Calibri" pitchFamily="34" charset="0"/>
+                <a:ea typeface="Calibri" pitchFamily="34" charset="-122"/>
+                <a:cs typeface="Calibri" pitchFamily="34" charset="-120"/>
+              </a:rPr>
+              <a:t>Дашборд качества генерации (тонкие блоки, предупреждения)</a:t>
+            </a:r>
+            <a:endParaRPr lang="en-US" sz="1150" dirty="0"/>
+          </a:p>
+          <a:p>
+            <a:pPr marL="342900" indent="-342900">
+              <a:spcAft>
+                <a:spcPts val="600"/>
+              </a:spcAft>
+              <a:buSzPct val="100000"/>
+              <a:buChar char="•"/>
+            </a:pPr>
+            <a:r>
+              <a:rPr lang="en-US" sz="1150" dirty="0">
+                <a:solidFill>
+                  <a:srgbClr val="14160F"/>
+                </a:solidFill>
+                <a:latin typeface="Calibri" pitchFamily="34" charset="0"/>
+                <a:ea typeface="Calibri" pitchFamily="34" charset="-122"/>
+                <a:cs typeface="Calibri" pitchFamily="34" charset="-120"/>
+              </a:rPr>
+              <a:t>Кеш эмбеддингов популярных тем — экономия токенов</a:t>
+            </a:r>
+            <a:endParaRPr lang="en-US" sz="1150" dirty="0"/>
+          </a:p>
+          <a:p>
+            <a:pPr marL="342900" indent="-342900">
+              <a:spcAft>
+                <a:spcPts val="600"/>
+              </a:spcAft>
+              <a:buSzPct val="100000"/>
+              <a:buChar char="•"/>
+            </a:pPr>
+            <a:r>
+              <a:rPr lang="en-US" sz="1150" dirty="0">
+                <a:solidFill>
+                  <a:srgbClr val="14160F"/>
+                </a:solidFill>
+                <a:latin typeface="Calibri" pitchFamily="34" charset="0"/>
+                <a:ea typeface="Calibri" pitchFamily="34" charset="-122"/>
+                <a:cs typeface="Calibri" pitchFamily="34" charset="-120"/>
+              </a:rPr>
+              <a:t>Отчёт завучу: XLSX-выгрузка по проведённым занятиям</a:t>
+            </a:r>
+            <a:endParaRPr lang="en-US" sz="1150" dirty="0"/>
+          </a:p>
+          <a:p>
+            <a:pPr marL="342900" indent="-342900">
+              <a:spcAft>
+                <a:spcPts val="600"/>
+              </a:spcAft>
+              <a:buSzPct val="100000"/>
+              <a:buChar char="•"/>
+            </a:pPr>
+            <a:r>
+              <a:rPr lang="en-US" sz="1150" dirty="0">
+                <a:solidFill>
+                  <a:srgbClr val="14160F"/>
+                </a:solidFill>
+                <a:latin typeface="Calibri" pitchFamily="34" charset="0"/>
+                <a:ea typeface="Calibri" pitchFamily="34" charset="-122"/>
+                <a:cs typeface="Calibri" pitchFamily="34" charset="-120"/>
+              </a:rPr>
+              <a:t>Атомарный rate-limit + worker-thread для PDF</a:t>
+            </a:r>
+            <a:endParaRPr lang="en-US" sz="1150" dirty="0"/>
+          </a:p>
+        </p:txBody>
+      </p:sp>
+      <p:sp>
+        <p:nvSpPr>
+          <p:cNvPr id="24" name="Shape 19"/>
+          <p:cNvSpPr/>
+          <p:nvPr/>
+        </p:nvSpPr>
+        <p:spPr>
+          <a:xfrm>
+            <a:off x="640080" y="6446520"/>
+            <a:ext cx="10881360" cy="292608"/>
+          </a:xfrm>
+          <a:prstGeom prst="rect">
+            <a:avLst/>
+          </a:prstGeom>
+          <a:solidFill>
+            <a:srgbClr val="F8F9F7"/>
+          </a:solidFill>
+          <a:ln w="12700">
+            <a:solidFill>
+              <a:srgbClr val="21A663"/>
+            </a:solidFill>
+            <a:prstDash val="solid"/>
+          </a:ln>
+        </p:spPr>
+      </p:sp>
+      <p:sp>
+        <p:nvSpPr>
+          <p:cNvPr id="25" name="Text 20"/>
+          <p:cNvSpPr/>
+          <p:nvPr/>
+        </p:nvSpPr>
+        <p:spPr>
+          <a:xfrm>
+            <a:off x="868680" y="6446520"/>
+            <a:ext cx="10515600" cy="292608"/>
+          </a:xfrm>
+          <a:prstGeom prst="rect">
+            <a:avLst/>
+          </a:prstGeom>
+          <a:noFill/>
+          <a:ln/>
+        </p:spPr>
+        <p:txBody>
+          <a:bodyPr wrap="square" rtlCol="0" anchor="ctr"/>
+          <a:lstStyle/>
+          <a:p>
+            <a:pPr indent="0" marL="0">
+              <a:buNone/>
+            </a:pPr>
+            <a:r>
+              <a:rPr lang="en-US" sz="1100" b="1" i="1" dirty="0">
+                <a:solidFill>
+                  <a:srgbClr val="21A663"/>
+                </a:solidFill>
+                <a:latin typeface="Calibri" pitchFamily="34" charset="0"/>
+                <a:ea typeface="Calibri" pitchFamily="34" charset="-122"/>
+                <a:cs typeface="Calibri" pitchFamily="34" charset="-120"/>
+              </a:rPr>
+              <a:t>Полный бэклог: </a:t>
+            </a:r>
+            <a:pPr indent="0" marL="0">
+              <a:buNone/>
+            </a:pPr>
+            <a:r>
+              <a:rPr lang="en-US" sz="1100" i="1" dirty="0">
+                <a:solidFill>
+                  <a:srgbClr val="717670"/>
+                </a:solidFill>
+                <a:latin typeface="Calibri" pitchFamily="34" charset="0"/>
+                <a:ea typeface="Calibri" pitchFamily="34" charset="-122"/>
+                <a:cs typeface="Calibri" pitchFamily="34" charset="-120"/>
+              </a:rPr>
+              <a:t>docs/backlog.md в репозитории — приоритеты, оценки объёма и связи между задачами</a:t>
+            </a:r>
+            <a:endParaRPr lang="en-US" sz="1100" dirty="0"/>
+          </a:p>
+        </p:txBody>
+      </p:sp>
+    </p:spTree>
+  </p:cSld>
+  <p:clrMapOvr>
+    <a:masterClrMapping/>
+  </p:clrMapOvr>
+</p:sld>
+</file>
+
 <file path=ppt/slides/slide2.xml><?xml version="1.0" encoding="utf-8"?>
 <p:sld xmlns:a="http://schemas.openxmlformats.org/drawingml/2006/main" xmlns:r="http://schemas.openxmlformats.org/officeDocument/2006/relationships" xmlns:p="http://schemas.openxmlformats.org/presentationml/2006/main">
   <p:cSld name="Slide 2">

--- a/artifacts/Planwise-Klassniy-Chas.pptx
+++ b/artifacts/Planwise-Klassniy-Chas.pptx
@@ -16086,7 +16086,7 @@
                 <a:ea typeface="Georgia" pitchFamily="34" charset="-122"/>
                 <a:cs typeface="Georgia" pitchFamily="34" charset="-120"/>
               </a:rPr>
-              <a:t>Демо-путь (скриншоты вставить в финал)</a:t>
+              <a:t>Демо-путь: контекст → стрим → редактор → экспорт</a:t>
             </a:r>
             <a:endParaRPr lang="en-US" sz="1400" dirty="0"/>
           </a:p>
@@ -16100,8 +16100,8 @@
         </p:nvSpPr>
         <p:spPr>
           <a:xfrm>
-            <a:off x="640080" y="2286000"/>
-            <a:ext cx="5212080" cy="868680"/>
+            <a:off x="640080" y="2331720"/>
+            <a:ext cx="2514600" cy="1965960"/>
           </a:xfrm>
           <a:prstGeom prst="rect">
             <a:avLst/>
@@ -16124,75 +16124,59 @@
           </a:effectLst>
         </p:spPr>
       </p:sp>
-      <p:sp>
-        <p:nvSpPr>
-          <p:cNvPr id="7" name="Shape 5"/>
-          <p:cNvSpPr/>
-          <p:nvPr/>
-        </p:nvSpPr>
-        <p:spPr>
-          <a:xfrm>
-            <a:off x="822960" y="2532888"/>
-            <a:ext cx="384048" cy="384048"/>
-          </a:xfrm>
-          <a:prstGeom prst="ellipse">
+      <p:pic>
+        <p:nvPicPr>
+          <p:cNvPr id="7" name="Image 0" descr="/home/nikit/planwise/artifacts/1-form.png">    </p:cNvPr>
+          <p:cNvPicPr>
+            <a:picLocks noChangeAspect="1"/>
+          </p:cNvPicPr>
+          <p:nvPr/>
+        </p:nvPicPr>
+        <p:blipFill>
+          <a:blip r:embed="rId1"/>
+          <a:srcRect l="0" r="0" t="0" b="0"/>
+          <a:stretch/>
+        </p:blipFill>
+        <p:spPr>
+          <a:xfrm>
+            <a:off x="713232" y="2404872"/>
+            <a:ext cx="2368296" cy="1517904"/>
+          </a:xfrm>
+          <a:prstGeom prst="rect">
+            <a:avLst/>
+          </a:prstGeom>
+        </p:spPr>
+      </p:pic>
+      <p:sp>
+        <p:nvSpPr>
+          <p:cNvPr id="8" name="Shape 5"/>
+          <p:cNvSpPr/>
+          <p:nvPr/>
+        </p:nvSpPr>
+        <p:spPr>
+          <a:xfrm>
+            <a:off x="640080" y="3922776"/>
+            <a:ext cx="2514600" cy="374904"/>
+          </a:xfrm>
+          <a:prstGeom prst="rect">
             <a:avLst/>
           </a:prstGeom>
           <a:solidFill>
-            <a:srgbClr val="21A663"/>
+            <a:srgbClr val="0E4F30"/>
           </a:solidFill>
           <a:ln/>
         </p:spPr>
       </p:sp>
       <p:sp>
         <p:nvSpPr>
-          <p:cNvPr id="8" name="Text 6"/>
-          <p:cNvSpPr/>
-          <p:nvPr/>
-        </p:nvSpPr>
-        <p:spPr>
-          <a:xfrm>
-            <a:off x="822960" y="2532888"/>
-            <a:ext cx="384048" cy="384048"/>
-          </a:xfrm>
-          <a:prstGeom prst="rect">
-            <a:avLst/>
-          </a:prstGeom>
-          <a:noFill/>
-          <a:ln/>
-        </p:spPr>
-        <p:txBody>
-          <a:bodyPr wrap="square" rtlCol="0" anchor="ctr"/>
-          <a:lstStyle/>
-          <a:p>
-            <a:pPr algn="ctr" indent="0" marL="0">
-              <a:buNone/>
-            </a:pPr>
-            <a:r>
-              <a:rPr lang="en-US" sz="1400" b="1" dirty="0">
-                <a:solidFill>
-                  <a:srgbClr val="FFFFFF"/>
-                </a:solidFill>
-                <a:latin typeface="Georgia" pitchFamily="34" charset="0"/>
-                <a:ea typeface="Georgia" pitchFamily="34" charset="-122"/>
-                <a:cs typeface="Georgia" pitchFamily="34" charset="-120"/>
-              </a:rPr>
-              <a:t>1</a:t>
-            </a:r>
-            <a:endParaRPr lang="en-US" sz="1400" dirty="0"/>
-          </a:p>
-        </p:txBody>
-      </p:sp>
-      <p:sp>
-        <p:nvSpPr>
-          <p:cNvPr id="9" name="Text 7"/>
-          <p:cNvSpPr/>
-          <p:nvPr/>
-        </p:nvSpPr>
-        <p:spPr>
-          <a:xfrm>
-            <a:off x="1371600" y="2286000"/>
-            <a:ext cx="4297680" cy="868680"/>
+          <p:cNvPr id="9" name="Text 6"/>
+          <p:cNvSpPr/>
+          <p:nvPr/>
+        </p:nvSpPr>
+        <p:spPr>
+          <a:xfrm>
+            <a:off x="749808" y="3922776"/>
+            <a:ext cx="2295144" cy="374904"/>
           </a:xfrm>
           <a:prstGeom prst="rect">
             <a:avLst/>
@@ -16208,66 +16192,30 @@
               <a:buNone/>
             </a:pPr>
             <a:r>
-              <a:rPr lang="en-US" sz="1500" b="1" dirty="0">
-                <a:solidFill>
-                  <a:srgbClr val="14160F"/>
+              <a:rPr lang="en-US" sz="1150" b="1" dirty="0">
+                <a:solidFill>
+                  <a:srgbClr val="FFFFFF"/>
                 </a:solidFill>
                 <a:latin typeface="Calibri" pitchFamily="34" charset="0"/>
                 <a:ea typeface="Calibri" pitchFamily="34" charset="-122"/>
                 <a:cs typeface="Calibri" pitchFamily="34" charset="-120"/>
               </a:rPr>
-              <a:t>Форма контекста</a:t>
-            </a:r>
-            <a:endParaRPr lang="en-US" sz="1500" dirty="0"/>
-          </a:p>
-        </p:txBody>
-      </p:sp>
-      <p:sp>
-        <p:nvSpPr>
-          <p:cNvPr id="10" name="Text 8"/>
-          <p:cNvSpPr/>
-          <p:nvPr/>
-        </p:nvSpPr>
-        <p:spPr>
-          <a:xfrm>
-            <a:off x="914400" y="3108960"/>
-            <a:ext cx="365760" cy="228600"/>
-          </a:xfrm>
-          <a:prstGeom prst="rect">
-            <a:avLst/>
-          </a:prstGeom>
-          <a:noFill/>
-          <a:ln/>
-        </p:spPr>
-        <p:txBody>
-          <a:bodyPr wrap="square" rtlCol="0" anchor="ctr"/>
-          <a:lstStyle/>
-          <a:p>
-            <a:pPr algn="ctr" indent="0" marL="0">
-              <a:buNone/>
-            </a:pPr>
-            <a:r>
-              <a:rPr lang="en-US" sz="1300" dirty="0">
-                <a:solidFill>
-                  <a:srgbClr val="21A663"/>
-                </a:solidFill>
-              </a:rPr>
-              <a:t>↓</a:t>
-            </a:r>
-            <a:endParaRPr lang="en-US" sz="1300" dirty="0"/>
-          </a:p>
-        </p:txBody>
-      </p:sp>
-      <p:sp>
-        <p:nvSpPr>
-          <p:cNvPr id="11" name="Shape 9"/>
-          <p:cNvSpPr/>
-          <p:nvPr/>
-        </p:nvSpPr>
-        <p:spPr>
-          <a:xfrm>
-            <a:off x="640080" y="3310128"/>
-            <a:ext cx="5212080" cy="868680"/>
+              <a:t>1. Форма контекста</a:t>
+            </a:r>
+            <a:endParaRPr lang="en-US" sz="1150" dirty="0"/>
+          </a:p>
+        </p:txBody>
+      </p:sp>
+      <p:sp>
+        <p:nvSpPr>
+          <p:cNvPr id="10" name="Shape 7"/>
+          <p:cNvSpPr/>
+          <p:nvPr/>
+        </p:nvSpPr>
+        <p:spPr>
+          <a:xfrm>
+            <a:off x="3246120" y="2331720"/>
+            <a:ext cx="2514600" cy="1965960"/>
           </a:xfrm>
           <a:prstGeom prst="rect">
             <a:avLst/>
@@ -16290,75 +16238,59 @@
           </a:effectLst>
         </p:spPr>
       </p:sp>
-      <p:sp>
-        <p:nvSpPr>
-          <p:cNvPr id="12" name="Shape 10"/>
-          <p:cNvSpPr/>
-          <p:nvPr/>
-        </p:nvSpPr>
-        <p:spPr>
-          <a:xfrm>
-            <a:off x="822960" y="3557016"/>
-            <a:ext cx="384048" cy="384048"/>
-          </a:xfrm>
-          <a:prstGeom prst="ellipse">
+      <p:pic>
+        <p:nvPicPr>
+          <p:cNvPr id="11" name="Image 1" descr="/home/nikit/planwise/artifacts/2-stream.png">    </p:cNvPr>
+          <p:cNvPicPr>
+            <a:picLocks noChangeAspect="1"/>
+          </p:cNvPicPr>
+          <p:nvPr/>
+        </p:nvPicPr>
+        <p:blipFill>
+          <a:blip r:embed="rId2"/>
+          <a:srcRect l="0" r="0" t="0" b="0"/>
+          <a:stretch/>
+        </p:blipFill>
+        <p:spPr>
+          <a:xfrm>
+            <a:off x="3319272" y="2404872"/>
+            <a:ext cx="2368296" cy="1517904"/>
+          </a:xfrm>
+          <a:prstGeom prst="rect">
+            <a:avLst/>
+          </a:prstGeom>
+        </p:spPr>
+      </p:pic>
+      <p:sp>
+        <p:nvSpPr>
+          <p:cNvPr id="12" name="Shape 8"/>
+          <p:cNvSpPr/>
+          <p:nvPr/>
+        </p:nvSpPr>
+        <p:spPr>
+          <a:xfrm>
+            <a:off x="3246120" y="3922776"/>
+            <a:ext cx="2514600" cy="374904"/>
+          </a:xfrm>
+          <a:prstGeom prst="rect">
             <a:avLst/>
           </a:prstGeom>
           <a:solidFill>
-            <a:srgbClr val="21A663"/>
+            <a:srgbClr val="0E4F30"/>
           </a:solidFill>
           <a:ln/>
         </p:spPr>
       </p:sp>
       <p:sp>
         <p:nvSpPr>
-          <p:cNvPr id="13" name="Text 11"/>
-          <p:cNvSpPr/>
-          <p:nvPr/>
-        </p:nvSpPr>
-        <p:spPr>
-          <a:xfrm>
-            <a:off x="822960" y="3557016"/>
-            <a:ext cx="384048" cy="384048"/>
-          </a:xfrm>
-          <a:prstGeom prst="rect">
-            <a:avLst/>
-          </a:prstGeom>
-          <a:noFill/>
-          <a:ln/>
-        </p:spPr>
-        <p:txBody>
-          <a:bodyPr wrap="square" rtlCol="0" anchor="ctr"/>
-          <a:lstStyle/>
-          <a:p>
-            <a:pPr algn="ctr" indent="0" marL="0">
-              <a:buNone/>
-            </a:pPr>
-            <a:r>
-              <a:rPr lang="en-US" sz="1400" b="1" dirty="0">
-                <a:solidFill>
-                  <a:srgbClr val="FFFFFF"/>
-                </a:solidFill>
-                <a:latin typeface="Georgia" pitchFamily="34" charset="0"/>
-                <a:ea typeface="Georgia" pitchFamily="34" charset="-122"/>
-                <a:cs typeface="Georgia" pitchFamily="34" charset="-120"/>
-              </a:rPr>
-              <a:t>2</a:t>
-            </a:r>
-            <a:endParaRPr lang="en-US" sz="1400" dirty="0"/>
-          </a:p>
-        </p:txBody>
-      </p:sp>
-      <p:sp>
-        <p:nvSpPr>
-          <p:cNvPr id="14" name="Text 12"/>
-          <p:cNvSpPr/>
-          <p:nvPr/>
-        </p:nvSpPr>
-        <p:spPr>
-          <a:xfrm>
-            <a:off x="1371600" y="3310128"/>
-            <a:ext cx="4297680" cy="868680"/>
+          <p:cNvPr id="13" name="Text 9"/>
+          <p:cNvSpPr/>
+          <p:nvPr/>
+        </p:nvSpPr>
+        <p:spPr>
+          <a:xfrm>
+            <a:off x="3355848" y="3922776"/>
+            <a:ext cx="2295144" cy="374904"/>
           </a:xfrm>
           <a:prstGeom prst="rect">
             <a:avLst/>
@@ -16374,66 +16306,30 @@
               <a:buNone/>
             </a:pPr>
             <a:r>
-              <a:rPr lang="en-US" sz="1500" b="1" dirty="0">
-                <a:solidFill>
-                  <a:srgbClr val="14160F"/>
+              <a:rPr lang="en-US" sz="1150" b="1" dirty="0">
+                <a:solidFill>
+                  <a:srgbClr val="FFFFFF"/>
                 </a:solidFill>
                 <a:latin typeface="Calibri" pitchFamily="34" charset="0"/>
                 <a:ea typeface="Calibri" pitchFamily="34" charset="-122"/>
                 <a:cs typeface="Calibri" pitchFamily="34" charset="-120"/>
               </a:rPr>
-              <a:t>Стрим генерации</a:t>
-            </a:r>
-            <a:endParaRPr lang="en-US" sz="1500" dirty="0"/>
-          </a:p>
-        </p:txBody>
-      </p:sp>
-      <p:sp>
-        <p:nvSpPr>
-          <p:cNvPr id="15" name="Text 13"/>
-          <p:cNvSpPr/>
-          <p:nvPr/>
-        </p:nvSpPr>
-        <p:spPr>
-          <a:xfrm>
-            <a:off x="914400" y="4133088"/>
-            <a:ext cx="365760" cy="228600"/>
-          </a:xfrm>
-          <a:prstGeom prst="rect">
-            <a:avLst/>
-          </a:prstGeom>
-          <a:noFill/>
-          <a:ln/>
-        </p:spPr>
-        <p:txBody>
-          <a:bodyPr wrap="square" rtlCol="0" anchor="ctr"/>
-          <a:lstStyle/>
-          <a:p>
-            <a:pPr algn="ctr" indent="0" marL="0">
-              <a:buNone/>
-            </a:pPr>
-            <a:r>
-              <a:rPr lang="en-US" sz="1300" dirty="0">
-                <a:solidFill>
-                  <a:srgbClr val="21A663"/>
-                </a:solidFill>
-              </a:rPr>
-              <a:t>↓</a:t>
-            </a:r>
-            <a:endParaRPr lang="en-US" sz="1300" dirty="0"/>
-          </a:p>
-        </p:txBody>
-      </p:sp>
-      <p:sp>
-        <p:nvSpPr>
-          <p:cNvPr id="16" name="Shape 14"/>
-          <p:cNvSpPr/>
-          <p:nvPr/>
-        </p:nvSpPr>
-        <p:spPr>
-          <a:xfrm>
-            <a:off x="640080" y="4334256"/>
-            <a:ext cx="5212080" cy="868680"/>
+              <a:t>2. Стрим генерации по блокам</a:t>
+            </a:r>
+            <a:endParaRPr lang="en-US" sz="1150" dirty="0"/>
+          </a:p>
+        </p:txBody>
+      </p:sp>
+      <p:sp>
+        <p:nvSpPr>
+          <p:cNvPr id="14" name="Shape 10"/>
+          <p:cNvSpPr/>
+          <p:nvPr/>
+        </p:nvSpPr>
+        <p:spPr>
+          <a:xfrm>
+            <a:off x="640080" y="4389120"/>
+            <a:ext cx="2514600" cy="1965960"/>
           </a:xfrm>
           <a:prstGeom prst="rect">
             <a:avLst/>
@@ -16456,75 +16352,59 @@
           </a:effectLst>
         </p:spPr>
       </p:sp>
-      <p:sp>
-        <p:nvSpPr>
-          <p:cNvPr id="17" name="Shape 15"/>
-          <p:cNvSpPr/>
-          <p:nvPr/>
-        </p:nvSpPr>
-        <p:spPr>
-          <a:xfrm>
-            <a:off x="822960" y="4581144"/>
-            <a:ext cx="384048" cy="384048"/>
-          </a:xfrm>
-          <a:prstGeom prst="ellipse">
+      <p:pic>
+        <p:nvPicPr>
+          <p:cNvPr id="15" name="Image 2" descr="/home/nikit/planwise/artifacts/5-editor-regen.png">    </p:cNvPr>
+          <p:cNvPicPr>
+            <a:picLocks noChangeAspect="1"/>
+          </p:cNvPicPr>
+          <p:nvPr/>
+        </p:nvPicPr>
+        <p:blipFill>
+          <a:blip r:embed="rId3"/>
+          <a:srcRect l="0" r="0" t="0" b="0"/>
+          <a:stretch/>
+        </p:blipFill>
+        <p:spPr>
+          <a:xfrm>
+            <a:off x="713232" y="4462272"/>
+            <a:ext cx="2368296" cy="1517904"/>
+          </a:xfrm>
+          <a:prstGeom prst="rect">
+            <a:avLst/>
+          </a:prstGeom>
+        </p:spPr>
+      </p:pic>
+      <p:sp>
+        <p:nvSpPr>
+          <p:cNvPr id="16" name="Shape 11"/>
+          <p:cNvSpPr/>
+          <p:nvPr/>
+        </p:nvSpPr>
+        <p:spPr>
+          <a:xfrm>
+            <a:off x="640080" y="5980176"/>
+            <a:ext cx="2514600" cy="374904"/>
+          </a:xfrm>
+          <a:prstGeom prst="rect">
             <a:avLst/>
           </a:prstGeom>
           <a:solidFill>
-            <a:srgbClr val="21A663"/>
+            <a:srgbClr val="0E4F30"/>
           </a:solidFill>
           <a:ln/>
         </p:spPr>
       </p:sp>
       <p:sp>
         <p:nvSpPr>
-          <p:cNvPr id="18" name="Text 16"/>
-          <p:cNvSpPr/>
-          <p:nvPr/>
-        </p:nvSpPr>
-        <p:spPr>
-          <a:xfrm>
-            <a:off x="822960" y="4581144"/>
-            <a:ext cx="384048" cy="384048"/>
-          </a:xfrm>
-          <a:prstGeom prst="rect">
-            <a:avLst/>
-          </a:prstGeom>
-          <a:noFill/>
-          <a:ln/>
-        </p:spPr>
-        <p:txBody>
-          <a:bodyPr wrap="square" rtlCol="0" anchor="ctr"/>
-          <a:lstStyle/>
-          <a:p>
-            <a:pPr algn="ctr" indent="0" marL="0">
-              <a:buNone/>
-            </a:pPr>
-            <a:r>
-              <a:rPr lang="en-US" sz="1400" b="1" dirty="0">
-                <a:solidFill>
-                  <a:srgbClr val="FFFFFF"/>
-                </a:solidFill>
-                <a:latin typeface="Georgia" pitchFamily="34" charset="0"/>
-                <a:ea typeface="Georgia" pitchFamily="34" charset="-122"/>
-                <a:cs typeface="Georgia" pitchFamily="34" charset="-120"/>
-              </a:rPr>
-              <a:t>3</a:t>
-            </a:r>
-            <a:endParaRPr lang="en-US" sz="1400" dirty="0"/>
-          </a:p>
-        </p:txBody>
-      </p:sp>
-      <p:sp>
-        <p:nvSpPr>
-          <p:cNvPr id="19" name="Text 17"/>
-          <p:cNvSpPr/>
-          <p:nvPr/>
-        </p:nvSpPr>
-        <p:spPr>
-          <a:xfrm>
-            <a:off x="1371600" y="4334256"/>
-            <a:ext cx="4297680" cy="868680"/>
+          <p:cNvPr id="17" name="Text 12"/>
+          <p:cNvSpPr/>
+          <p:nvPr/>
+        </p:nvSpPr>
+        <p:spPr>
+          <a:xfrm>
+            <a:off x="749808" y="5980176"/>
+            <a:ext cx="2295144" cy="374904"/>
           </a:xfrm>
           <a:prstGeom prst="rect">
             <a:avLst/>
@@ -16540,66 +16420,30 @@
               <a:buNone/>
             </a:pPr>
             <a:r>
-              <a:rPr lang="en-US" sz="1500" b="1" dirty="0">
-                <a:solidFill>
-                  <a:srgbClr val="14160F"/>
+              <a:rPr lang="en-US" sz="1150" b="1" dirty="0">
+                <a:solidFill>
+                  <a:srgbClr val="FFFFFF"/>
                 </a:solidFill>
                 <a:latin typeface="Calibri" pitchFamily="34" charset="0"/>
                 <a:ea typeface="Calibri" pitchFamily="34" charset="-122"/>
                 <a:cs typeface="Calibri" pitchFamily="34" charset="-120"/>
               </a:rPr>
-              <a:t>Блочный редактор</a:t>
-            </a:r>
-            <a:endParaRPr lang="en-US" sz="1500" dirty="0"/>
-          </a:p>
-        </p:txBody>
-      </p:sp>
-      <p:sp>
-        <p:nvSpPr>
-          <p:cNvPr id="20" name="Text 18"/>
-          <p:cNvSpPr/>
-          <p:nvPr/>
-        </p:nvSpPr>
-        <p:spPr>
-          <a:xfrm>
-            <a:off x="914400" y="5157216"/>
-            <a:ext cx="365760" cy="228600"/>
-          </a:xfrm>
-          <a:prstGeom prst="rect">
-            <a:avLst/>
-          </a:prstGeom>
-          <a:noFill/>
-          <a:ln/>
-        </p:spPr>
-        <p:txBody>
-          <a:bodyPr wrap="square" rtlCol="0" anchor="ctr"/>
-          <a:lstStyle/>
-          <a:p>
-            <a:pPr algn="ctr" indent="0" marL="0">
-              <a:buNone/>
-            </a:pPr>
-            <a:r>
-              <a:rPr lang="en-US" sz="1300" dirty="0">
-                <a:solidFill>
-                  <a:srgbClr val="21A663"/>
-                </a:solidFill>
-              </a:rPr>
-              <a:t>↓</a:t>
-            </a:r>
-            <a:endParaRPr lang="en-US" sz="1300" dirty="0"/>
-          </a:p>
-        </p:txBody>
-      </p:sp>
-      <p:sp>
-        <p:nvSpPr>
-          <p:cNvPr id="21" name="Shape 19"/>
-          <p:cNvSpPr/>
-          <p:nvPr/>
-        </p:nvSpPr>
-        <p:spPr>
-          <a:xfrm>
-            <a:off x="640080" y="5358384"/>
-            <a:ext cx="5212080" cy="868680"/>
+              <a:t>3. Редактор: 🎲 · ↑↓ · add/del</a:t>
+            </a:r>
+            <a:endParaRPr lang="en-US" sz="1150" dirty="0"/>
+          </a:p>
+        </p:txBody>
+      </p:sp>
+      <p:sp>
+        <p:nvSpPr>
+          <p:cNvPr id="18" name="Shape 13"/>
+          <p:cNvSpPr/>
+          <p:nvPr/>
+        </p:nvSpPr>
+        <p:spPr>
+          <a:xfrm>
+            <a:off x="3246120" y="4389120"/>
+            <a:ext cx="2514600" cy="1965960"/>
           </a:xfrm>
           <a:prstGeom prst="rect">
             <a:avLst/>
@@ -16622,75 +16466,59 @@
           </a:effectLst>
         </p:spPr>
       </p:sp>
-      <p:sp>
-        <p:nvSpPr>
-          <p:cNvPr id="22" name="Shape 20"/>
-          <p:cNvSpPr/>
-          <p:nvPr/>
-        </p:nvSpPr>
-        <p:spPr>
-          <a:xfrm>
-            <a:off x="822960" y="5605272"/>
-            <a:ext cx="384048" cy="384048"/>
-          </a:xfrm>
-          <a:prstGeom prst="ellipse">
+      <p:pic>
+        <p:nvPicPr>
+          <p:cNvPr id="19" name="Image 3" descr="/home/nikit/planwise/artifacts/4-export.png">    </p:cNvPr>
+          <p:cNvPicPr>
+            <a:picLocks noChangeAspect="1"/>
+          </p:cNvPicPr>
+          <p:nvPr/>
+        </p:nvPicPr>
+        <p:blipFill>
+          <a:blip r:embed="rId4"/>
+          <a:srcRect l="0" r="0" t="0" b="0"/>
+          <a:stretch/>
+        </p:blipFill>
+        <p:spPr>
+          <a:xfrm>
+            <a:off x="3319272" y="4462272"/>
+            <a:ext cx="2368296" cy="1517904"/>
+          </a:xfrm>
+          <a:prstGeom prst="rect">
+            <a:avLst/>
+          </a:prstGeom>
+        </p:spPr>
+      </p:pic>
+      <p:sp>
+        <p:nvSpPr>
+          <p:cNvPr id="20" name="Shape 14"/>
+          <p:cNvSpPr/>
+          <p:nvPr/>
+        </p:nvSpPr>
+        <p:spPr>
+          <a:xfrm>
+            <a:off x="3246120" y="5980176"/>
+            <a:ext cx="2514600" cy="374904"/>
+          </a:xfrm>
+          <a:prstGeom prst="rect">
             <a:avLst/>
           </a:prstGeom>
           <a:solidFill>
-            <a:srgbClr val="21A663"/>
+            <a:srgbClr val="0E4F30"/>
           </a:solidFill>
           <a:ln/>
         </p:spPr>
       </p:sp>
       <p:sp>
         <p:nvSpPr>
-          <p:cNvPr id="23" name="Text 21"/>
-          <p:cNvSpPr/>
-          <p:nvPr/>
-        </p:nvSpPr>
-        <p:spPr>
-          <a:xfrm>
-            <a:off x="822960" y="5605272"/>
-            <a:ext cx="384048" cy="384048"/>
-          </a:xfrm>
-          <a:prstGeom prst="rect">
-            <a:avLst/>
-          </a:prstGeom>
-          <a:noFill/>
-          <a:ln/>
-        </p:spPr>
-        <p:txBody>
-          <a:bodyPr wrap="square" rtlCol="0" anchor="ctr"/>
-          <a:lstStyle/>
-          <a:p>
-            <a:pPr algn="ctr" indent="0" marL="0">
-              <a:buNone/>
-            </a:pPr>
-            <a:r>
-              <a:rPr lang="en-US" sz="1400" b="1" dirty="0">
-                <a:solidFill>
-                  <a:srgbClr val="FFFFFF"/>
-                </a:solidFill>
-                <a:latin typeface="Georgia" pitchFamily="34" charset="0"/>
-                <a:ea typeface="Georgia" pitchFamily="34" charset="-122"/>
-                <a:cs typeface="Georgia" pitchFamily="34" charset="-120"/>
-              </a:rPr>
-              <a:t>4</a:t>
-            </a:r>
-            <a:endParaRPr lang="en-US" sz="1400" dirty="0"/>
-          </a:p>
-        </p:txBody>
-      </p:sp>
-      <p:sp>
-        <p:nvSpPr>
-          <p:cNvPr id="24" name="Text 22"/>
-          <p:cNvSpPr/>
-          <p:nvPr/>
-        </p:nvSpPr>
-        <p:spPr>
-          <a:xfrm>
-            <a:off x="1371600" y="5358384"/>
-            <a:ext cx="4297680" cy="868680"/>
+          <p:cNvPr id="21" name="Text 15"/>
+          <p:cNvSpPr/>
+          <p:nvPr/>
+        </p:nvSpPr>
+        <p:spPr>
+          <a:xfrm>
+            <a:off x="3355848" y="5980176"/>
+            <a:ext cx="2295144" cy="374904"/>
           </a:xfrm>
           <a:prstGeom prst="rect">
             <a:avLst/>
@@ -16706,23 +16534,23 @@
               <a:buNone/>
             </a:pPr>
             <a:r>
-              <a:rPr lang="en-US" sz="1500" b="1" dirty="0">
-                <a:solidFill>
-                  <a:srgbClr val="14160F"/>
+              <a:rPr lang="en-US" sz="1150" b="1" dirty="0">
+                <a:solidFill>
+                  <a:srgbClr val="FFFFFF"/>
                 </a:solidFill>
                 <a:latin typeface="Calibri" pitchFamily="34" charset="0"/>
                 <a:ea typeface="Calibri" pitchFamily="34" charset="-122"/>
                 <a:cs typeface="Calibri" pitchFamily="34" charset="-120"/>
               </a:rPr>
-              <a:t>Экспорт PDF / DOCX</a:t>
-            </a:r>
-            <a:endParaRPr lang="en-US" sz="1500" dirty="0"/>
-          </a:p>
-        </p:txBody>
-      </p:sp>
-      <p:sp>
-        <p:nvSpPr>
-          <p:cNvPr id="25" name="Shape 23"/>
+              <a:t>4. Экспорт PDF / DOCX</a:t>
+            </a:r>
+            <a:endParaRPr lang="en-US" sz="1150" dirty="0"/>
+          </a:p>
+        </p:txBody>
+      </p:sp>
+      <p:sp>
+        <p:nvSpPr>
+          <p:cNvPr id="22" name="Shape 16"/>
           <p:cNvSpPr/>
           <p:nvPr/>
         </p:nvSpPr>
@@ -16754,7 +16582,7 @@
       </p:sp>
       <p:sp>
         <p:nvSpPr>
-          <p:cNvPr id="26" name="Text 24"/>
+          <p:cNvPr id="23" name="Text 17"/>
           <p:cNvSpPr/>
           <p:nvPr/>
         </p:nvSpPr>
@@ -16793,7 +16621,7 @@
       </p:sp>
       <p:sp>
         <p:nvSpPr>
-          <p:cNvPr id="27" name="Text 25"/>
+          <p:cNvPr id="24" name="Text 18"/>
           <p:cNvSpPr/>
           <p:nvPr/>
         </p:nvSpPr>
@@ -16962,7 +16790,7 @@
       </p:sp>
       <p:sp>
         <p:nvSpPr>
-          <p:cNvPr id="28" name="Shape 26"/>
+          <p:cNvPr id="25" name="Shape 19"/>
           <p:cNvSpPr/>
           <p:nvPr/>
         </p:nvSpPr>
@@ -16989,7 +16817,7 @@
       </p:sp>
       <p:sp>
         <p:nvSpPr>
-          <p:cNvPr id="29" name="Text 27"/>
+          <p:cNvPr id="26" name="Text 20"/>
           <p:cNvSpPr/>
           <p:nvPr/>
         </p:nvSpPr>
@@ -17028,7 +16856,7 @@
       </p:sp>
       <p:sp>
         <p:nvSpPr>
-          <p:cNvPr id="30" name="Text 28"/>
+          <p:cNvPr id="27" name="Text 21"/>
           <p:cNvSpPr/>
           <p:nvPr/>
         </p:nvSpPr>
@@ -17134,7 +16962,7 @@
       </p:sp>
       <p:sp>
         <p:nvSpPr>
-          <p:cNvPr id="31" name="Shape 29"/>
+          <p:cNvPr id="28" name="Shape 22"/>
           <p:cNvSpPr/>
           <p:nvPr/>
         </p:nvSpPr>
@@ -17159,7 +16987,7 @@
       </p:sp>
       <p:sp>
         <p:nvSpPr>
-          <p:cNvPr id="32" name="Text 30"/>
+          <p:cNvPr id="29" name="Text 23"/>
           <p:cNvSpPr/>
           <p:nvPr/>
         </p:nvSpPr>
@@ -17198,7 +17026,7 @@
       </p:sp>
       <p:sp>
         <p:nvSpPr>
-          <p:cNvPr id="33" name="Text 31"/>
+          <p:cNvPr id="30" name="Text 24"/>
           <p:cNvSpPr/>
           <p:nvPr/>
         </p:nvSpPr>

--- a/artifacts/Planwise-Klassniy-Chas.pptx
+++ b/artifacts/Planwise-Klassniy-Chas.pptx
@@ -18,9 +18,10 @@
     <p:sldId id="266" r:id="rId12"/>
     <p:sldId id="267" r:id="rId13"/>
     <p:sldId id="268" r:id="rId14"/>
+    <p:sldId id="269" r:id="rId15"/>
   </p:sldIdLst>
   <p:notesMasterIdLst>
-    <p:notesMasterId r:id="rId15"/>
+    <p:notesMasterId r:id="rId16"/>
   </p:notesMasterIdLst>
   <p:sldSz cx="12192000" cy="6858000"/>
   <p:notesSz cx="6858000" cy="12192000"/>
@@ -890,6 +891,94 @@
             <a:fld id="{F7021451-1387-4CA6-816F-3879F97B5CBC}" type="slidenum">
               <a:rPr lang="en-US"/>
               <a:t>13</a:t>
+            </a:fld>
+            <a:endParaRPr lang="en-US"/>
+          </a:p>
+        </p:txBody>
+      </p:sp>
+    </p:spTree>
+    <p:extLst>
+      <p:ext uri="{BB962C8B-B14F-4D97-AF65-F5344CB8AC3E}">
+        <p14:creationId xmlns:p14="http://schemas.microsoft.com/office/powerpoint/2010/main" val="1024086991"/>
+      </p:ext>
+    </p:extLst>
+  </p:cSld>
+  <p:clrMapOvr>
+    <a:masterClrMapping/>
+  </p:clrMapOvr>
+</p:notes>
+</file>
+
+<file path=ppt/notesSlides/notesSlide14.xml><?xml version="1.0" encoding="utf-8"?>
+<p:notes xmlns:a="http://schemas.openxmlformats.org/drawingml/2006/main" xmlns:r="http://schemas.openxmlformats.org/officeDocument/2006/relationships" xmlns:p="http://schemas.openxmlformats.org/presentationml/2006/main">
+  <p:cSld>
+    <p:spTree>
+      <p:nvGrpSpPr>
+        <p:cNvPr id="1" name=""/>
+        <p:cNvGrpSpPr/>
+        <p:nvPr/>
+      </p:nvGrpSpPr>
+      <p:grpSpPr>
+        <a:xfrm>
+          <a:off x="0" y="0"/>
+          <a:ext cx="0" cy="0"/>
+          <a:chOff x="0" y="0"/>
+          <a:chExt cx="0" cy="0"/>
+        </a:xfrm>
+      </p:grpSpPr>
+      <p:sp>
+        <p:nvSpPr>
+          <p:cNvPr id="2" name="Slide Image Placeholder 1"/>
+          <p:cNvSpPr>
+            <a:spLocks noGrp="1" noRot="1" noChangeAspect="1"/>
+          </p:cNvSpPr>
+          <p:nvPr>
+            <p:ph type="sldImg"/>
+          </p:nvPr>
+        </p:nvSpPr>
+        <p:spPr/>
+      </p:sp>
+      <p:sp>
+        <p:nvSpPr>
+          <p:cNvPr id="3" name="Notes Placeholder 2"/>
+          <p:cNvSpPr>
+            <a:spLocks noGrp="1"/>
+          </p:cNvSpPr>
+          <p:nvPr>
+            <p:ph type="body" idx="1"/>
+          </p:nvPr>
+        </p:nvSpPr>
+        <p:spPr/>
+        <p:txBody>
+          <a:bodyPr/>
+          <a:lstStyle/>
+          <a:p>
+            <a:r>
+              <a:rPr lang="en-US" dirty="0"/>
+              <a:t/>
+            </a:r>
+            <a:endParaRPr lang="en-US" dirty="0"/>
+          </a:p>
+        </p:txBody>
+      </p:sp>
+      <p:sp>
+        <p:nvSpPr>
+          <p:cNvPr id="4" name="Slide Number Placeholder 3"/>
+          <p:cNvSpPr>
+            <a:spLocks noGrp="1"/>
+          </p:cNvSpPr>
+          <p:nvPr>
+            <p:ph type="sldNum" sz="quarter" idx="10"/>
+          </p:nvPr>
+        </p:nvSpPr>
+        <p:spPr/>
+        <p:txBody>
+          <a:bodyPr/>
+          <a:lstStyle/>
+          <a:p>
+            <a:fld id="{F7021451-1387-4CA6-816F-3879F97B5CBC}" type="slidenum">
+              <a:rPr lang="en-US"/>
+              <a:t>14</a:t>
             </a:fld>
             <a:endParaRPr lang="en-US"/>
           </a:p>
@@ -2434,7 +2523,7 @@
                 <a:ea typeface="Calibri" pitchFamily="34" charset="-122"/>
                 <a:cs typeface="Calibri" pitchFamily="34" charset="-120"/>
               </a:rPr>
-              <a:t>08 — РИСКИ</a:t>
+              <a:t>07 — ДОРОЖНАЯ КАРТА</a:t>
             </a:r>
             <a:endParaRPr lang="en-US" sz="1300" dirty="0"/>
           </a:p>
@@ -2473,6 +2562,1162 @@
                 <a:ea typeface="Georgia" pitchFamily="34" charset="-122"/>
                 <a:cs typeface="Georgia" pitchFamily="34" charset="-120"/>
               </a:rPr>
+              <a:t>От MVP к масштабу</a:t>
+            </a:r>
+            <a:endParaRPr lang="en-US" sz="3200" dirty="0"/>
+          </a:p>
+        </p:txBody>
+      </p:sp>
+      <p:sp>
+        <p:nvSpPr>
+          <p:cNvPr id="5" name="Shape 3"/>
+          <p:cNvSpPr/>
+          <p:nvPr/>
+        </p:nvSpPr>
+        <p:spPr>
+          <a:xfrm>
+            <a:off x="914400" y="2468880"/>
+            <a:ext cx="10332720" cy="0"/>
+          </a:xfrm>
+          <a:prstGeom prst="line">
+            <a:avLst/>
+          </a:prstGeom>
+          <a:noFill/>
+          <a:ln w="25400">
+            <a:solidFill>
+              <a:srgbClr val="E4E6E1"/>
+            </a:solidFill>
+            <a:prstDash val="solid"/>
+          </a:ln>
+        </p:spPr>
+      </p:sp>
+      <p:sp>
+        <p:nvSpPr>
+          <p:cNvPr id="6" name="Shape 4"/>
+          <p:cNvSpPr/>
+          <p:nvPr/>
+        </p:nvSpPr>
+        <p:spPr>
+          <a:xfrm>
+            <a:off x="960120" y="2286000"/>
+            <a:ext cx="365760" cy="365760"/>
+          </a:xfrm>
+          <a:prstGeom prst="ellipse">
+            <a:avLst/>
+          </a:prstGeom>
+          <a:solidFill>
+            <a:srgbClr val="21A663"/>
+          </a:solidFill>
+          <a:ln/>
+        </p:spPr>
+      </p:sp>
+      <p:sp>
+        <p:nvSpPr>
+          <p:cNvPr id="7" name="Text 5"/>
+          <p:cNvSpPr/>
+          <p:nvPr/>
+        </p:nvSpPr>
+        <p:spPr>
+          <a:xfrm>
+            <a:off x="960120" y="2286000"/>
+            <a:ext cx="365760" cy="365760"/>
+          </a:xfrm>
+          <a:prstGeom prst="rect">
+            <a:avLst/>
+          </a:prstGeom>
+          <a:noFill/>
+          <a:ln/>
+        </p:spPr>
+        <p:txBody>
+          <a:bodyPr wrap="square" rtlCol="0" anchor="ctr"/>
+          <a:lstStyle/>
+          <a:p>
+            <a:pPr algn="ctr" indent="0" marL="0">
+              <a:buNone/>
+            </a:pPr>
+            <a:r>
+              <a:rPr lang="en-US" sz="1300" b="1" dirty="0">
+                <a:solidFill>
+                  <a:srgbClr val="FFFFFF"/>
+                </a:solidFill>
+                <a:latin typeface="Georgia" pitchFamily="34" charset="0"/>
+                <a:ea typeface="Georgia" pitchFamily="34" charset="-122"/>
+                <a:cs typeface="Georgia" pitchFamily="34" charset="-120"/>
+              </a:rPr>
+              <a:t>1</a:t>
+            </a:r>
+            <a:endParaRPr lang="en-US" sz="1300" dirty="0"/>
+          </a:p>
+        </p:txBody>
+      </p:sp>
+      <p:sp>
+        <p:nvSpPr>
+          <p:cNvPr id="8" name="Shape 6"/>
+          <p:cNvSpPr/>
+          <p:nvPr/>
+        </p:nvSpPr>
+        <p:spPr>
+          <a:xfrm>
+            <a:off x="640080" y="2926080"/>
+            <a:ext cx="2606040" cy="2651760"/>
+          </a:xfrm>
+          <a:prstGeom prst="rect">
+            <a:avLst/>
+          </a:prstGeom>
+          <a:solidFill>
+            <a:srgbClr val="FFFFFF"/>
+          </a:solidFill>
+          <a:ln w="12700">
+            <a:solidFill>
+              <a:srgbClr val="E4E6E1"/>
+            </a:solidFill>
+            <a:prstDash val="solid"/>
+          </a:ln>
+          <a:effectLst>
+            <a:outerShdw sx="100000" sy="100000" kx="0" ky="0" algn="bl" rotWithShape="0" blurRad="101600" dist="38100" dir="8100000">
+              <a:srgbClr val="000000">
+                <a:alpha val="12000"/>
+              </a:srgbClr>
+            </a:outerShdw>
+          </a:effectLst>
+        </p:spPr>
+      </p:sp>
+      <p:sp>
+        <p:nvSpPr>
+          <p:cNvPr id="9" name="Shape 7"/>
+          <p:cNvSpPr/>
+          <p:nvPr/>
+        </p:nvSpPr>
+        <p:spPr>
+          <a:xfrm>
+            <a:off x="640080" y="2926080"/>
+            <a:ext cx="2606040" cy="109728"/>
+          </a:xfrm>
+          <a:prstGeom prst="rect">
+            <a:avLst/>
+          </a:prstGeom>
+          <a:solidFill>
+            <a:srgbClr val="21A663"/>
+          </a:solidFill>
+          <a:ln/>
+        </p:spPr>
+      </p:sp>
+      <p:sp>
+        <p:nvSpPr>
+          <p:cNvPr id="10" name="Text 8"/>
+          <p:cNvSpPr/>
+          <p:nvPr/>
+        </p:nvSpPr>
+        <p:spPr>
+          <a:xfrm>
+            <a:off x="841248" y="3127248"/>
+            <a:ext cx="2240280" cy="457200"/>
+          </a:xfrm>
+          <a:prstGeom prst="rect">
+            <a:avLst/>
+          </a:prstGeom>
+          <a:noFill/>
+          <a:ln/>
+        </p:spPr>
+        <p:txBody>
+          <a:bodyPr wrap="square" rtlCol="0" anchor="ctr"/>
+          <a:lstStyle/>
+          <a:p>
+            <a:pPr indent="0" marL="0">
+              <a:buNone/>
+            </a:pPr>
+            <a:r>
+              <a:rPr lang="en-US" sz="1600" b="1" dirty="0">
+                <a:solidFill>
+                  <a:srgbClr val="14160F"/>
+                </a:solidFill>
+                <a:latin typeface="Georgia" pitchFamily="34" charset="0"/>
+                <a:ea typeface="Georgia" pitchFamily="34" charset="-122"/>
+                <a:cs typeface="Georgia" pitchFamily="34" charset="-120"/>
+              </a:rPr>
+              <a:t>Развёрнуто на проде</a:t>
+            </a:r>
+            <a:endParaRPr lang="en-US" sz="1600" dirty="0"/>
+          </a:p>
+        </p:txBody>
+      </p:sp>
+      <p:sp>
+        <p:nvSpPr>
+          <p:cNvPr id="11" name="Text 9"/>
+          <p:cNvSpPr/>
+          <p:nvPr/>
+        </p:nvSpPr>
+        <p:spPr>
+          <a:xfrm>
+            <a:off x="868680" y="3657600"/>
+            <a:ext cx="2194560" cy="1828800"/>
+          </a:xfrm>
+          <a:prstGeom prst="rect">
+            <a:avLst/>
+          </a:prstGeom>
+          <a:noFill/>
+          <a:ln/>
+        </p:spPr>
+        <p:txBody>
+          <a:bodyPr wrap="square" rtlCol="0" anchor="t"/>
+          <a:lstStyle/>
+          <a:p>
+            <a:pPr marL="342900" indent="-342900">
+              <a:spcAft>
+                <a:spcPts val="800"/>
+              </a:spcAft>
+              <a:buSzPct val="100000"/>
+              <a:buChar char="•"/>
+            </a:pPr>
+            <a:r>
+              <a:rPr lang="en-US" sz="1200" dirty="0">
+                <a:solidFill>
+                  <a:srgbClr val="717670"/>
+                </a:solidFill>
+                <a:latin typeface="Calibri" pitchFamily="34" charset="0"/>
+                <a:ea typeface="Calibri" pitchFamily="34" charset="-122"/>
+                <a:cs typeface="Calibri" pitchFamily="34" charset="-120"/>
+              </a:rPr>
+              <a:t>MVP + RAG-корпус методичек РоВ · домен plan-wise.ru + HTTPS</a:t>
+            </a:r>
+            <a:endParaRPr lang="en-US" sz="1200" dirty="0"/>
+          </a:p>
+          <a:p>
+            <a:pPr marL="342900" indent="-342900">
+              <a:spcAft>
+                <a:spcPts val="800"/>
+              </a:spcAft>
+              <a:buSzPct val="100000"/>
+              <a:buChar char="•"/>
+            </a:pPr>
+            <a:r>
+              <a:rPr lang="en-US" sz="1200" dirty="0">
+                <a:solidFill>
+                  <a:srgbClr val="717670"/>
+                </a:solidFill>
+                <a:latin typeface="Calibri" pitchFamily="34" charset="0"/>
+                <a:ea typeface="Calibri" pitchFamily="34" charset="-122"/>
+                <a:cs typeface="Calibri" pitchFamily="34" charset="-120"/>
+              </a:rPr>
+              <a:t>Docker Compose · библиотека наполнена · порог откалиброван</a:t>
+            </a:r>
+            <a:endParaRPr lang="en-US" sz="1200" dirty="0"/>
+          </a:p>
+        </p:txBody>
+      </p:sp>
+      <p:sp>
+        <p:nvSpPr>
+          <p:cNvPr id="12" name="Text 10"/>
+          <p:cNvSpPr/>
+          <p:nvPr/>
+        </p:nvSpPr>
+        <p:spPr>
+          <a:xfrm>
+            <a:off x="3246120" y="3931920"/>
+            <a:ext cx="182880" cy="365760"/>
+          </a:xfrm>
+          <a:prstGeom prst="rect">
+            <a:avLst/>
+          </a:prstGeom>
+          <a:noFill/>
+          <a:ln/>
+        </p:spPr>
+        <p:txBody>
+          <a:bodyPr wrap="square" rtlCol="0" anchor="ctr"/>
+          <a:lstStyle/>
+          <a:p>
+            <a:pPr algn="ctr" indent="0" marL="0">
+              <a:buNone/>
+            </a:pPr>
+            <a:r>
+              <a:rPr lang="en-US" sz="1800" b="1" dirty="0">
+                <a:solidFill>
+                  <a:srgbClr val="21A663"/>
+                </a:solidFill>
+              </a:rPr>
+              <a:t>→</a:t>
+            </a:r>
+            <a:endParaRPr lang="en-US" sz="1800" dirty="0"/>
+          </a:p>
+        </p:txBody>
+      </p:sp>
+      <p:sp>
+        <p:nvSpPr>
+          <p:cNvPr id="13" name="Shape 11"/>
+          <p:cNvSpPr/>
+          <p:nvPr/>
+        </p:nvSpPr>
+        <p:spPr>
+          <a:xfrm>
+            <a:off x="3749040" y="2286000"/>
+            <a:ext cx="365760" cy="365760"/>
+          </a:xfrm>
+          <a:prstGeom prst="ellipse">
+            <a:avLst/>
+          </a:prstGeom>
+          <a:solidFill>
+            <a:srgbClr val="F5B800"/>
+          </a:solidFill>
+          <a:ln/>
+        </p:spPr>
+      </p:sp>
+      <p:sp>
+        <p:nvSpPr>
+          <p:cNvPr id="14" name="Text 12"/>
+          <p:cNvSpPr/>
+          <p:nvPr/>
+        </p:nvSpPr>
+        <p:spPr>
+          <a:xfrm>
+            <a:off x="3749040" y="2286000"/>
+            <a:ext cx="365760" cy="365760"/>
+          </a:xfrm>
+          <a:prstGeom prst="rect">
+            <a:avLst/>
+          </a:prstGeom>
+          <a:noFill/>
+          <a:ln/>
+        </p:spPr>
+        <p:txBody>
+          <a:bodyPr wrap="square" rtlCol="0" anchor="ctr"/>
+          <a:lstStyle/>
+          <a:p>
+            <a:pPr algn="ctr" indent="0" marL="0">
+              <a:buNone/>
+            </a:pPr>
+            <a:r>
+              <a:rPr lang="en-US" sz="1300" b="1" dirty="0">
+                <a:solidFill>
+                  <a:srgbClr val="FFFFFF"/>
+                </a:solidFill>
+                <a:latin typeface="Georgia" pitchFamily="34" charset="0"/>
+                <a:ea typeface="Georgia" pitchFamily="34" charset="-122"/>
+                <a:cs typeface="Georgia" pitchFamily="34" charset="-120"/>
+              </a:rPr>
+              <a:t>2</a:t>
+            </a:r>
+            <a:endParaRPr lang="en-US" sz="1300" dirty="0"/>
+          </a:p>
+        </p:txBody>
+      </p:sp>
+      <p:sp>
+        <p:nvSpPr>
+          <p:cNvPr id="15" name="Shape 13"/>
+          <p:cNvSpPr/>
+          <p:nvPr/>
+        </p:nvSpPr>
+        <p:spPr>
+          <a:xfrm>
+            <a:off x="3429000" y="2926080"/>
+            <a:ext cx="2606040" cy="2651760"/>
+          </a:xfrm>
+          <a:prstGeom prst="rect">
+            <a:avLst/>
+          </a:prstGeom>
+          <a:solidFill>
+            <a:srgbClr val="FFFFFF"/>
+          </a:solidFill>
+          <a:ln w="12700">
+            <a:solidFill>
+              <a:srgbClr val="E4E6E1"/>
+            </a:solidFill>
+            <a:prstDash val="solid"/>
+          </a:ln>
+          <a:effectLst>
+            <a:outerShdw sx="100000" sy="100000" kx="0" ky="0" algn="bl" rotWithShape="0" blurRad="101600" dist="38100" dir="8100000">
+              <a:srgbClr val="000000">
+                <a:alpha val="12000"/>
+              </a:srgbClr>
+            </a:outerShdw>
+          </a:effectLst>
+        </p:spPr>
+      </p:sp>
+      <p:sp>
+        <p:nvSpPr>
+          <p:cNvPr id="16" name="Shape 14"/>
+          <p:cNvSpPr/>
+          <p:nvPr/>
+        </p:nvSpPr>
+        <p:spPr>
+          <a:xfrm>
+            <a:off x="3429000" y="2926080"/>
+            <a:ext cx="2606040" cy="109728"/>
+          </a:xfrm>
+          <a:prstGeom prst="rect">
+            <a:avLst/>
+          </a:prstGeom>
+          <a:solidFill>
+            <a:srgbClr val="F5B800"/>
+          </a:solidFill>
+          <a:ln/>
+        </p:spPr>
+      </p:sp>
+      <p:sp>
+        <p:nvSpPr>
+          <p:cNvPr id="17" name="Text 15"/>
+          <p:cNvSpPr/>
+          <p:nvPr/>
+        </p:nvSpPr>
+        <p:spPr>
+          <a:xfrm>
+            <a:off x="3630168" y="3127248"/>
+            <a:ext cx="2240280" cy="457200"/>
+          </a:xfrm>
+          <a:prstGeom prst="rect">
+            <a:avLst/>
+          </a:prstGeom>
+          <a:noFill/>
+          <a:ln/>
+        </p:spPr>
+        <p:txBody>
+          <a:bodyPr wrap="square" rtlCol="0" anchor="ctr"/>
+          <a:lstStyle/>
+          <a:p>
+            <a:pPr indent="0" marL="0">
+              <a:buNone/>
+            </a:pPr>
+            <a:r>
+              <a:rPr lang="en-US" sz="1600" b="1" dirty="0">
+                <a:solidFill>
+                  <a:srgbClr val="14160F"/>
+                </a:solidFill>
+                <a:latin typeface="Georgia" pitchFamily="34" charset="0"/>
+                <a:ea typeface="Georgia" pitchFamily="34" charset="-122"/>
+                <a:cs typeface="Georgia" pitchFamily="34" charset="-120"/>
+              </a:rPr>
+              <a:t>Перед демо</a:t>
+            </a:r>
+            <a:endParaRPr lang="en-US" sz="1600" dirty="0"/>
+          </a:p>
+        </p:txBody>
+      </p:sp>
+      <p:sp>
+        <p:nvSpPr>
+          <p:cNvPr id="18" name="Text 16"/>
+          <p:cNvSpPr/>
+          <p:nvPr/>
+        </p:nvSpPr>
+        <p:spPr>
+          <a:xfrm>
+            <a:off x="3657600" y="3657600"/>
+            <a:ext cx="2194560" cy="1828800"/>
+          </a:xfrm>
+          <a:prstGeom prst="rect">
+            <a:avLst/>
+          </a:prstGeom>
+          <a:noFill/>
+          <a:ln/>
+        </p:spPr>
+        <p:txBody>
+          <a:bodyPr wrap="square" rtlCol="0" anchor="t"/>
+          <a:lstStyle/>
+          <a:p>
+            <a:pPr marL="342900" indent="-342900">
+              <a:spcAft>
+                <a:spcPts val="800"/>
+              </a:spcAft>
+              <a:buSzPct val="100000"/>
+              <a:buChar char="•"/>
+            </a:pPr>
+            <a:r>
+              <a:rPr lang="en-US" sz="1200" dirty="0">
+                <a:solidFill>
+                  <a:srgbClr val="717670"/>
+                </a:solidFill>
+                <a:latin typeface="Calibri" pitchFamily="34" charset="0"/>
+                <a:ea typeface="Calibri" pitchFamily="34" charset="-122"/>
+                <a:cs typeface="Calibri" pitchFamily="34" charset="-120"/>
+              </a:rPr>
+              <a:t>Живой UAT golden-path</a:t>
+            </a:r>
+            <a:endParaRPr lang="en-US" sz="1200" dirty="0"/>
+          </a:p>
+          <a:p>
+            <a:pPr marL="342900" indent="-342900">
+              <a:spcAft>
+                <a:spcPts val="800"/>
+              </a:spcAft>
+              <a:buSzPct val="100000"/>
+              <a:buChar char="•"/>
+            </a:pPr>
+            <a:r>
+              <a:rPr lang="en-US" sz="1200" dirty="0">
+                <a:solidFill>
+                  <a:srgbClr val="717670"/>
+                </a:solidFill>
+                <a:latin typeface="Calibri" pitchFamily="34" charset="0"/>
+                <a:ea typeface="Calibri" pitchFamily="34" charset="-122"/>
+                <a:cs typeface="Calibri" pitchFamily="34" charset="-120"/>
+              </a:rPr>
+              <a:t>Скринкаст 5–7 мин + презентация</a:t>
+            </a:r>
+            <a:endParaRPr lang="en-US" sz="1200" dirty="0"/>
+          </a:p>
+        </p:txBody>
+      </p:sp>
+      <p:sp>
+        <p:nvSpPr>
+          <p:cNvPr id="19" name="Text 17"/>
+          <p:cNvSpPr/>
+          <p:nvPr/>
+        </p:nvSpPr>
+        <p:spPr>
+          <a:xfrm>
+            <a:off x="6035040" y="3931920"/>
+            <a:ext cx="182880" cy="365760"/>
+          </a:xfrm>
+          <a:prstGeom prst="rect">
+            <a:avLst/>
+          </a:prstGeom>
+          <a:noFill/>
+          <a:ln/>
+        </p:spPr>
+        <p:txBody>
+          <a:bodyPr wrap="square" rtlCol="0" anchor="ctr"/>
+          <a:lstStyle/>
+          <a:p>
+            <a:pPr algn="ctr" indent="0" marL="0">
+              <a:buNone/>
+            </a:pPr>
+            <a:r>
+              <a:rPr lang="en-US" sz="1800" b="1" dirty="0">
+                <a:solidFill>
+                  <a:srgbClr val="21A663"/>
+                </a:solidFill>
+              </a:rPr>
+              <a:t>→</a:t>
+            </a:r>
+            <a:endParaRPr lang="en-US" sz="1800" dirty="0"/>
+          </a:p>
+        </p:txBody>
+      </p:sp>
+      <p:sp>
+        <p:nvSpPr>
+          <p:cNvPr id="20" name="Shape 18"/>
+          <p:cNvSpPr/>
+          <p:nvPr/>
+        </p:nvSpPr>
+        <p:spPr>
+          <a:xfrm>
+            <a:off x="6537960" y="2286000"/>
+            <a:ext cx="365760" cy="365760"/>
+          </a:xfrm>
+          <a:prstGeom prst="ellipse">
+            <a:avLst/>
+          </a:prstGeom>
+          <a:solidFill>
+            <a:srgbClr val="2741E0"/>
+          </a:solidFill>
+          <a:ln/>
+        </p:spPr>
+      </p:sp>
+      <p:sp>
+        <p:nvSpPr>
+          <p:cNvPr id="21" name="Text 19"/>
+          <p:cNvSpPr/>
+          <p:nvPr/>
+        </p:nvSpPr>
+        <p:spPr>
+          <a:xfrm>
+            <a:off x="6537960" y="2286000"/>
+            <a:ext cx="365760" cy="365760"/>
+          </a:xfrm>
+          <a:prstGeom prst="rect">
+            <a:avLst/>
+          </a:prstGeom>
+          <a:noFill/>
+          <a:ln/>
+        </p:spPr>
+        <p:txBody>
+          <a:bodyPr wrap="square" rtlCol="0" anchor="ctr"/>
+          <a:lstStyle/>
+          <a:p>
+            <a:pPr algn="ctr" indent="0" marL="0">
+              <a:buNone/>
+            </a:pPr>
+            <a:r>
+              <a:rPr lang="en-US" sz="1300" b="1" dirty="0">
+                <a:solidFill>
+                  <a:srgbClr val="FFFFFF"/>
+                </a:solidFill>
+                <a:latin typeface="Georgia" pitchFamily="34" charset="0"/>
+                <a:ea typeface="Georgia" pitchFamily="34" charset="-122"/>
+                <a:cs typeface="Georgia" pitchFamily="34" charset="-120"/>
+              </a:rPr>
+              <a:t>3</a:t>
+            </a:r>
+            <a:endParaRPr lang="en-US" sz="1300" dirty="0"/>
+          </a:p>
+        </p:txBody>
+      </p:sp>
+      <p:sp>
+        <p:nvSpPr>
+          <p:cNvPr id="22" name="Shape 20"/>
+          <p:cNvSpPr/>
+          <p:nvPr/>
+        </p:nvSpPr>
+        <p:spPr>
+          <a:xfrm>
+            <a:off x="6217920" y="2926080"/>
+            <a:ext cx="2606040" cy="2651760"/>
+          </a:xfrm>
+          <a:prstGeom prst="rect">
+            <a:avLst/>
+          </a:prstGeom>
+          <a:solidFill>
+            <a:srgbClr val="FFFFFF"/>
+          </a:solidFill>
+          <a:ln w="12700">
+            <a:solidFill>
+              <a:srgbClr val="E4E6E1"/>
+            </a:solidFill>
+            <a:prstDash val="solid"/>
+          </a:ln>
+          <a:effectLst>
+            <a:outerShdw sx="100000" sy="100000" kx="0" ky="0" algn="bl" rotWithShape="0" blurRad="101600" dist="38100" dir="8100000">
+              <a:srgbClr val="000000">
+                <a:alpha val="12000"/>
+              </a:srgbClr>
+            </a:outerShdw>
+          </a:effectLst>
+        </p:spPr>
+      </p:sp>
+      <p:sp>
+        <p:nvSpPr>
+          <p:cNvPr id="23" name="Shape 21"/>
+          <p:cNvSpPr/>
+          <p:nvPr/>
+        </p:nvSpPr>
+        <p:spPr>
+          <a:xfrm>
+            <a:off x="6217920" y="2926080"/>
+            <a:ext cx="2606040" cy="109728"/>
+          </a:xfrm>
+          <a:prstGeom prst="rect">
+            <a:avLst/>
+          </a:prstGeom>
+          <a:solidFill>
+            <a:srgbClr val="2741E0"/>
+          </a:solidFill>
+          <a:ln/>
+        </p:spPr>
+      </p:sp>
+      <p:sp>
+        <p:nvSpPr>
+          <p:cNvPr id="24" name="Text 22"/>
+          <p:cNvSpPr/>
+          <p:nvPr/>
+        </p:nvSpPr>
+        <p:spPr>
+          <a:xfrm>
+            <a:off x="6419088" y="3127248"/>
+            <a:ext cx="2240280" cy="457200"/>
+          </a:xfrm>
+          <a:prstGeom prst="rect">
+            <a:avLst/>
+          </a:prstGeom>
+          <a:noFill/>
+          <a:ln/>
+        </p:spPr>
+        <p:txBody>
+          <a:bodyPr wrap="square" rtlCol="0" anchor="ctr"/>
+          <a:lstStyle/>
+          <a:p>
+            <a:pPr indent="0" marL="0">
+              <a:buNone/>
+            </a:pPr>
+            <a:r>
+              <a:rPr lang="en-US" sz="1600" b="1" dirty="0">
+                <a:solidFill>
+                  <a:srgbClr val="14160F"/>
+                </a:solidFill>
+                <a:latin typeface="Georgia" pitchFamily="34" charset="0"/>
+                <a:ea typeface="Georgia" pitchFamily="34" charset="-122"/>
+                <a:cs typeface="Georgia" pitchFamily="34" charset="-120"/>
+              </a:rPr>
+              <a:t>Пилот в школе</a:t>
+            </a:r>
+            <a:endParaRPr lang="en-US" sz="1600" dirty="0"/>
+          </a:p>
+        </p:txBody>
+      </p:sp>
+      <p:sp>
+        <p:nvSpPr>
+          <p:cNvPr id="25" name="Text 23"/>
+          <p:cNvSpPr/>
+          <p:nvPr/>
+        </p:nvSpPr>
+        <p:spPr>
+          <a:xfrm>
+            <a:off x="6446520" y="3657600"/>
+            <a:ext cx="2194560" cy="1828800"/>
+          </a:xfrm>
+          <a:prstGeom prst="rect">
+            <a:avLst/>
+          </a:prstGeom>
+          <a:noFill/>
+          <a:ln/>
+        </p:spPr>
+        <p:txBody>
+          <a:bodyPr wrap="square" rtlCol="0" anchor="t"/>
+          <a:lstStyle/>
+          <a:p>
+            <a:pPr marL="342900" indent="-342900">
+              <a:spcAft>
+                <a:spcPts val="800"/>
+              </a:spcAft>
+              <a:buSzPct val="100000"/>
+              <a:buChar char="•"/>
+            </a:pPr>
+            <a:r>
+              <a:rPr lang="en-US" sz="1200" dirty="0">
+                <a:solidFill>
+                  <a:srgbClr val="717670"/>
+                </a:solidFill>
+                <a:latin typeface="Calibri" pitchFamily="34" charset="0"/>
+                <a:ea typeface="Calibri" pitchFamily="34" charset="-122"/>
+                <a:cs typeface="Calibri" pitchFamily="34" charset="-120"/>
+              </a:rPr>
+              <a:t>Обкатка с реальными классными руководителями</a:t>
+            </a:r>
+            <a:endParaRPr lang="en-US" sz="1200" dirty="0"/>
+          </a:p>
+          <a:p>
+            <a:pPr marL="342900" indent="-342900">
+              <a:spcAft>
+                <a:spcPts val="800"/>
+              </a:spcAft>
+              <a:buSzPct val="100000"/>
+              <a:buChar char="•"/>
+            </a:pPr>
+            <a:r>
+              <a:rPr lang="en-US" sz="1200" dirty="0">
+                <a:solidFill>
+                  <a:srgbClr val="717670"/>
+                </a:solidFill>
+                <a:latin typeface="Calibri" pitchFamily="34" charset="0"/>
+                <a:ea typeface="Calibri" pitchFamily="34" charset="-122"/>
+                <a:cs typeface="Calibri" pitchFamily="34" charset="-120"/>
+              </a:rPr>
+              <a:t>Модерация контента методистами</a:t>
+            </a:r>
+            <a:endParaRPr lang="en-US" sz="1200" dirty="0"/>
+          </a:p>
+        </p:txBody>
+      </p:sp>
+      <p:sp>
+        <p:nvSpPr>
+          <p:cNvPr id="26" name="Text 24"/>
+          <p:cNvSpPr/>
+          <p:nvPr/>
+        </p:nvSpPr>
+        <p:spPr>
+          <a:xfrm>
+            <a:off x="8823960" y="3931920"/>
+            <a:ext cx="182880" cy="365760"/>
+          </a:xfrm>
+          <a:prstGeom prst="rect">
+            <a:avLst/>
+          </a:prstGeom>
+          <a:noFill/>
+          <a:ln/>
+        </p:spPr>
+        <p:txBody>
+          <a:bodyPr wrap="square" rtlCol="0" anchor="ctr"/>
+          <a:lstStyle/>
+          <a:p>
+            <a:pPr algn="ctr" indent="0" marL="0">
+              <a:buNone/>
+            </a:pPr>
+            <a:r>
+              <a:rPr lang="en-US" sz="1800" b="1" dirty="0">
+                <a:solidFill>
+                  <a:srgbClr val="21A663"/>
+                </a:solidFill>
+              </a:rPr>
+              <a:t>→</a:t>
+            </a:r>
+            <a:endParaRPr lang="en-US" sz="1800" dirty="0"/>
+          </a:p>
+        </p:txBody>
+      </p:sp>
+      <p:sp>
+        <p:nvSpPr>
+          <p:cNvPr id="27" name="Shape 25"/>
+          <p:cNvSpPr/>
+          <p:nvPr/>
+        </p:nvSpPr>
+        <p:spPr>
+          <a:xfrm>
+            <a:off x="9326880" y="2286000"/>
+            <a:ext cx="365760" cy="365760"/>
+          </a:xfrm>
+          <a:prstGeom prst="ellipse">
+            <a:avLst/>
+          </a:prstGeom>
+          <a:solidFill>
+            <a:srgbClr val="093520"/>
+          </a:solidFill>
+          <a:ln/>
+        </p:spPr>
+      </p:sp>
+      <p:sp>
+        <p:nvSpPr>
+          <p:cNvPr id="28" name="Text 26"/>
+          <p:cNvSpPr/>
+          <p:nvPr/>
+        </p:nvSpPr>
+        <p:spPr>
+          <a:xfrm>
+            <a:off x="9326880" y="2286000"/>
+            <a:ext cx="365760" cy="365760"/>
+          </a:xfrm>
+          <a:prstGeom prst="rect">
+            <a:avLst/>
+          </a:prstGeom>
+          <a:noFill/>
+          <a:ln/>
+        </p:spPr>
+        <p:txBody>
+          <a:bodyPr wrap="square" rtlCol="0" anchor="ctr"/>
+          <a:lstStyle/>
+          <a:p>
+            <a:pPr algn="ctr" indent="0" marL="0">
+              <a:buNone/>
+            </a:pPr>
+            <a:r>
+              <a:rPr lang="en-US" sz="1300" b="1" dirty="0">
+                <a:solidFill>
+                  <a:srgbClr val="FFFFFF"/>
+                </a:solidFill>
+                <a:latin typeface="Georgia" pitchFamily="34" charset="0"/>
+                <a:ea typeface="Georgia" pitchFamily="34" charset="-122"/>
+                <a:cs typeface="Georgia" pitchFamily="34" charset="-120"/>
+              </a:rPr>
+              <a:t>4</a:t>
+            </a:r>
+            <a:endParaRPr lang="en-US" sz="1300" dirty="0"/>
+          </a:p>
+        </p:txBody>
+      </p:sp>
+      <p:sp>
+        <p:nvSpPr>
+          <p:cNvPr id="29" name="Shape 27"/>
+          <p:cNvSpPr/>
+          <p:nvPr/>
+        </p:nvSpPr>
+        <p:spPr>
+          <a:xfrm>
+            <a:off x="9006840" y="2926080"/>
+            <a:ext cx="2606040" cy="2651760"/>
+          </a:xfrm>
+          <a:prstGeom prst="rect">
+            <a:avLst/>
+          </a:prstGeom>
+          <a:solidFill>
+            <a:srgbClr val="FFFFFF"/>
+          </a:solidFill>
+          <a:ln w="12700">
+            <a:solidFill>
+              <a:srgbClr val="E4E6E1"/>
+            </a:solidFill>
+            <a:prstDash val="solid"/>
+          </a:ln>
+          <a:effectLst>
+            <a:outerShdw sx="100000" sy="100000" kx="0" ky="0" algn="bl" rotWithShape="0" blurRad="101600" dist="38100" dir="8100000">
+              <a:srgbClr val="000000">
+                <a:alpha val="12000"/>
+              </a:srgbClr>
+            </a:outerShdw>
+          </a:effectLst>
+        </p:spPr>
+      </p:sp>
+      <p:sp>
+        <p:nvSpPr>
+          <p:cNvPr id="30" name="Shape 28"/>
+          <p:cNvSpPr/>
+          <p:nvPr/>
+        </p:nvSpPr>
+        <p:spPr>
+          <a:xfrm>
+            <a:off x="9006840" y="2926080"/>
+            <a:ext cx="2606040" cy="109728"/>
+          </a:xfrm>
+          <a:prstGeom prst="rect">
+            <a:avLst/>
+          </a:prstGeom>
+          <a:solidFill>
+            <a:srgbClr val="093520"/>
+          </a:solidFill>
+          <a:ln/>
+        </p:spPr>
+      </p:sp>
+      <p:sp>
+        <p:nvSpPr>
+          <p:cNvPr id="31" name="Text 29"/>
+          <p:cNvSpPr/>
+          <p:nvPr/>
+        </p:nvSpPr>
+        <p:spPr>
+          <a:xfrm>
+            <a:off x="9208008" y="3127248"/>
+            <a:ext cx="2240280" cy="457200"/>
+          </a:xfrm>
+          <a:prstGeom prst="rect">
+            <a:avLst/>
+          </a:prstGeom>
+          <a:noFill/>
+          <a:ln/>
+        </p:spPr>
+        <p:txBody>
+          <a:bodyPr wrap="square" rtlCol="0" anchor="ctr"/>
+          <a:lstStyle/>
+          <a:p>
+            <a:pPr indent="0" marL="0">
+              <a:buNone/>
+            </a:pPr>
+            <a:r>
+              <a:rPr lang="en-US" sz="1600" b="1" dirty="0">
+                <a:solidFill>
+                  <a:srgbClr val="14160F"/>
+                </a:solidFill>
+                <a:latin typeface="Georgia" pitchFamily="34" charset="0"/>
+                <a:ea typeface="Georgia" pitchFamily="34" charset="-122"/>
+                <a:cs typeface="Georgia" pitchFamily="34" charset="-120"/>
+              </a:rPr>
+              <a:t>Масштаб B2B</a:t>
+            </a:r>
+            <a:endParaRPr lang="en-US" sz="1600" dirty="0"/>
+          </a:p>
+        </p:txBody>
+      </p:sp>
+      <p:sp>
+        <p:nvSpPr>
+          <p:cNvPr id="32" name="Text 30"/>
+          <p:cNvSpPr/>
+          <p:nvPr/>
+        </p:nvSpPr>
+        <p:spPr>
+          <a:xfrm>
+            <a:off x="9235440" y="3657600"/>
+            <a:ext cx="2194560" cy="1828800"/>
+          </a:xfrm>
+          <a:prstGeom prst="rect">
+            <a:avLst/>
+          </a:prstGeom>
+          <a:noFill/>
+          <a:ln/>
+        </p:spPr>
+        <p:txBody>
+          <a:bodyPr wrap="square" rtlCol="0" anchor="t"/>
+          <a:lstStyle/>
+          <a:p>
+            <a:pPr marL="342900" indent="-342900">
+              <a:spcAft>
+                <a:spcPts val="800"/>
+              </a:spcAft>
+              <a:buSzPct val="100000"/>
+              <a:buChar char="•"/>
+            </a:pPr>
+            <a:r>
+              <a:rPr lang="en-US" sz="1200" dirty="0">
+                <a:solidFill>
+                  <a:srgbClr val="717670"/>
+                </a:solidFill>
+                <a:latin typeface="Calibri" pitchFamily="34" charset="0"/>
+                <a:ea typeface="Calibri" pitchFamily="34" charset="-122"/>
+                <a:cs typeface="Calibri" pitchFamily="34" charset="-120"/>
+              </a:rPr>
+              <a:t>Подписка для школ и управлений образования</a:t>
+            </a:r>
+            <a:endParaRPr lang="en-US" sz="1200" dirty="0"/>
+          </a:p>
+          <a:p>
+            <a:pPr marL="342900" indent="-342900">
+              <a:spcAft>
+                <a:spcPts val="800"/>
+              </a:spcAft>
+              <a:buSzPct val="100000"/>
+              <a:buChar char="•"/>
+            </a:pPr>
+            <a:r>
+              <a:rPr lang="en-US" sz="1200" dirty="0">
+                <a:solidFill>
+                  <a:srgbClr val="717670"/>
+                </a:solidFill>
+                <a:latin typeface="Calibri" pitchFamily="34" charset="0"/>
+                <a:ea typeface="Calibri" pitchFamily="34" charset="-122"/>
+                <a:cs typeface="Calibri" pitchFamily="34" charset="-120"/>
+              </a:rPr>
+              <a:t>Интеграции с журналами · аналитика воспитания</a:t>
+            </a:r>
+            <a:endParaRPr lang="en-US" sz="1200" dirty="0"/>
+          </a:p>
+        </p:txBody>
+      </p:sp>
+      <p:sp>
+        <p:nvSpPr>
+          <p:cNvPr id="33" name="Text 31"/>
+          <p:cNvSpPr/>
+          <p:nvPr/>
+        </p:nvSpPr>
+        <p:spPr>
+          <a:xfrm>
+            <a:off x="640080" y="5852160"/>
+            <a:ext cx="10881360" cy="457200"/>
+          </a:xfrm>
+          <a:prstGeom prst="rect">
+            <a:avLst/>
+          </a:prstGeom>
+          <a:noFill/>
+          <a:ln/>
+        </p:spPr>
+        <p:txBody>
+          <a:bodyPr wrap="square" rtlCol="0" anchor="ctr"/>
+          <a:lstStyle/>
+          <a:p>
+            <a:pPr algn="ctr" indent="0" marL="0">
+              <a:buNone/>
+            </a:pPr>
+            <a:r>
+              <a:rPr lang="en-US" sz="1400" b="1" i="1" dirty="0">
+                <a:solidFill>
+                  <a:srgbClr val="21A663"/>
+                </a:solidFill>
+                <a:latin typeface="Calibri" pitchFamily="34" charset="0"/>
+                <a:ea typeface="Calibri" pitchFamily="34" charset="-122"/>
+                <a:cs typeface="Calibri" pitchFamily="34" charset="-120"/>
+              </a:rPr>
+              <a:t>Сейчас здесь →  MVP полностью реализован, идём к пилоту</a:t>
+            </a:r>
+            <a:endParaRPr lang="en-US" sz="1400" dirty="0"/>
+          </a:p>
+        </p:txBody>
+      </p:sp>
+    </p:spTree>
+  </p:cSld>
+  <p:clrMapOvr>
+    <a:masterClrMapping/>
+  </p:clrMapOvr>
+</p:sld>
+</file>
+
+<file path=ppt/slides/slide11.xml><?xml version="1.0" encoding="utf-8"?>
+<p:sld xmlns:a="http://schemas.openxmlformats.org/drawingml/2006/main" xmlns:r="http://schemas.openxmlformats.org/officeDocument/2006/relationships" xmlns:p="http://schemas.openxmlformats.org/presentationml/2006/main">
+  <p:cSld name="Slide 11">
+    <p:bg>
+      <p:bgPr>
+        <a:solidFill>
+          <a:srgbClr val="F8F9F7"/>
+        </a:solidFill>
+      </p:bgPr>
+    </p:bg>
+    <p:spTree>
+      <p:nvGrpSpPr>
+        <p:cNvPr id="1" name=""/>
+        <p:cNvGrpSpPr/>
+        <p:nvPr/>
+      </p:nvGrpSpPr>
+      <p:grpSpPr>
+        <a:xfrm>
+          <a:off x="0" y="0"/>
+          <a:ext cx="0" cy="0"/>
+          <a:chOff x="0" y="0"/>
+          <a:chExt cx="0" cy="0"/>
+        </a:xfrm>
+      </p:grpSpPr>
+      <p:sp>
+        <p:nvSpPr>
+          <p:cNvPr id="2" name="Shape 0"/>
+          <p:cNvSpPr/>
+          <p:nvPr/>
+        </p:nvSpPr>
+        <p:spPr>
+          <a:xfrm>
+            <a:off x="640080" y="566928"/>
+            <a:ext cx="310896" cy="310896"/>
+          </a:xfrm>
+          <a:prstGeom prst="rect">
+            <a:avLst/>
+          </a:prstGeom>
+          <a:solidFill>
+            <a:srgbClr val="F5B800"/>
+          </a:solidFill>
+          <a:ln/>
+        </p:spPr>
+      </p:sp>
+      <p:sp>
+        <p:nvSpPr>
+          <p:cNvPr id="3" name="Text 1"/>
+          <p:cNvSpPr/>
+          <p:nvPr/>
+        </p:nvSpPr>
+        <p:spPr>
+          <a:xfrm>
+            <a:off x="1060704" y="457200"/>
+            <a:ext cx="8229600" cy="502920"/>
+          </a:xfrm>
+          <a:prstGeom prst="rect">
+            <a:avLst/>
+          </a:prstGeom>
+          <a:noFill/>
+          <a:ln/>
+        </p:spPr>
+        <p:txBody>
+          <a:bodyPr wrap="square" rtlCol="0" anchor="ctr"/>
+          <a:lstStyle/>
+          <a:p>
+            <a:pPr indent="0" marL="0">
+              <a:buNone/>
+            </a:pPr>
+            <a:r>
+              <a:rPr lang="en-US" sz="1300" b="1" spc="200" kern="0" dirty="0">
+                <a:solidFill>
+                  <a:srgbClr val="21A663"/>
+                </a:solidFill>
+                <a:latin typeface="Calibri" pitchFamily="34" charset="0"/>
+                <a:ea typeface="Calibri" pitchFamily="34" charset="-122"/>
+                <a:cs typeface="Calibri" pitchFamily="34" charset="-120"/>
+              </a:rPr>
+              <a:t>08 — РИСКИ</a:t>
+            </a:r>
+            <a:endParaRPr lang="en-US" sz="1300" dirty="0"/>
+          </a:p>
+        </p:txBody>
+      </p:sp>
+      <p:sp>
+        <p:nvSpPr>
+          <p:cNvPr id="4" name="Text 2"/>
+          <p:cNvSpPr/>
+          <p:nvPr/>
+        </p:nvSpPr>
+        <p:spPr>
+          <a:xfrm>
+            <a:off x="640080" y="868680"/>
+            <a:ext cx="10881360" cy="868680"/>
+          </a:xfrm>
+          <a:prstGeom prst="rect">
+            <a:avLst/>
+          </a:prstGeom>
+          <a:noFill/>
+          <a:ln/>
+        </p:spPr>
+        <p:txBody>
+          <a:bodyPr wrap="square" rtlCol="0" anchor="ctr"/>
+          <a:lstStyle/>
+          <a:p>
+            <a:pPr indent="0" marL="0">
+              <a:buNone/>
+            </a:pPr>
+            <a:r>
+              <a:rPr lang="en-US" sz="3200" b="1" dirty="0">
+                <a:solidFill>
+                  <a:srgbClr val="14160F"/>
+                </a:solidFill>
+                <a:latin typeface="Georgia" pitchFamily="34" charset="0"/>
+                <a:ea typeface="Georgia" pitchFamily="34" charset="-122"/>
+                <a:cs typeface="Georgia" pitchFamily="34" charset="-120"/>
+              </a:rPr>
               <a:t>Риски и их нейтрализация</a:t>
             </a:r>
             <a:endParaRPr lang="en-US" sz="3200" dirty="0"/>
@@ -2481,7 +3726,7 @@
       </p:sp>
       <p:graphicFrame>
         <p:nvGraphicFramePr>
-          <p:cNvPr id="11" name="Table 0"/>
+          <p:cNvPr id="12" name="Table 0"/>
           <p:cNvGraphicFramePr>
             <a:graphicFrameLocks noGrp="1"/>
           </p:cNvGraphicFramePr>
@@ -3998,9 +5243,9 @@
 </p:sld>
 </file>
 
-<file path=ppt/slides/slide11.xml><?xml version="1.0" encoding="utf-8"?>
+<file path=ppt/slides/slide12.xml><?xml version="1.0" encoding="utf-8"?>
 <p:sld xmlns:a="http://schemas.openxmlformats.org/drawingml/2006/main" xmlns:r="http://schemas.openxmlformats.org/officeDocument/2006/relationships" xmlns:p="http://schemas.openxmlformats.org/presentationml/2006/main">
-  <p:cSld name="Slide 11">
+  <p:cSld name="Slide 12">
     <p:bg>
       <p:bgPr>
         <a:solidFill>
@@ -4874,9 +6119,9 @@
 </p:sld>
 </file>
 
-<file path=ppt/slides/slide12.xml><?xml version="1.0" encoding="utf-8"?>
+<file path=ppt/slides/slide13.xml><?xml version="1.0" encoding="utf-8"?>
 <p:sld xmlns:a="http://schemas.openxmlformats.org/drawingml/2006/main" xmlns:r="http://schemas.openxmlformats.org/officeDocument/2006/relationships" xmlns:p="http://schemas.openxmlformats.org/presentationml/2006/main">
-  <p:cSld name="Slide 12">
+  <p:cSld name="Slide 13">
     <p:bg>
       <p:bgPr>
         <a:solidFill>
@@ -5525,9 +6770,9 @@
 </p:sld>
 </file>
 
-<file path=ppt/slides/slide13.xml><?xml version="1.0" encoding="utf-8"?>
+<file path=ppt/slides/slide14.xml><?xml version="1.0" encoding="utf-8"?>
 <p:sld xmlns:a="http://schemas.openxmlformats.org/drawingml/2006/main" xmlns:r="http://schemas.openxmlformats.org/officeDocument/2006/relationships" xmlns:p="http://schemas.openxmlformats.org/presentationml/2006/main">
-  <p:cSld name="Slide 13">
+  <p:cSld name="Slide 14">
     <p:bg>
       <p:bgPr>
         <a:solidFill>
@@ -16008,7 +17253,7 @@
                 <a:ea typeface="Calibri" pitchFamily="34" charset="-122"/>
                 <a:cs typeface="Calibri" pitchFamily="34" charset="-120"/>
               </a:rPr>
-              <a:t>06 — MVP</a:t>
+              <a:t>06 — MVP · ДЕМО-ПУТЬ 1/2</a:t>
             </a:r>
             <a:endParaRPr lang="en-US" sz="1300" dirty="0"/>
           </a:p>
@@ -16047,7 +17292,7 @@
                 <a:ea typeface="Georgia" pitchFamily="34" charset="-122"/>
                 <a:cs typeface="Georgia" pitchFamily="34" charset="-120"/>
               </a:rPr>
-              <a:t>Рабочая версия: полный путь без заглушек</a:t>
+              <a:t>Контекст → стрим генерации</a:t>
             </a:r>
             <a:endParaRPr lang="en-US" sz="3200" dirty="0"/>
           </a:p>
@@ -16055,53 +17300,14 @@
       </p:sp>
       <p:sp>
         <p:nvSpPr>
-          <p:cNvPr id="5" name="Text 3"/>
-          <p:cNvSpPr/>
-          <p:nvPr/>
-        </p:nvSpPr>
-        <p:spPr>
-          <a:xfrm>
-            <a:off x="640080" y="1874520"/>
-            <a:ext cx="5486400" cy="365760"/>
-          </a:xfrm>
-          <a:prstGeom prst="rect">
-            <a:avLst/>
-          </a:prstGeom>
-          <a:noFill/>
-          <a:ln/>
-        </p:spPr>
-        <p:txBody>
-          <a:bodyPr wrap="square" rtlCol="0" anchor="ctr"/>
-          <a:lstStyle/>
-          <a:p>
-            <a:pPr indent="0" marL="0">
-              <a:buNone/>
-            </a:pPr>
-            <a:r>
-              <a:rPr lang="en-US" sz="1400" b="1" dirty="0">
-                <a:solidFill>
-                  <a:srgbClr val="14160F"/>
-                </a:solidFill>
-                <a:latin typeface="Georgia" pitchFamily="34" charset="0"/>
-                <a:ea typeface="Georgia" pitchFamily="34" charset="-122"/>
-                <a:cs typeface="Georgia" pitchFamily="34" charset="-120"/>
-              </a:rPr>
-              <a:t>Демо-путь: контекст → стрим → редактор → экспорт</a:t>
-            </a:r>
-            <a:endParaRPr lang="en-US" sz="1400" dirty="0"/>
-          </a:p>
-        </p:txBody>
-      </p:sp>
-      <p:sp>
-        <p:nvSpPr>
-          <p:cNvPr id="6" name="Shape 4"/>
-          <p:cNvSpPr/>
-          <p:nvPr/>
-        </p:nvSpPr>
-        <p:spPr>
-          <a:xfrm>
-            <a:off x="640080" y="2331720"/>
-            <a:ext cx="2514600" cy="1965960"/>
+          <p:cNvPr id="5" name="Shape 3"/>
+          <p:cNvSpPr/>
+          <p:nvPr/>
+        </p:nvSpPr>
+        <p:spPr>
+          <a:xfrm>
+            <a:off x="502920" y="1874520"/>
+            <a:ext cx="5532120" cy="3703320"/>
           </a:xfrm>
           <a:prstGeom prst="rect">
             <a:avLst/>
@@ -16126,7 +17332,7 @@
       </p:sp>
       <p:pic>
         <p:nvPicPr>
-          <p:cNvPr id="7" name="Image 0" descr="/home/nikit/planwise/artifacts/1-form.png">    </p:cNvPr>
+          <p:cNvPr id="6" name="Image 0" descr="/home/nikit/planwise/artifacts/1-form.png">    </p:cNvPr>
           <p:cNvPicPr>
             <a:picLocks noChangeAspect="1"/>
           </p:cNvPicPr>
@@ -16139,8 +17345,8 @@
         </p:blipFill>
         <p:spPr>
           <a:xfrm>
-            <a:off x="713232" y="2404872"/>
-            <a:ext cx="2368296" cy="1517904"/>
+            <a:off x="594360" y="1965960"/>
+            <a:ext cx="5349240" cy="3108960"/>
           </a:xfrm>
           <a:prstGeom prst="rect">
             <a:avLst/>
@@ -16149,14 +17355,14 @@
       </p:pic>
       <p:sp>
         <p:nvSpPr>
-          <p:cNvPr id="8" name="Shape 5"/>
-          <p:cNvSpPr/>
-          <p:nvPr/>
-        </p:nvSpPr>
-        <p:spPr>
-          <a:xfrm>
-            <a:off x="640080" y="3922776"/>
-            <a:ext cx="2514600" cy="374904"/>
+          <p:cNvPr id="7" name="Shape 4"/>
+          <p:cNvSpPr/>
+          <p:nvPr/>
+        </p:nvSpPr>
+        <p:spPr>
+          <a:xfrm>
+            <a:off x="502920" y="5166360"/>
+            <a:ext cx="5532120" cy="411480"/>
           </a:xfrm>
           <a:prstGeom prst="rect">
             <a:avLst/>
@@ -16169,14 +17375,14 @@
       </p:sp>
       <p:sp>
         <p:nvSpPr>
-          <p:cNvPr id="9" name="Text 6"/>
-          <p:cNvSpPr/>
-          <p:nvPr/>
-        </p:nvSpPr>
-        <p:spPr>
-          <a:xfrm>
-            <a:off x="749808" y="3922776"/>
-            <a:ext cx="2295144" cy="374904"/>
+          <p:cNvPr id="8" name="Text 5"/>
+          <p:cNvSpPr/>
+          <p:nvPr/>
+        </p:nvSpPr>
+        <p:spPr>
+          <a:xfrm>
+            <a:off x="667512" y="5166360"/>
+            <a:ext cx="5202936" cy="411480"/>
           </a:xfrm>
           <a:prstGeom prst="rect">
             <a:avLst/>
@@ -16192,7 +17398,7 @@
               <a:buNone/>
             </a:pPr>
             <a:r>
-              <a:rPr lang="en-US" sz="1150" b="1" dirty="0">
+              <a:rPr lang="en-US" sz="1300" b="1" dirty="0">
                 <a:solidFill>
                   <a:srgbClr val="FFFFFF"/>
                 </a:solidFill>
@@ -16200,22 +17406,22 @@
                 <a:ea typeface="Calibri" pitchFamily="34" charset="-122"/>
                 <a:cs typeface="Calibri" pitchFamily="34" charset="-120"/>
               </a:rPr>
-              <a:t>1. Форма контекста</a:t>
-            </a:r>
-            <a:endParaRPr lang="en-US" sz="1150" dirty="0"/>
-          </a:p>
-        </p:txBody>
-      </p:sp>
-      <p:sp>
-        <p:nvSpPr>
-          <p:cNvPr id="10" name="Shape 7"/>
-          <p:cNvSpPr/>
-          <p:nvPr/>
-        </p:nvSpPr>
-        <p:spPr>
-          <a:xfrm>
-            <a:off x="3246120" y="2331720"/>
-            <a:ext cx="2514600" cy="1965960"/>
+              <a:t>1. Форма контекста — тема, класс, формат, длительность</a:t>
+            </a:r>
+            <a:endParaRPr lang="en-US" sz="1300" dirty="0"/>
+          </a:p>
+        </p:txBody>
+      </p:sp>
+      <p:sp>
+        <p:nvSpPr>
+          <p:cNvPr id="9" name="Shape 6"/>
+          <p:cNvSpPr/>
+          <p:nvPr/>
+        </p:nvSpPr>
+        <p:spPr>
+          <a:xfrm>
+            <a:off x="6172200" y="1874520"/>
+            <a:ext cx="5532120" cy="3703320"/>
           </a:xfrm>
           <a:prstGeom prst="rect">
             <a:avLst/>
@@ -16240,7 +17446,7 @@
       </p:sp>
       <p:pic>
         <p:nvPicPr>
-          <p:cNvPr id="11" name="Image 1" descr="/home/nikit/planwise/artifacts/2-stream.png">    </p:cNvPr>
+          <p:cNvPr id="10" name="Image 1" descr="/home/nikit/planwise/artifacts/2-stream.png">    </p:cNvPr>
           <p:cNvPicPr>
             <a:picLocks noChangeAspect="1"/>
           </p:cNvPicPr>
@@ -16253,8 +17459,8 @@
         </p:blipFill>
         <p:spPr>
           <a:xfrm>
-            <a:off x="3319272" y="2404872"/>
-            <a:ext cx="2368296" cy="1517904"/>
+            <a:off x="6263640" y="1965960"/>
+            <a:ext cx="5349240" cy="3108960"/>
           </a:xfrm>
           <a:prstGeom prst="rect">
             <a:avLst/>
@@ -16263,14 +17469,14 @@
       </p:pic>
       <p:sp>
         <p:nvSpPr>
-          <p:cNvPr id="12" name="Shape 8"/>
-          <p:cNvSpPr/>
-          <p:nvPr/>
-        </p:nvSpPr>
-        <p:spPr>
-          <a:xfrm>
-            <a:off x="3246120" y="3922776"/>
-            <a:ext cx="2514600" cy="374904"/>
+          <p:cNvPr id="11" name="Shape 7"/>
+          <p:cNvSpPr/>
+          <p:nvPr/>
+        </p:nvSpPr>
+        <p:spPr>
+          <a:xfrm>
+            <a:off x="6172200" y="5166360"/>
+            <a:ext cx="5532120" cy="411480"/>
           </a:xfrm>
           <a:prstGeom prst="rect">
             <a:avLst/>
@@ -16283,14 +17489,14 @@
       </p:sp>
       <p:sp>
         <p:nvSpPr>
-          <p:cNvPr id="13" name="Text 9"/>
-          <p:cNvSpPr/>
-          <p:nvPr/>
-        </p:nvSpPr>
-        <p:spPr>
-          <a:xfrm>
-            <a:off x="3355848" y="3922776"/>
-            <a:ext cx="2295144" cy="374904"/>
+          <p:cNvPr id="12" name="Text 8"/>
+          <p:cNvSpPr/>
+          <p:nvPr/>
+        </p:nvSpPr>
+        <p:spPr>
+          <a:xfrm>
+            <a:off x="6336792" y="5166360"/>
+            <a:ext cx="5202936" cy="411480"/>
           </a:xfrm>
           <a:prstGeom prst="rect">
             <a:avLst/>
@@ -16306,7 +17512,7 @@
               <a:buNone/>
             </a:pPr>
             <a:r>
-              <a:rPr lang="en-US" sz="1150" b="1" dirty="0">
+              <a:rPr lang="en-US" sz="1300" b="1" dirty="0">
                 <a:solidFill>
                   <a:srgbClr val="FFFFFF"/>
                 </a:solidFill>
@@ -16314,662 +17520,22 @@
                 <a:ea typeface="Calibri" pitchFamily="34" charset="-122"/>
                 <a:cs typeface="Calibri" pitchFamily="34" charset="-120"/>
               </a:rPr>
-              <a:t>2. Стрим генерации по блокам</a:t>
-            </a:r>
-            <a:endParaRPr lang="en-US" sz="1150" dirty="0"/>
-          </a:p>
-        </p:txBody>
-      </p:sp>
-      <p:sp>
-        <p:nvSpPr>
-          <p:cNvPr id="14" name="Shape 10"/>
-          <p:cNvSpPr/>
-          <p:nvPr/>
-        </p:nvSpPr>
-        <p:spPr>
-          <a:xfrm>
-            <a:off x="640080" y="4389120"/>
-            <a:ext cx="2514600" cy="1965960"/>
-          </a:xfrm>
-          <a:prstGeom prst="rect">
-            <a:avLst/>
-          </a:prstGeom>
-          <a:solidFill>
-            <a:srgbClr val="FFFFFF"/>
-          </a:solidFill>
-          <a:ln w="12700">
-            <a:solidFill>
-              <a:srgbClr val="E4E6E1"/>
-            </a:solidFill>
-            <a:prstDash val="solid"/>
-          </a:ln>
-          <a:effectLst>
-            <a:outerShdw sx="100000" sy="100000" kx="0" ky="0" algn="bl" rotWithShape="0" blurRad="101600" dist="38100" dir="8100000">
-              <a:srgbClr val="000000">
-                <a:alpha val="12000"/>
-              </a:srgbClr>
-            </a:outerShdw>
-          </a:effectLst>
-        </p:spPr>
-      </p:sp>
-      <p:pic>
-        <p:nvPicPr>
-          <p:cNvPr id="15" name="Image 2" descr="/home/nikit/planwise/artifacts/5-editor-regen.png">    </p:cNvPr>
-          <p:cNvPicPr>
-            <a:picLocks noChangeAspect="1"/>
-          </p:cNvPicPr>
-          <p:nvPr/>
-        </p:nvPicPr>
-        <p:blipFill>
-          <a:blip r:embed="rId3"/>
-          <a:srcRect l="0" r="0" t="0" b="0"/>
-          <a:stretch/>
-        </p:blipFill>
-        <p:spPr>
-          <a:xfrm>
-            <a:off x="713232" y="4462272"/>
-            <a:ext cx="2368296" cy="1517904"/>
-          </a:xfrm>
-          <a:prstGeom prst="rect">
-            <a:avLst/>
-          </a:prstGeom>
-        </p:spPr>
-      </p:pic>
-      <p:sp>
-        <p:nvSpPr>
-          <p:cNvPr id="16" name="Shape 11"/>
-          <p:cNvSpPr/>
-          <p:nvPr/>
-        </p:nvSpPr>
-        <p:spPr>
-          <a:xfrm>
-            <a:off x="640080" y="5980176"/>
-            <a:ext cx="2514600" cy="374904"/>
-          </a:xfrm>
-          <a:prstGeom prst="rect">
-            <a:avLst/>
-          </a:prstGeom>
-          <a:solidFill>
-            <a:srgbClr val="0E4F30"/>
-          </a:solidFill>
-          <a:ln/>
-        </p:spPr>
-      </p:sp>
-      <p:sp>
-        <p:nvSpPr>
-          <p:cNvPr id="17" name="Text 12"/>
-          <p:cNvSpPr/>
-          <p:nvPr/>
-        </p:nvSpPr>
-        <p:spPr>
-          <a:xfrm>
-            <a:off x="749808" y="5980176"/>
-            <a:ext cx="2295144" cy="374904"/>
-          </a:xfrm>
-          <a:prstGeom prst="rect">
-            <a:avLst/>
-          </a:prstGeom>
-          <a:noFill/>
-          <a:ln/>
-        </p:spPr>
-        <p:txBody>
-          <a:bodyPr wrap="square" rtlCol="0" anchor="ctr"/>
-          <a:lstStyle/>
-          <a:p>
-            <a:pPr indent="0" marL="0">
-              <a:buNone/>
-            </a:pPr>
-            <a:r>
-              <a:rPr lang="en-US" sz="1150" b="1" dirty="0">
-                <a:solidFill>
-                  <a:srgbClr val="FFFFFF"/>
-                </a:solidFill>
-                <a:latin typeface="Calibri" pitchFamily="34" charset="0"/>
-                <a:ea typeface="Calibri" pitchFamily="34" charset="-122"/>
-                <a:cs typeface="Calibri" pitchFamily="34" charset="-120"/>
-              </a:rPr>
-              <a:t>3. Редактор: 🎲 · ↑↓ · add/del</a:t>
-            </a:r>
-            <a:endParaRPr lang="en-US" sz="1150" dirty="0"/>
-          </a:p>
-        </p:txBody>
-      </p:sp>
-      <p:sp>
-        <p:nvSpPr>
-          <p:cNvPr id="18" name="Shape 13"/>
-          <p:cNvSpPr/>
-          <p:nvPr/>
-        </p:nvSpPr>
-        <p:spPr>
-          <a:xfrm>
-            <a:off x="3246120" y="4389120"/>
-            <a:ext cx="2514600" cy="1965960"/>
-          </a:xfrm>
-          <a:prstGeom prst="rect">
-            <a:avLst/>
-          </a:prstGeom>
-          <a:solidFill>
-            <a:srgbClr val="FFFFFF"/>
-          </a:solidFill>
-          <a:ln w="12700">
-            <a:solidFill>
-              <a:srgbClr val="E4E6E1"/>
-            </a:solidFill>
-            <a:prstDash val="solid"/>
-          </a:ln>
-          <a:effectLst>
-            <a:outerShdw sx="100000" sy="100000" kx="0" ky="0" algn="bl" rotWithShape="0" blurRad="101600" dist="38100" dir="8100000">
-              <a:srgbClr val="000000">
-                <a:alpha val="12000"/>
-              </a:srgbClr>
-            </a:outerShdw>
-          </a:effectLst>
-        </p:spPr>
-      </p:sp>
-      <p:pic>
-        <p:nvPicPr>
-          <p:cNvPr id="19" name="Image 3" descr="/home/nikit/planwise/artifacts/4-export.png">    </p:cNvPr>
-          <p:cNvPicPr>
-            <a:picLocks noChangeAspect="1"/>
-          </p:cNvPicPr>
-          <p:nvPr/>
-        </p:nvPicPr>
-        <p:blipFill>
-          <a:blip r:embed="rId4"/>
-          <a:srcRect l="0" r="0" t="0" b="0"/>
-          <a:stretch/>
-        </p:blipFill>
-        <p:spPr>
-          <a:xfrm>
-            <a:off x="3319272" y="4462272"/>
-            <a:ext cx="2368296" cy="1517904"/>
-          </a:xfrm>
-          <a:prstGeom prst="rect">
-            <a:avLst/>
-          </a:prstGeom>
-        </p:spPr>
-      </p:pic>
-      <p:sp>
-        <p:nvSpPr>
-          <p:cNvPr id="20" name="Shape 14"/>
-          <p:cNvSpPr/>
-          <p:nvPr/>
-        </p:nvSpPr>
-        <p:spPr>
-          <a:xfrm>
-            <a:off x="3246120" y="5980176"/>
-            <a:ext cx="2514600" cy="374904"/>
-          </a:xfrm>
-          <a:prstGeom prst="rect">
-            <a:avLst/>
-          </a:prstGeom>
-          <a:solidFill>
-            <a:srgbClr val="0E4F30"/>
-          </a:solidFill>
-          <a:ln/>
-        </p:spPr>
-      </p:sp>
-      <p:sp>
-        <p:nvSpPr>
-          <p:cNvPr id="21" name="Text 15"/>
-          <p:cNvSpPr/>
-          <p:nvPr/>
-        </p:nvSpPr>
-        <p:spPr>
-          <a:xfrm>
-            <a:off x="3355848" y="5980176"/>
-            <a:ext cx="2295144" cy="374904"/>
-          </a:xfrm>
-          <a:prstGeom prst="rect">
-            <a:avLst/>
-          </a:prstGeom>
-          <a:noFill/>
-          <a:ln/>
-        </p:spPr>
-        <p:txBody>
-          <a:bodyPr wrap="square" rtlCol="0" anchor="ctr"/>
-          <a:lstStyle/>
-          <a:p>
-            <a:pPr indent="0" marL="0">
-              <a:buNone/>
-            </a:pPr>
-            <a:r>
-              <a:rPr lang="en-US" sz="1150" b="1" dirty="0">
-                <a:solidFill>
-                  <a:srgbClr val="FFFFFF"/>
-                </a:solidFill>
-                <a:latin typeface="Calibri" pitchFamily="34" charset="0"/>
-                <a:ea typeface="Calibri" pitchFamily="34" charset="-122"/>
-                <a:cs typeface="Calibri" pitchFamily="34" charset="-120"/>
-              </a:rPr>
-              <a:t>4. Экспорт PDF / DOCX</a:t>
-            </a:r>
-            <a:endParaRPr lang="en-US" sz="1150" dirty="0"/>
-          </a:p>
-        </p:txBody>
-      </p:sp>
-      <p:sp>
-        <p:nvSpPr>
-          <p:cNvPr id="22" name="Shape 16"/>
-          <p:cNvSpPr/>
-          <p:nvPr/>
-        </p:nvSpPr>
-        <p:spPr>
-          <a:xfrm>
-            <a:off x="6126480" y="1874520"/>
-            <a:ext cx="5394960" cy="2606040"/>
-          </a:xfrm>
-          <a:prstGeom prst="rect">
-            <a:avLst/>
-          </a:prstGeom>
-          <a:solidFill>
-            <a:srgbClr val="FFFFFF"/>
-          </a:solidFill>
-          <a:ln w="12700">
-            <a:solidFill>
-              <a:srgbClr val="E4E6E1"/>
-            </a:solidFill>
-            <a:prstDash val="solid"/>
-          </a:ln>
-          <a:effectLst>
-            <a:outerShdw sx="100000" sy="100000" kx="0" ky="0" algn="bl" rotWithShape="0" blurRad="101600" dist="38100" dir="8100000">
-              <a:srgbClr val="000000">
-                <a:alpha val="12000"/>
-              </a:srgbClr>
-            </a:outerShdw>
-          </a:effectLst>
-        </p:spPr>
-      </p:sp>
-      <p:sp>
-        <p:nvSpPr>
-          <p:cNvPr id="23" name="Text 17"/>
-          <p:cNvSpPr/>
-          <p:nvPr/>
-        </p:nvSpPr>
-        <p:spPr>
-          <a:xfrm>
-            <a:off x="6355080" y="2011680"/>
-            <a:ext cx="4937760" cy="411480"/>
-          </a:xfrm>
-          <a:prstGeom prst="rect">
-            <a:avLst/>
-          </a:prstGeom>
-          <a:noFill/>
-          <a:ln/>
-        </p:spPr>
-        <p:txBody>
-          <a:bodyPr wrap="square" rtlCol="0" anchor="ctr"/>
-          <a:lstStyle/>
-          <a:p>
-            <a:pPr indent="0" marL="0">
-              <a:buNone/>
-            </a:pPr>
-            <a:r>
-              <a:rPr lang="en-US" sz="1600" b="1" dirty="0">
-                <a:solidFill>
-                  <a:srgbClr val="21A663"/>
-                </a:solidFill>
-                <a:latin typeface="Georgia" pitchFamily="34" charset="0"/>
-                <a:ea typeface="Georgia" pitchFamily="34" charset="-122"/>
-                <a:cs typeface="Georgia" pitchFamily="34" charset="-120"/>
-              </a:rPr>
-              <a:t>Что уже работает</a:t>
-            </a:r>
-            <a:endParaRPr lang="en-US" sz="1600" dirty="0"/>
-          </a:p>
-        </p:txBody>
-      </p:sp>
-      <p:sp>
-        <p:nvSpPr>
-          <p:cNvPr id="24" name="Text 18"/>
-          <p:cNvSpPr/>
-          <p:nvPr/>
-        </p:nvSpPr>
-        <p:spPr>
-          <a:xfrm>
-            <a:off x="6400800" y="2468880"/>
-            <a:ext cx="5029200" cy="1920240"/>
-          </a:xfrm>
-          <a:prstGeom prst="rect">
-            <a:avLst/>
-          </a:prstGeom>
-          <a:noFill/>
-          <a:ln/>
-        </p:spPr>
-        <p:txBody>
-          <a:bodyPr wrap="square" rtlCol="0" anchor="t"/>
-          <a:lstStyle/>
-          <a:p>
-            <a:pPr marL="342900" indent="-342900">
-              <a:spcAft>
-                <a:spcPts val="400"/>
-              </a:spcAft>
-              <a:buSzPct val="100000"/>
-              <a:buChar char="✓"/>
-            </a:pPr>
-            <a:r>
-              <a:rPr lang="en-US" sz="1150" dirty="0">
-                <a:solidFill>
-                  <a:srgbClr val="14160F"/>
-                </a:solidFill>
-                <a:latin typeface="Calibri" pitchFamily="34" charset="0"/>
-                <a:ea typeface="Calibri" pitchFamily="34" charset="-122"/>
-                <a:cs typeface="Calibri" pitchFamily="34" charset="-120"/>
-              </a:rPr>
-              <a:t>Генерация по блокам РоВ-уровня во всех 8 форматах (классный час, квиз, дебаты, киноклуб, проектная сессия…)</a:t>
-            </a:r>
-            <a:endParaRPr lang="en-US" sz="1150" dirty="0"/>
-          </a:p>
-          <a:p>
-            <a:pPr marL="342900" indent="-342900">
-              <a:spcAft>
-                <a:spcPts val="400"/>
-              </a:spcAft>
-              <a:buSzPct val="100000"/>
-              <a:buChar char="✓"/>
-            </a:pPr>
-            <a:r>
-              <a:rPr lang="en-US" sz="1150" dirty="0">
-                <a:solidFill>
-                  <a:srgbClr val="14160F"/>
-                </a:solidFill>
-                <a:latin typeface="Calibri" pitchFamily="34" charset="0"/>
-                <a:ea typeface="Calibri" pitchFamily="34" charset="-122"/>
-                <a:cs typeface="Calibri" pitchFamily="34" charset="-120"/>
-              </a:rPr>
-              <a:t>Загрузка плана и своего материала (PDF/DOCX/PPTX/TXT) как основы сценария</a:t>
-            </a:r>
-            <a:endParaRPr lang="en-US" sz="1150" dirty="0"/>
-          </a:p>
-          <a:p>
-            <a:pPr marL="342900" indent="-342900">
-              <a:spcAft>
-                <a:spcPts val="400"/>
-              </a:spcAft>
-              <a:buSzPct val="100000"/>
-              <a:buChar char="✓"/>
-            </a:pPr>
-            <a:r>
-              <a:rPr lang="en-US" sz="1150" dirty="0">
-                <a:solidFill>
-                  <a:srgbClr val="14160F"/>
-                </a:solidFill>
-                <a:latin typeface="Calibri" pitchFamily="34" charset="0"/>
-                <a:ea typeface="Calibri" pitchFamily="34" charset="-122"/>
-                <a:cs typeface="Calibri" pitchFamily="34" charset="-120"/>
-              </a:rPr>
-              <a:t>Редактор: добавление/удаление и reorder этапов ↑/↓, точечная регенерация с выбором типа, история версий с откатом</a:t>
-            </a:r>
-            <a:endParaRPr lang="en-US" sz="1150" dirty="0"/>
-          </a:p>
-          <a:p>
-            <a:pPr marL="342900" indent="-342900">
-              <a:spcAft>
-                <a:spcPts val="400"/>
-              </a:spcAft>
-              <a:buSzPct val="100000"/>
-              <a:buChar char="✓"/>
-            </a:pPr>
-            <a:r>
-              <a:rPr lang="en-US" sz="1150" dirty="0">
-                <a:solidFill>
-                  <a:srgbClr val="14160F"/>
-                </a:solidFill>
-                <a:latin typeface="Calibri" pitchFamily="34" charset="0"/>
-                <a:ea typeface="Calibri" pitchFamily="34" charset="-122"/>
-                <a:cs typeface="Calibri" pitchFamily="34" charset="-120"/>
-              </a:rPr>
-              <a:t>Полноэкранный режим показа на проекторе + календарь-сетка с привязкой к дате</a:t>
-            </a:r>
-            <a:endParaRPr lang="en-US" sz="1150" dirty="0"/>
-          </a:p>
-          <a:p>
-            <a:pPr marL="342900" indent="-342900">
-              <a:spcAft>
-                <a:spcPts val="400"/>
-              </a:spcAft>
-              <a:buSzPct val="100000"/>
-              <a:buChar char="✓"/>
-            </a:pPr>
-            <a:r>
-              <a:rPr lang="en-US" sz="1150" dirty="0">
-                <a:solidFill>
-                  <a:srgbClr val="14160F"/>
-                </a:solidFill>
-                <a:latin typeface="Calibri" pitchFamily="34" charset="0"/>
-                <a:ea typeface="Calibri" pitchFamily="34" charset="-122"/>
-                <a:cs typeface="Calibri" pitchFamily="34" charset="-120"/>
-              </a:rPr>
-              <a:t>Библиотека сообщества + семантический поиск, оценка сценария 👍/👎</a:t>
-            </a:r>
-            <a:endParaRPr lang="en-US" sz="1150" dirty="0"/>
-          </a:p>
-          <a:p>
-            <a:pPr marL="342900" indent="-342900">
-              <a:spcAft>
-                <a:spcPts val="400"/>
-              </a:spcAft>
-              <a:buSzPct val="100000"/>
-              <a:buChar char="✓"/>
-            </a:pPr>
-            <a:r>
-              <a:rPr lang="en-US" sz="1150" dirty="0">
-                <a:solidFill>
-                  <a:srgbClr val="14160F"/>
-                </a:solidFill>
-                <a:latin typeface="Calibri" pitchFamily="34" charset="0"/>
-                <a:ea typeface="Calibri" pitchFamily="34" charset="-122"/>
-                <a:cs typeface="Calibri" pitchFamily="34" charset="-120"/>
-              </a:rPr>
-              <a:t>Фирменный экспорт PDF (с QR) и DOCX · шаринг по ссылке · страница «Что нового»</a:t>
-            </a:r>
-            <a:endParaRPr lang="en-US" sz="1150" dirty="0"/>
-          </a:p>
-          <a:p>
-            <a:pPr marL="342900" indent="-342900">
-              <a:spcAft>
-                <a:spcPts val="400"/>
-              </a:spcAft>
-              <a:buSzPct val="100000"/>
-              <a:buChar char="✓"/>
-            </a:pPr>
-            <a:r>
-              <a:rPr lang="en-US" sz="1150" dirty="0">
-                <a:solidFill>
-                  <a:srgbClr val="14160F"/>
-                </a:solidFill>
-                <a:latin typeface="Calibri" pitchFamily="34" charset="0"/>
-                <a:ea typeface="Calibri" pitchFamily="34" charset="-122"/>
-                <a:cs typeface="Calibri" pitchFamily="34" charset="-120"/>
-              </a:rPr>
-              <a:t>Админ-панель статистики</a:t>
-            </a:r>
-            <a:endParaRPr lang="en-US" sz="1150" dirty="0"/>
-          </a:p>
-        </p:txBody>
-      </p:sp>
-      <p:sp>
-        <p:nvSpPr>
-          <p:cNvPr id="25" name="Shape 19"/>
-          <p:cNvSpPr/>
-          <p:nvPr/>
-        </p:nvSpPr>
-        <p:spPr>
-          <a:xfrm>
-            <a:off x="6126480" y="4617720"/>
-            <a:ext cx="2606040" cy="1783080"/>
-          </a:xfrm>
-          <a:prstGeom prst="rect">
-            <a:avLst/>
-          </a:prstGeom>
-          <a:solidFill>
-            <a:srgbClr val="093520"/>
-          </a:solidFill>
-          <a:ln/>
-          <a:effectLst>
-            <a:outerShdw sx="100000" sy="100000" kx="0" ky="0" algn="bl" rotWithShape="0" blurRad="101600" dist="38100" dir="8100000">
-              <a:srgbClr val="000000">
-                <a:alpha val="12000"/>
-              </a:srgbClr>
-            </a:outerShdw>
-          </a:effectLst>
-        </p:spPr>
-      </p:sp>
-      <p:sp>
-        <p:nvSpPr>
-          <p:cNvPr id="26" name="Text 20"/>
-          <p:cNvSpPr/>
-          <p:nvPr/>
-        </p:nvSpPr>
-        <p:spPr>
-          <a:xfrm>
-            <a:off x="6309360" y="4754880"/>
-            <a:ext cx="2286000" cy="365760"/>
-          </a:xfrm>
-          <a:prstGeom prst="rect">
-            <a:avLst/>
-          </a:prstGeom>
-          <a:noFill/>
-          <a:ln/>
-        </p:spPr>
-        <p:txBody>
-          <a:bodyPr wrap="square" rtlCol="0" anchor="ctr"/>
-          <a:lstStyle/>
-          <a:p>
-            <a:pPr indent="0" marL="0">
-              <a:buNone/>
-            </a:pPr>
-            <a:r>
-              <a:rPr lang="en-US" sz="1400" b="1" dirty="0">
-                <a:solidFill>
-                  <a:srgbClr val="F5B800"/>
-                </a:solidFill>
-                <a:latin typeface="Georgia" pitchFamily="34" charset="0"/>
-                <a:ea typeface="Georgia" pitchFamily="34" charset="-122"/>
-                <a:cs typeface="Georgia" pitchFamily="34" charset="-120"/>
-              </a:rPr>
-              <a:t>Ресурсы MVP</a:t>
-            </a:r>
-            <a:endParaRPr lang="en-US" sz="1400" dirty="0"/>
-          </a:p>
-        </p:txBody>
-      </p:sp>
-      <p:sp>
-        <p:nvSpPr>
-          <p:cNvPr id="27" name="Text 21"/>
-          <p:cNvSpPr/>
-          <p:nvPr/>
-        </p:nvSpPr>
-        <p:spPr>
-          <a:xfrm>
-            <a:off x="6355080" y="5166360"/>
-            <a:ext cx="2331720" cy="1188720"/>
-          </a:xfrm>
-          <a:prstGeom prst="rect">
-            <a:avLst/>
-          </a:prstGeom>
-          <a:noFill/>
-          <a:ln/>
-        </p:spPr>
-        <p:txBody>
-          <a:bodyPr wrap="square" rtlCol="0" anchor="t"/>
-          <a:lstStyle/>
-          <a:p>
-            <a:pPr marL="342900" indent="-342900">
-              <a:spcAft>
-                <a:spcPts val="400"/>
-              </a:spcAft>
-              <a:buSzPct val="100000"/>
-              <a:buChar char="•"/>
-            </a:pPr>
-            <a:r>
-              <a:rPr lang="en-US" sz="1200" dirty="0">
-                <a:solidFill>
-                  <a:srgbClr val="FFFFFF"/>
-                </a:solidFill>
-                <a:latin typeface="Calibri" pitchFamily="34" charset="0"/>
-                <a:ea typeface="Calibri" pitchFamily="34" charset="-122"/>
-                <a:cs typeface="Calibri" pitchFamily="34" charset="-120"/>
-              </a:rPr>
-              <a:t>1 VPS · 2 vCPU / 4 ГБ</a:t>
-            </a:r>
-            <a:endParaRPr lang="en-US" sz="1200" dirty="0"/>
-          </a:p>
-          <a:p>
-            <a:pPr marL="342900" indent="-342900">
-              <a:spcAft>
-                <a:spcPts val="400"/>
-              </a:spcAft>
-              <a:buSzPct val="100000"/>
-              <a:buChar char="•"/>
-            </a:pPr>
-            <a:r>
-              <a:rPr lang="en-US" sz="1200" dirty="0">
-                <a:solidFill>
-                  <a:srgbClr val="FFFFFF"/>
-                </a:solidFill>
-                <a:latin typeface="Calibri" pitchFamily="34" charset="0"/>
-                <a:ea typeface="Calibri" pitchFamily="34" charset="-122"/>
-                <a:cs typeface="Calibri" pitchFamily="34" charset="-120"/>
-              </a:rPr>
-              <a:t>GigaChat API (PERS)</a:t>
-            </a:r>
-            <a:endParaRPr lang="en-US" sz="1200" dirty="0"/>
-          </a:p>
-          <a:p>
-            <a:pPr marL="342900" indent="-342900">
-              <a:spcAft>
-                <a:spcPts val="400"/>
-              </a:spcAft>
-              <a:buSzPct val="100000"/>
-              <a:buChar char="•"/>
-            </a:pPr>
-            <a:r>
-              <a:rPr lang="en-US" sz="1200" dirty="0">
-                <a:solidFill>
-                  <a:srgbClr val="FFFFFF"/>
-                </a:solidFill>
-                <a:latin typeface="Calibri" pitchFamily="34" charset="0"/>
-                <a:ea typeface="Calibri" pitchFamily="34" charset="-122"/>
-                <a:cs typeface="Calibri" pitchFamily="34" charset="-120"/>
-              </a:rPr>
-              <a:t>Docker Compose</a:t>
-            </a:r>
-            <a:endParaRPr lang="en-US" sz="1200" dirty="0"/>
-          </a:p>
-          <a:p>
-            <a:pPr marL="342900" indent="-342900">
-              <a:spcAft>
-                <a:spcPts val="400"/>
-              </a:spcAft>
-              <a:buSzPct val="100000"/>
-              <a:buChar char="•"/>
-            </a:pPr>
-            <a:r>
-              <a:rPr lang="en-US" sz="1200" dirty="0">
-                <a:solidFill>
-                  <a:srgbClr val="66D9A7"/>
-                </a:solidFill>
-                <a:latin typeface="Calibri" pitchFamily="34" charset="0"/>
-                <a:ea typeface="Calibri" pitchFamily="34" charset="-122"/>
-                <a:cs typeface="Calibri" pitchFamily="34" charset="-120"/>
-              </a:rPr>
-              <a:t>Дёшево в эксплуатации</a:t>
-            </a:r>
-            <a:endParaRPr lang="en-US" sz="1200" dirty="0"/>
-          </a:p>
-        </p:txBody>
-      </p:sp>
-      <p:sp>
-        <p:nvSpPr>
-          <p:cNvPr id="28" name="Shape 22"/>
-          <p:cNvSpPr/>
-          <p:nvPr/>
-        </p:nvSpPr>
-        <p:spPr>
-          <a:xfrm>
-            <a:off x="8915400" y="4617720"/>
-            <a:ext cx="2606040" cy="1783080"/>
+              <a:t>2. Стрим: фазы и каркас этапов в реальном времени</a:t>
+            </a:r>
+            <a:endParaRPr lang="en-US" sz="1300" dirty="0"/>
+          </a:p>
+        </p:txBody>
+      </p:sp>
+      <p:sp>
+        <p:nvSpPr>
+          <p:cNvPr id="13" name="Shape 9"/>
+          <p:cNvSpPr/>
+          <p:nvPr/>
+        </p:nvSpPr>
+        <p:spPr>
+          <a:xfrm>
+            <a:off x="502920" y="5760720"/>
+            <a:ext cx="11155680" cy="868680"/>
           </a:xfrm>
           <a:prstGeom prst="rect">
             <a:avLst/>
@@ -16977,7 +17543,7 @@
           <a:solidFill>
             <a:srgbClr val="F8F9F7"/>
           </a:solidFill>
-          <a:ln w="16510">
+          <a:ln w="15240">
             <a:solidFill>
               <a:srgbClr val="21A663"/>
             </a:solidFill>
@@ -16987,14 +17553,14 @@
       </p:sp>
       <p:sp>
         <p:nvSpPr>
-          <p:cNvPr id="29" name="Text 23"/>
-          <p:cNvSpPr/>
-          <p:nvPr/>
-        </p:nvSpPr>
-        <p:spPr>
-          <a:xfrm>
-            <a:off x="9098280" y="4754880"/>
-            <a:ext cx="2286000" cy="365760"/>
+          <p:cNvPr id="14" name="Text 10"/>
+          <p:cNvSpPr/>
+          <p:nvPr/>
+        </p:nvSpPr>
+        <p:spPr>
+          <a:xfrm>
+            <a:off x="685800" y="5852160"/>
+            <a:ext cx="3200400" cy="365760"/>
           </a:xfrm>
           <a:prstGeom prst="rect">
             <a:avLst/>
@@ -17010,7 +17576,7 @@
               <a:buNone/>
             </a:pPr>
             <a:r>
-              <a:rPr lang="en-US" sz="1400" b="1" dirty="0">
+              <a:rPr lang="en-US" sz="1300" b="1" dirty="0">
                 <a:solidFill>
                   <a:srgbClr val="21A663"/>
                 </a:solidFill>
@@ -17018,22 +17584,22 @@
                 <a:ea typeface="Georgia" pitchFamily="34" charset="-122"/>
                 <a:cs typeface="Georgia" pitchFamily="34" charset="-120"/>
               </a:rPr>
-              <a:t>Развитие</a:t>
-            </a:r>
-            <a:endParaRPr lang="en-US" sz="1400" dirty="0"/>
-          </a:p>
-        </p:txBody>
-      </p:sp>
-      <p:sp>
-        <p:nvSpPr>
-          <p:cNvPr id="30" name="Text 24"/>
-          <p:cNvSpPr/>
-          <p:nvPr/>
-        </p:nvSpPr>
-        <p:spPr>
-          <a:xfrm>
-            <a:off x="9144000" y="5166360"/>
-            <a:ext cx="2331720" cy="1188720"/>
+              <a:t>Что уже работает</a:t>
+            </a:r>
+            <a:endParaRPr lang="en-US" sz="1300" dirty="0"/>
+          </a:p>
+        </p:txBody>
+      </p:sp>
+      <p:sp>
+        <p:nvSpPr>
+          <p:cNvPr id="15" name="Text 11"/>
+          <p:cNvSpPr/>
+          <p:nvPr/>
+        </p:nvSpPr>
+        <p:spPr>
+          <a:xfrm>
+            <a:off x="777240" y="6217920"/>
+            <a:ext cx="10698480" cy="411480"/>
           </a:xfrm>
           <a:prstGeom prst="rect">
             <a:avLst/>
@@ -17046,14 +17612,11 @@
           <a:lstStyle/>
           <a:p>
             <a:pPr marL="342900" indent="-342900">
-              <a:spcAft>
-                <a:spcPts val="300"/>
-              </a:spcAft>
               <a:buSzPct val="100000"/>
-              <a:buChar char="•"/>
-            </a:pPr>
-            <a:r>
-              <a:rPr lang="en-US" sz="1150" dirty="0">
+              <a:buChar char="✓"/>
+            </a:pPr>
+            <a:r>
+              <a:rPr lang="en-US" sz="1050" dirty="0">
                 <a:solidFill>
                   <a:srgbClr val="14160F"/>
                 </a:solidFill>
@@ -17061,20 +17624,17 @@
                 <a:ea typeface="Calibri" pitchFamily="34" charset="-122"/>
                 <a:cs typeface="Calibri" pitchFamily="34" charset="-120"/>
               </a:rPr>
-              <a:t>Интеграция с эл. журналами</a:t>
-            </a:r>
-            <a:endParaRPr lang="en-US" sz="1150" dirty="0"/>
+              <a:t>Генерация по блокам РоВ-уровня в 8 форматах · опора на методички (RAG) · pre-match по библиотеке</a:t>
+            </a:r>
+            <a:endParaRPr lang="en-US" sz="1050" dirty="0"/>
           </a:p>
           <a:p>
             <a:pPr marL="342900" indent="-342900">
-              <a:spcAft>
-                <a:spcPts val="300"/>
-              </a:spcAft>
               <a:buSzPct val="100000"/>
-              <a:buChar char="•"/>
-            </a:pPr>
-            <a:r>
-              <a:rPr lang="en-US" sz="1150" dirty="0">
+              <a:buChar char="✓"/>
+            </a:pPr>
+            <a:r>
+              <a:rPr lang="en-US" sz="1050" dirty="0">
                 <a:solidFill>
                   <a:srgbClr val="14160F"/>
                 </a:solidFill>
@@ -17082,51 +17642,9 @@
                 <a:ea typeface="Calibri" pitchFamily="34" charset="-122"/>
                 <a:cs typeface="Calibri" pitchFamily="34" charset="-120"/>
               </a:rPr>
-              <a:t>Модерация контента методистами</a:t>
-            </a:r>
-            <a:endParaRPr lang="en-US" sz="1150" dirty="0"/>
-          </a:p>
-          <a:p>
-            <a:pPr marL="342900" indent="-342900">
-              <a:spcAft>
-                <a:spcPts val="300"/>
-              </a:spcAft>
-              <a:buSzPct val="100000"/>
-              <a:buChar char="•"/>
-            </a:pPr>
-            <a:r>
-              <a:rPr lang="en-US" sz="1150" dirty="0">
-                <a:solidFill>
-                  <a:srgbClr val="14160F"/>
-                </a:solidFill>
-                <a:latin typeface="Calibri" pitchFamily="34" charset="0"/>
-                <a:ea typeface="Calibri" pitchFamily="34" charset="-122"/>
-                <a:cs typeface="Calibri" pitchFamily="34" charset="-120"/>
-              </a:rPr>
-              <a:t>Мульти-школьные тенанты</a:t>
-            </a:r>
-            <a:endParaRPr lang="en-US" sz="1150" dirty="0"/>
-          </a:p>
-          <a:p>
-            <a:pPr marL="342900" indent="-342900">
-              <a:spcAft>
-                <a:spcPts val="300"/>
-              </a:spcAft>
-              <a:buSzPct val="100000"/>
-              <a:buChar char="•"/>
-            </a:pPr>
-            <a:r>
-              <a:rPr lang="en-US" sz="1150" dirty="0">
-                <a:solidFill>
-                  <a:srgbClr val="14160F"/>
-                </a:solidFill>
-                <a:latin typeface="Calibri" pitchFamily="34" charset="0"/>
-                <a:ea typeface="Calibri" pitchFamily="34" charset="-122"/>
-                <a:cs typeface="Calibri" pitchFamily="34" charset="-120"/>
-              </a:rPr>
-              <a:t>Аналитика вовлечённости</a:t>
-            </a:r>
-            <a:endParaRPr lang="en-US" sz="1150" dirty="0"/>
+              <a:t>Загрузка плана и своего материала (PDF/DOCX/PPTX/TXT) · локальная анонимизация ПДн</a:t>
+            </a:r>
+            <a:endParaRPr lang="en-US" sz="1050" dirty="0"/>
           </a:p>
         </p:txBody>
       </p:sp>
@@ -17215,7 +17733,7 @@
                 <a:ea typeface="Calibri" pitchFamily="34" charset="-122"/>
                 <a:cs typeface="Calibri" pitchFamily="34" charset="-120"/>
               </a:rPr>
-              <a:t>07 — ДОРОЖНАЯ КАРТА</a:t>
+              <a:t>06 — MVP · ДЕМО-ПУТЬ 2/2</a:t>
             </a:r>
             <a:endParaRPr lang="en-US" sz="1300" dirty="0"/>
           </a:p>
@@ -17254,7 +17772,7 @@
                 <a:ea typeface="Georgia" pitchFamily="34" charset="-122"/>
                 <a:cs typeface="Georgia" pitchFamily="34" charset="-120"/>
               </a:rPr>
-              <a:t>От MVP к масштабу</a:t>
+              <a:t>Редактор → экспорт</a:t>
             </a:r>
             <a:endParaRPr lang="en-US" sz="3200" dirty="0"/>
           </a:p>
@@ -17268,90 +17786,8 @@
         </p:nvSpPr>
         <p:spPr>
           <a:xfrm>
-            <a:off x="914400" y="2468880"/>
-            <a:ext cx="10332720" cy="0"/>
-          </a:xfrm>
-          <a:prstGeom prst="line">
-            <a:avLst/>
-          </a:prstGeom>
-          <a:noFill/>
-          <a:ln w="25400">
-            <a:solidFill>
-              <a:srgbClr val="E4E6E1"/>
-            </a:solidFill>
-            <a:prstDash val="solid"/>
-          </a:ln>
-        </p:spPr>
-      </p:sp>
-      <p:sp>
-        <p:nvSpPr>
-          <p:cNvPr id="6" name="Shape 4"/>
-          <p:cNvSpPr/>
-          <p:nvPr/>
-        </p:nvSpPr>
-        <p:spPr>
-          <a:xfrm>
-            <a:off x="960120" y="2286000"/>
-            <a:ext cx="365760" cy="365760"/>
-          </a:xfrm>
-          <a:prstGeom prst="ellipse">
-            <a:avLst/>
-          </a:prstGeom>
-          <a:solidFill>
-            <a:srgbClr val="21A663"/>
-          </a:solidFill>
-          <a:ln/>
-        </p:spPr>
-      </p:sp>
-      <p:sp>
-        <p:nvSpPr>
-          <p:cNvPr id="7" name="Text 5"/>
-          <p:cNvSpPr/>
-          <p:nvPr/>
-        </p:nvSpPr>
-        <p:spPr>
-          <a:xfrm>
-            <a:off x="960120" y="2286000"/>
-            <a:ext cx="365760" cy="365760"/>
-          </a:xfrm>
-          <a:prstGeom prst="rect">
-            <a:avLst/>
-          </a:prstGeom>
-          <a:noFill/>
-          <a:ln/>
-        </p:spPr>
-        <p:txBody>
-          <a:bodyPr wrap="square" rtlCol="0" anchor="ctr"/>
-          <a:lstStyle/>
-          <a:p>
-            <a:pPr algn="ctr" indent="0" marL="0">
-              <a:buNone/>
-            </a:pPr>
-            <a:r>
-              <a:rPr lang="en-US" sz="1300" b="1" dirty="0">
-                <a:solidFill>
-                  <a:srgbClr val="FFFFFF"/>
-                </a:solidFill>
-                <a:latin typeface="Georgia" pitchFamily="34" charset="0"/>
-                <a:ea typeface="Georgia" pitchFamily="34" charset="-122"/>
-                <a:cs typeface="Georgia" pitchFamily="34" charset="-120"/>
-              </a:rPr>
-              <a:t>1</a:t>
-            </a:r>
-            <a:endParaRPr lang="en-US" sz="1300" dirty="0"/>
-          </a:p>
-        </p:txBody>
-      </p:sp>
-      <p:sp>
-        <p:nvSpPr>
-          <p:cNvPr id="8" name="Shape 6"/>
-          <p:cNvSpPr/>
-          <p:nvPr/>
-        </p:nvSpPr>
-        <p:spPr>
-          <a:xfrm>
-            <a:off x="640080" y="2926080"/>
-            <a:ext cx="2606040" cy="2651760"/>
+            <a:off x="502920" y="1874520"/>
+            <a:ext cx="5532120" cy="3703320"/>
           </a:xfrm>
           <a:prstGeom prst="rect">
             <a:avLst/>
@@ -17374,36 +17810,59 @@
           </a:effectLst>
         </p:spPr>
       </p:sp>
-      <p:sp>
-        <p:nvSpPr>
-          <p:cNvPr id="9" name="Shape 7"/>
-          <p:cNvSpPr/>
-          <p:nvPr/>
-        </p:nvSpPr>
-        <p:spPr>
-          <a:xfrm>
-            <a:off x="640080" y="2926080"/>
-            <a:ext cx="2606040" cy="109728"/>
+      <p:pic>
+        <p:nvPicPr>
+          <p:cNvPr id="6" name="Image 0" descr="/home/nikit/planwise/artifacts/5-editor-regen.png">    </p:cNvPr>
+          <p:cNvPicPr>
+            <a:picLocks noChangeAspect="1"/>
+          </p:cNvPicPr>
+          <p:nvPr/>
+        </p:nvPicPr>
+        <p:blipFill>
+          <a:blip r:embed="rId1"/>
+          <a:srcRect l="0" r="0" t="0" b="0"/>
+          <a:stretch/>
+        </p:blipFill>
+        <p:spPr>
+          <a:xfrm>
+            <a:off x="594360" y="1965960"/>
+            <a:ext cx="5349240" cy="3108960"/>
+          </a:xfrm>
+          <a:prstGeom prst="rect">
+            <a:avLst/>
+          </a:prstGeom>
+        </p:spPr>
+      </p:pic>
+      <p:sp>
+        <p:nvSpPr>
+          <p:cNvPr id="7" name="Shape 4"/>
+          <p:cNvSpPr/>
+          <p:nvPr/>
+        </p:nvSpPr>
+        <p:spPr>
+          <a:xfrm>
+            <a:off x="502920" y="5166360"/>
+            <a:ext cx="5532120" cy="411480"/>
           </a:xfrm>
           <a:prstGeom prst="rect">
             <a:avLst/>
           </a:prstGeom>
           <a:solidFill>
-            <a:srgbClr val="21A663"/>
+            <a:srgbClr val="0E4F30"/>
           </a:solidFill>
           <a:ln/>
         </p:spPr>
       </p:sp>
       <p:sp>
         <p:nvSpPr>
-          <p:cNvPr id="10" name="Text 8"/>
-          <p:cNvSpPr/>
-          <p:nvPr/>
-        </p:nvSpPr>
-        <p:spPr>
-          <a:xfrm>
-            <a:off x="841248" y="3127248"/>
-            <a:ext cx="2240280" cy="457200"/>
+          <p:cNvPr id="8" name="Text 5"/>
+          <p:cNvSpPr/>
+          <p:nvPr/>
+        </p:nvSpPr>
+        <p:spPr>
+          <a:xfrm>
+            <a:off x="667512" y="5166360"/>
+            <a:ext cx="5202936" cy="411480"/>
           </a:xfrm>
           <a:prstGeom prst="rect">
             <a:avLst/>
@@ -17419,174 +17878,15 @@
               <a:buNone/>
             </a:pPr>
             <a:r>
-              <a:rPr lang="en-US" sz="1600" b="1" dirty="0">
-                <a:solidFill>
-                  <a:srgbClr val="14160F"/>
-                </a:solidFill>
-                <a:latin typeface="Georgia" pitchFamily="34" charset="0"/>
-                <a:ea typeface="Georgia" pitchFamily="34" charset="-122"/>
-                <a:cs typeface="Georgia" pitchFamily="34" charset="-120"/>
-              </a:rPr>
-              <a:t>Развёрнуто на проде</a:t>
-            </a:r>
-            <a:endParaRPr lang="en-US" sz="1600" dirty="0"/>
-          </a:p>
-        </p:txBody>
-      </p:sp>
-      <p:sp>
-        <p:nvSpPr>
-          <p:cNvPr id="11" name="Text 9"/>
-          <p:cNvSpPr/>
-          <p:nvPr/>
-        </p:nvSpPr>
-        <p:spPr>
-          <a:xfrm>
-            <a:off x="868680" y="3657600"/>
-            <a:ext cx="2194560" cy="1828800"/>
-          </a:xfrm>
-          <a:prstGeom prst="rect">
-            <a:avLst/>
-          </a:prstGeom>
-          <a:noFill/>
-          <a:ln/>
-        </p:spPr>
-        <p:txBody>
-          <a:bodyPr wrap="square" rtlCol="0" anchor="t"/>
-          <a:lstStyle/>
-          <a:p>
-            <a:pPr marL="342900" indent="-342900">
-              <a:spcAft>
-                <a:spcPts val="800"/>
-              </a:spcAft>
-              <a:buSzPct val="100000"/>
-              <a:buChar char="•"/>
-            </a:pPr>
-            <a:r>
-              <a:rPr lang="en-US" sz="1200" dirty="0">
-                <a:solidFill>
-                  <a:srgbClr val="717670"/>
+              <a:rPr lang="en-US" sz="1300" b="1" dirty="0">
+                <a:solidFill>
+                  <a:srgbClr val="FFFFFF"/>
                 </a:solidFill>
                 <a:latin typeface="Calibri" pitchFamily="34" charset="0"/>
                 <a:ea typeface="Calibri" pitchFamily="34" charset="-122"/>
                 <a:cs typeface="Calibri" pitchFamily="34" charset="-120"/>
               </a:rPr>
-              <a:t>MVP + RAG-корпус методичек РоВ · домен plan-wise.ru + HTTPS</a:t>
-            </a:r>
-            <a:endParaRPr lang="en-US" sz="1200" dirty="0"/>
-          </a:p>
-          <a:p>
-            <a:pPr marL="342900" indent="-342900">
-              <a:spcAft>
-                <a:spcPts val="800"/>
-              </a:spcAft>
-              <a:buSzPct val="100000"/>
-              <a:buChar char="•"/>
-            </a:pPr>
-            <a:r>
-              <a:rPr lang="en-US" sz="1200" dirty="0">
-                <a:solidFill>
-                  <a:srgbClr val="717670"/>
-                </a:solidFill>
-                <a:latin typeface="Calibri" pitchFamily="34" charset="0"/>
-                <a:ea typeface="Calibri" pitchFamily="34" charset="-122"/>
-                <a:cs typeface="Calibri" pitchFamily="34" charset="-120"/>
-              </a:rPr>
-              <a:t>Docker Compose · библиотека наполнена · порог откалиброван</a:t>
-            </a:r>
-            <a:endParaRPr lang="en-US" sz="1200" dirty="0"/>
-          </a:p>
-        </p:txBody>
-      </p:sp>
-      <p:sp>
-        <p:nvSpPr>
-          <p:cNvPr id="12" name="Text 10"/>
-          <p:cNvSpPr/>
-          <p:nvPr/>
-        </p:nvSpPr>
-        <p:spPr>
-          <a:xfrm>
-            <a:off x="3246120" y="3931920"/>
-            <a:ext cx="182880" cy="365760"/>
-          </a:xfrm>
-          <a:prstGeom prst="rect">
-            <a:avLst/>
-          </a:prstGeom>
-          <a:noFill/>
-          <a:ln/>
-        </p:spPr>
-        <p:txBody>
-          <a:bodyPr wrap="square" rtlCol="0" anchor="ctr"/>
-          <a:lstStyle/>
-          <a:p>
-            <a:pPr algn="ctr" indent="0" marL="0">
-              <a:buNone/>
-            </a:pPr>
-            <a:r>
-              <a:rPr lang="en-US" sz="1800" b="1" dirty="0">
-                <a:solidFill>
-                  <a:srgbClr val="21A663"/>
-                </a:solidFill>
-              </a:rPr>
-              <a:t>→</a:t>
-            </a:r>
-            <a:endParaRPr lang="en-US" sz="1800" dirty="0"/>
-          </a:p>
-        </p:txBody>
-      </p:sp>
-      <p:sp>
-        <p:nvSpPr>
-          <p:cNvPr id="13" name="Shape 11"/>
-          <p:cNvSpPr/>
-          <p:nvPr/>
-        </p:nvSpPr>
-        <p:spPr>
-          <a:xfrm>
-            <a:off x="3749040" y="2286000"/>
-            <a:ext cx="365760" cy="365760"/>
-          </a:xfrm>
-          <a:prstGeom prst="ellipse">
-            <a:avLst/>
-          </a:prstGeom>
-          <a:solidFill>
-            <a:srgbClr val="F5B800"/>
-          </a:solidFill>
-          <a:ln/>
-        </p:spPr>
-      </p:sp>
-      <p:sp>
-        <p:nvSpPr>
-          <p:cNvPr id="14" name="Text 12"/>
-          <p:cNvSpPr/>
-          <p:nvPr/>
-        </p:nvSpPr>
-        <p:spPr>
-          <a:xfrm>
-            <a:off x="3749040" y="2286000"/>
-            <a:ext cx="365760" cy="365760"/>
-          </a:xfrm>
-          <a:prstGeom prst="rect">
-            <a:avLst/>
-          </a:prstGeom>
-          <a:noFill/>
-          <a:ln/>
-        </p:spPr>
-        <p:txBody>
-          <a:bodyPr wrap="square" rtlCol="0" anchor="ctr"/>
-          <a:lstStyle/>
-          <a:p>
-            <a:pPr algn="ctr" indent="0" marL="0">
-              <a:buNone/>
-            </a:pPr>
-            <a:r>
-              <a:rPr lang="en-US" sz="1300" b="1" dirty="0">
-                <a:solidFill>
-                  <a:srgbClr val="FFFFFF"/>
-                </a:solidFill>
-                <a:latin typeface="Georgia" pitchFamily="34" charset="0"/>
-                <a:ea typeface="Georgia" pitchFamily="34" charset="-122"/>
-                <a:cs typeface="Georgia" pitchFamily="34" charset="-120"/>
-              </a:rPr>
-              <a:t>2</a:t>
+              <a:t>3. Редактор: ↑↓ reorder · 🎲 регенерация · add/del · история</a:t>
             </a:r>
             <a:endParaRPr lang="en-US" sz="1300" dirty="0"/>
           </a:p>
@@ -17594,14 +17894,14 @@
       </p:sp>
       <p:sp>
         <p:nvSpPr>
-          <p:cNvPr id="15" name="Shape 13"/>
-          <p:cNvSpPr/>
-          <p:nvPr/>
-        </p:nvSpPr>
-        <p:spPr>
-          <a:xfrm>
-            <a:off x="3429000" y="2926080"/>
-            <a:ext cx="2606040" cy="2651760"/>
+          <p:cNvPr id="9" name="Shape 6"/>
+          <p:cNvSpPr/>
+          <p:nvPr/>
+        </p:nvSpPr>
+        <p:spPr>
+          <a:xfrm>
+            <a:off x="6172200" y="1874520"/>
+            <a:ext cx="5532120" cy="3703320"/>
           </a:xfrm>
           <a:prstGeom prst="rect">
             <a:avLst/>
@@ -17624,36 +17924,59 @@
           </a:effectLst>
         </p:spPr>
       </p:sp>
-      <p:sp>
-        <p:nvSpPr>
-          <p:cNvPr id="16" name="Shape 14"/>
-          <p:cNvSpPr/>
-          <p:nvPr/>
-        </p:nvSpPr>
-        <p:spPr>
-          <a:xfrm>
-            <a:off x="3429000" y="2926080"/>
-            <a:ext cx="2606040" cy="109728"/>
+      <p:pic>
+        <p:nvPicPr>
+          <p:cNvPr id="10" name="Image 1" descr="/home/nikit/planwise/artifacts/4-export.png">    </p:cNvPr>
+          <p:cNvPicPr>
+            <a:picLocks noChangeAspect="1"/>
+          </p:cNvPicPr>
+          <p:nvPr/>
+        </p:nvPicPr>
+        <p:blipFill>
+          <a:blip r:embed="rId2"/>
+          <a:srcRect l="0" r="0" t="0" b="0"/>
+          <a:stretch/>
+        </p:blipFill>
+        <p:spPr>
+          <a:xfrm>
+            <a:off x="6263640" y="1965960"/>
+            <a:ext cx="5349240" cy="3108960"/>
+          </a:xfrm>
+          <a:prstGeom prst="rect">
+            <a:avLst/>
+          </a:prstGeom>
+        </p:spPr>
+      </p:pic>
+      <p:sp>
+        <p:nvSpPr>
+          <p:cNvPr id="11" name="Shape 7"/>
+          <p:cNvSpPr/>
+          <p:nvPr/>
+        </p:nvSpPr>
+        <p:spPr>
+          <a:xfrm>
+            <a:off x="6172200" y="5166360"/>
+            <a:ext cx="5532120" cy="411480"/>
           </a:xfrm>
           <a:prstGeom prst="rect">
             <a:avLst/>
           </a:prstGeom>
           <a:solidFill>
-            <a:srgbClr val="F5B800"/>
+            <a:srgbClr val="0E4F30"/>
           </a:solidFill>
           <a:ln/>
         </p:spPr>
       </p:sp>
       <p:sp>
         <p:nvSpPr>
-          <p:cNvPr id="17" name="Text 15"/>
-          <p:cNvSpPr/>
-          <p:nvPr/>
-        </p:nvSpPr>
-        <p:spPr>
-          <a:xfrm>
-            <a:off x="3630168" y="3127248"/>
-            <a:ext cx="2240280" cy="457200"/>
+          <p:cNvPr id="12" name="Text 8"/>
+          <p:cNvSpPr/>
+          <p:nvPr/>
+        </p:nvSpPr>
+        <p:spPr>
+          <a:xfrm>
+            <a:off x="6336792" y="5166360"/>
+            <a:ext cx="5202936" cy="411480"/>
           </a:xfrm>
           <a:prstGeom prst="rect">
             <a:avLst/>
@@ -17669,30 +17992,94 @@
               <a:buNone/>
             </a:pPr>
             <a:r>
-              <a:rPr lang="en-US" sz="1600" b="1" dirty="0">
-                <a:solidFill>
-                  <a:srgbClr val="14160F"/>
+              <a:rPr lang="en-US" sz="1300" b="1" dirty="0">
+                <a:solidFill>
+                  <a:srgbClr val="FFFFFF"/>
+                </a:solidFill>
+                <a:latin typeface="Calibri" pitchFamily="34" charset="0"/>
+                <a:ea typeface="Calibri" pitchFamily="34" charset="-122"/>
+                <a:cs typeface="Calibri" pitchFamily="34" charset="-120"/>
+              </a:rPr>
+              <a:t>4. Экспорт: PDF · DOCX · режим показа · персональная ссылка</a:t>
+            </a:r>
+            <a:endParaRPr lang="en-US" sz="1300" dirty="0"/>
+          </a:p>
+        </p:txBody>
+      </p:sp>
+      <p:sp>
+        <p:nvSpPr>
+          <p:cNvPr id="13" name="Shape 9"/>
+          <p:cNvSpPr/>
+          <p:nvPr/>
+        </p:nvSpPr>
+        <p:spPr>
+          <a:xfrm>
+            <a:off x="502920" y="5760720"/>
+            <a:ext cx="11155680" cy="868680"/>
+          </a:xfrm>
+          <a:prstGeom prst="rect">
+            <a:avLst/>
+          </a:prstGeom>
+          <a:solidFill>
+            <a:srgbClr val="F8F9F7"/>
+          </a:solidFill>
+          <a:ln w="15240">
+            <a:solidFill>
+              <a:srgbClr val="21A663"/>
+            </a:solidFill>
+            <a:prstDash val="solid"/>
+          </a:ln>
+        </p:spPr>
+      </p:sp>
+      <p:sp>
+        <p:nvSpPr>
+          <p:cNvPr id="14" name="Text 10"/>
+          <p:cNvSpPr/>
+          <p:nvPr/>
+        </p:nvSpPr>
+        <p:spPr>
+          <a:xfrm>
+            <a:off x="685800" y="5852160"/>
+            <a:ext cx="3200400" cy="365760"/>
+          </a:xfrm>
+          <a:prstGeom prst="rect">
+            <a:avLst/>
+          </a:prstGeom>
+          <a:noFill/>
+          <a:ln/>
+        </p:spPr>
+        <p:txBody>
+          <a:bodyPr wrap="square" rtlCol="0" anchor="ctr"/>
+          <a:lstStyle/>
+          <a:p>
+            <a:pPr indent="0" marL="0">
+              <a:buNone/>
+            </a:pPr>
+            <a:r>
+              <a:rPr lang="en-US" sz="1300" b="1" dirty="0">
+                <a:solidFill>
+                  <a:srgbClr val="21A663"/>
                 </a:solidFill>
                 <a:latin typeface="Georgia" pitchFamily="34" charset="0"/>
                 <a:ea typeface="Georgia" pitchFamily="34" charset="-122"/>
                 <a:cs typeface="Georgia" pitchFamily="34" charset="-120"/>
               </a:rPr>
-              <a:t>Перед демо</a:t>
-            </a:r>
-            <a:endParaRPr lang="en-US" sz="1600" dirty="0"/>
-          </a:p>
-        </p:txBody>
-      </p:sp>
-      <p:sp>
-        <p:nvSpPr>
-          <p:cNvPr id="18" name="Text 16"/>
-          <p:cNvSpPr/>
-          <p:nvPr/>
-        </p:nvSpPr>
-        <p:spPr>
-          <a:xfrm>
-            <a:off x="3657600" y="3657600"/>
-            <a:ext cx="2194560" cy="1828800"/>
+              <a:t>Что уже работает</a:t>
+            </a:r>
+            <a:endParaRPr lang="en-US" sz="1300" dirty="0"/>
+          </a:p>
+        </p:txBody>
+      </p:sp>
+      <p:sp>
+        <p:nvSpPr>
+          <p:cNvPr id="15" name="Text 11"/>
+          <p:cNvSpPr/>
+          <p:nvPr/>
+        </p:nvSpPr>
+        <p:spPr>
+          <a:xfrm>
+            <a:off x="777240" y="6217920"/>
+            <a:ext cx="10698480" cy="411480"/>
           </a:xfrm>
           <a:prstGeom prst="rect">
             <a:avLst/>
@@ -17705,584 +18092,39 @@
           <a:lstStyle/>
           <a:p>
             <a:pPr marL="342900" indent="-342900">
-              <a:spcAft>
-                <a:spcPts val="800"/>
-              </a:spcAft>
               <a:buSzPct val="100000"/>
-              <a:buChar char="•"/>
-            </a:pPr>
-            <a:r>
-              <a:rPr lang="en-US" sz="1200" dirty="0">
-                <a:solidFill>
-                  <a:srgbClr val="717670"/>
+              <a:buChar char="✓"/>
+            </a:pPr>
+            <a:r>
+              <a:rPr lang="en-US" sz="1050" dirty="0">
+                <a:solidFill>
+                  <a:srgbClr val="14160F"/>
                 </a:solidFill>
                 <a:latin typeface="Calibri" pitchFamily="34" charset="0"/>
                 <a:ea typeface="Calibri" pitchFamily="34" charset="-122"/>
                 <a:cs typeface="Calibri" pitchFamily="34" charset="-120"/>
               </a:rPr>
-              <a:t>Живой UAT golden-path</a:t>
-            </a:r>
-            <a:endParaRPr lang="en-US" sz="1200" dirty="0"/>
+              <a:t>Полноэкранный показ на проекторе · календарь-сетка · история версий с откатом</a:t>
+            </a:r>
+            <a:endParaRPr lang="en-US" sz="1050" dirty="0"/>
           </a:p>
           <a:p>
             <a:pPr marL="342900" indent="-342900">
-              <a:spcAft>
-                <a:spcPts val="800"/>
-              </a:spcAft>
               <a:buSzPct val="100000"/>
-              <a:buChar char="•"/>
-            </a:pPr>
-            <a:r>
-              <a:rPr lang="en-US" sz="1200" dirty="0">
-                <a:solidFill>
-                  <a:srgbClr val="717670"/>
+              <a:buChar char="✓"/>
+            </a:pPr>
+            <a:r>
+              <a:rPr lang="en-US" sz="1050" dirty="0">
+                <a:solidFill>
+                  <a:srgbClr val="14160F"/>
                 </a:solidFill>
                 <a:latin typeface="Calibri" pitchFamily="34" charset="0"/>
                 <a:ea typeface="Calibri" pitchFamily="34" charset="-122"/>
                 <a:cs typeface="Calibri" pitchFamily="34" charset="-120"/>
               </a:rPr>
-              <a:t>Скринкаст 5–7 мин + презентация</a:t>
-            </a:r>
-            <a:endParaRPr lang="en-US" sz="1200" dirty="0"/>
-          </a:p>
-        </p:txBody>
-      </p:sp>
-      <p:sp>
-        <p:nvSpPr>
-          <p:cNvPr id="19" name="Text 17"/>
-          <p:cNvSpPr/>
-          <p:nvPr/>
-        </p:nvSpPr>
-        <p:spPr>
-          <a:xfrm>
-            <a:off x="6035040" y="3931920"/>
-            <a:ext cx="182880" cy="365760"/>
-          </a:xfrm>
-          <a:prstGeom prst="rect">
-            <a:avLst/>
-          </a:prstGeom>
-          <a:noFill/>
-          <a:ln/>
-        </p:spPr>
-        <p:txBody>
-          <a:bodyPr wrap="square" rtlCol="0" anchor="ctr"/>
-          <a:lstStyle/>
-          <a:p>
-            <a:pPr algn="ctr" indent="0" marL="0">
-              <a:buNone/>
-            </a:pPr>
-            <a:r>
-              <a:rPr lang="en-US" sz="1800" b="1" dirty="0">
-                <a:solidFill>
-                  <a:srgbClr val="21A663"/>
-                </a:solidFill>
-              </a:rPr>
-              <a:t>→</a:t>
-            </a:r>
-            <a:endParaRPr lang="en-US" sz="1800" dirty="0"/>
-          </a:p>
-        </p:txBody>
-      </p:sp>
-      <p:sp>
-        <p:nvSpPr>
-          <p:cNvPr id="20" name="Shape 18"/>
-          <p:cNvSpPr/>
-          <p:nvPr/>
-        </p:nvSpPr>
-        <p:spPr>
-          <a:xfrm>
-            <a:off x="6537960" y="2286000"/>
-            <a:ext cx="365760" cy="365760"/>
-          </a:xfrm>
-          <a:prstGeom prst="ellipse">
-            <a:avLst/>
-          </a:prstGeom>
-          <a:solidFill>
-            <a:srgbClr val="2741E0"/>
-          </a:solidFill>
-          <a:ln/>
-        </p:spPr>
-      </p:sp>
-      <p:sp>
-        <p:nvSpPr>
-          <p:cNvPr id="21" name="Text 19"/>
-          <p:cNvSpPr/>
-          <p:nvPr/>
-        </p:nvSpPr>
-        <p:spPr>
-          <a:xfrm>
-            <a:off x="6537960" y="2286000"/>
-            <a:ext cx="365760" cy="365760"/>
-          </a:xfrm>
-          <a:prstGeom prst="rect">
-            <a:avLst/>
-          </a:prstGeom>
-          <a:noFill/>
-          <a:ln/>
-        </p:spPr>
-        <p:txBody>
-          <a:bodyPr wrap="square" rtlCol="0" anchor="ctr"/>
-          <a:lstStyle/>
-          <a:p>
-            <a:pPr algn="ctr" indent="0" marL="0">
-              <a:buNone/>
-            </a:pPr>
-            <a:r>
-              <a:rPr lang="en-US" sz="1300" b="1" dirty="0">
-                <a:solidFill>
-                  <a:srgbClr val="FFFFFF"/>
-                </a:solidFill>
-                <a:latin typeface="Georgia" pitchFamily="34" charset="0"/>
-                <a:ea typeface="Georgia" pitchFamily="34" charset="-122"/>
-                <a:cs typeface="Georgia" pitchFamily="34" charset="-120"/>
-              </a:rPr>
-              <a:t>3</a:t>
-            </a:r>
-            <a:endParaRPr lang="en-US" sz="1300" dirty="0"/>
-          </a:p>
-        </p:txBody>
-      </p:sp>
-      <p:sp>
-        <p:nvSpPr>
-          <p:cNvPr id="22" name="Shape 20"/>
-          <p:cNvSpPr/>
-          <p:nvPr/>
-        </p:nvSpPr>
-        <p:spPr>
-          <a:xfrm>
-            <a:off x="6217920" y="2926080"/>
-            <a:ext cx="2606040" cy="2651760"/>
-          </a:xfrm>
-          <a:prstGeom prst="rect">
-            <a:avLst/>
-          </a:prstGeom>
-          <a:solidFill>
-            <a:srgbClr val="FFFFFF"/>
-          </a:solidFill>
-          <a:ln w="12700">
-            <a:solidFill>
-              <a:srgbClr val="E4E6E1"/>
-            </a:solidFill>
-            <a:prstDash val="solid"/>
-          </a:ln>
-          <a:effectLst>
-            <a:outerShdw sx="100000" sy="100000" kx="0" ky="0" algn="bl" rotWithShape="0" blurRad="101600" dist="38100" dir="8100000">
-              <a:srgbClr val="000000">
-                <a:alpha val="12000"/>
-              </a:srgbClr>
-            </a:outerShdw>
-          </a:effectLst>
-        </p:spPr>
-      </p:sp>
-      <p:sp>
-        <p:nvSpPr>
-          <p:cNvPr id="23" name="Shape 21"/>
-          <p:cNvSpPr/>
-          <p:nvPr/>
-        </p:nvSpPr>
-        <p:spPr>
-          <a:xfrm>
-            <a:off x="6217920" y="2926080"/>
-            <a:ext cx="2606040" cy="109728"/>
-          </a:xfrm>
-          <a:prstGeom prst="rect">
-            <a:avLst/>
-          </a:prstGeom>
-          <a:solidFill>
-            <a:srgbClr val="2741E0"/>
-          </a:solidFill>
-          <a:ln/>
-        </p:spPr>
-      </p:sp>
-      <p:sp>
-        <p:nvSpPr>
-          <p:cNvPr id="24" name="Text 22"/>
-          <p:cNvSpPr/>
-          <p:nvPr/>
-        </p:nvSpPr>
-        <p:spPr>
-          <a:xfrm>
-            <a:off x="6419088" y="3127248"/>
-            <a:ext cx="2240280" cy="457200"/>
-          </a:xfrm>
-          <a:prstGeom prst="rect">
-            <a:avLst/>
-          </a:prstGeom>
-          <a:noFill/>
-          <a:ln/>
-        </p:spPr>
-        <p:txBody>
-          <a:bodyPr wrap="square" rtlCol="0" anchor="ctr"/>
-          <a:lstStyle/>
-          <a:p>
-            <a:pPr indent="0" marL="0">
-              <a:buNone/>
-            </a:pPr>
-            <a:r>
-              <a:rPr lang="en-US" sz="1600" b="1" dirty="0">
-                <a:solidFill>
-                  <a:srgbClr val="14160F"/>
-                </a:solidFill>
-                <a:latin typeface="Georgia" pitchFamily="34" charset="0"/>
-                <a:ea typeface="Georgia" pitchFamily="34" charset="-122"/>
-                <a:cs typeface="Georgia" pitchFamily="34" charset="-120"/>
-              </a:rPr>
-              <a:t>Пилот в школе</a:t>
-            </a:r>
-            <a:endParaRPr lang="en-US" sz="1600" dirty="0"/>
-          </a:p>
-        </p:txBody>
-      </p:sp>
-      <p:sp>
-        <p:nvSpPr>
-          <p:cNvPr id="25" name="Text 23"/>
-          <p:cNvSpPr/>
-          <p:nvPr/>
-        </p:nvSpPr>
-        <p:spPr>
-          <a:xfrm>
-            <a:off x="6446520" y="3657600"/>
-            <a:ext cx="2194560" cy="1828800"/>
-          </a:xfrm>
-          <a:prstGeom prst="rect">
-            <a:avLst/>
-          </a:prstGeom>
-          <a:noFill/>
-          <a:ln/>
-        </p:spPr>
-        <p:txBody>
-          <a:bodyPr wrap="square" rtlCol="0" anchor="t"/>
-          <a:lstStyle/>
-          <a:p>
-            <a:pPr marL="342900" indent="-342900">
-              <a:spcAft>
-                <a:spcPts val="800"/>
-              </a:spcAft>
-              <a:buSzPct val="100000"/>
-              <a:buChar char="•"/>
-            </a:pPr>
-            <a:r>
-              <a:rPr lang="en-US" sz="1200" dirty="0">
-                <a:solidFill>
-                  <a:srgbClr val="717670"/>
-                </a:solidFill>
-                <a:latin typeface="Calibri" pitchFamily="34" charset="0"/>
-                <a:ea typeface="Calibri" pitchFamily="34" charset="-122"/>
-                <a:cs typeface="Calibri" pitchFamily="34" charset="-120"/>
-              </a:rPr>
-              <a:t>Обкатка с реальными классными руководителями</a:t>
-            </a:r>
-            <a:endParaRPr lang="en-US" sz="1200" dirty="0"/>
-          </a:p>
-          <a:p>
-            <a:pPr marL="342900" indent="-342900">
-              <a:spcAft>
-                <a:spcPts val="800"/>
-              </a:spcAft>
-              <a:buSzPct val="100000"/>
-              <a:buChar char="•"/>
-            </a:pPr>
-            <a:r>
-              <a:rPr lang="en-US" sz="1200" dirty="0">
-                <a:solidFill>
-                  <a:srgbClr val="717670"/>
-                </a:solidFill>
-                <a:latin typeface="Calibri" pitchFamily="34" charset="0"/>
-                <a:ea typeface="Calibri" pitchFamily="34" charset="-122"/>
-                <a:cs typeface="Calibri" pitchFamily="34" charset="-120"/>
-              </a:rPr>
-              <a:t>Модерация контента методистами</a:t>
-            </a:r>
-            <a:endParaRPr lang="en-US" sz="1200" dirty="0"/>
-          </a:p>
-        </p:txBody>
-      </p:sp>
-      <p:sp>
-        <p:nvSpPr>
-          <p:cNvPr id="26" name="Text 24"/>
-          <p:cNvSpPr/>
-          <p:nvPr/>
-        </p:nvSpPr>
-        <p:spPr>
-          <a:xfrm>
-            <a:off x="8823960" y="3931920"/>
-            <a:ext cx="182880" cy="365760"/>
-          </a:xfrm>
-          <a:prstGeom prst="rect">
-            <a:avLst/>
-          </a:prstGeom>
-          <a:noFill/>
-          <a:ln/>
-        </p:spPr>
-        <p:txBody>
-          <a:bodyPr wrap="square" rtlCol="0" anchor="ctr"/>
-          <a:lstStyle/>
-          <a:p>
-            <a:pPr algn="ctr" indent="0" marL="0">
-              <a:buNone/>
-            </a:pPr>
-            <a:r>
-              <a:rPr lang="en-US" sz="1800" b="1" dirty="0">
-                <a:solidFill>
-                  <a:srgbClr val="21A663"/>
-                </a:solidFill>
-              </a:rPr>
-              <a:t>→</a:t>
-            </a:r>
-            <a:endParaRPr lang="en-US" sz="1800" dirty="0"/>
-          </a:p>
-        </p:txBody>
-      </p:sp>
-      <p:sp>
-        <p:nvSpPr>
-          <p:cNvPr id="27" name="Shape 25"/>
-          <p:cNvSpPr/>
-          <p:nvPr/>
-        </p:nvSpPr>
-        <p:spPr>
-          <a:xfrm>
-            <a:off x="9326880" y="2286000"/>
-            <a:ext cx="365760" cy="365760"/>
-          </a:xfrm>
-          <a:prstGeom prst="ellipse">
-            <a:avLst/>
-          </a:prstGeom>
-          <a:solidFill>
-            <a:srgbClr val="093520"/>
-          </a:solidFill>
-          <a:ln/>
-        </p:spPr>
-      </p:sp>
-      <p:sp>
-        <p:nvSpPr>
-          <p:cNvPr id="28" name="Text 26"/>
-          <p:cNvSpPr/>
-          <p:nvPr/>
-        </p:nvSpPr>
-        <p:spPr>
-          <a:xfrm>
-            <a:off x="9326880" y="2286000"/>
-            <a:ext cx="365760" cy="365760"/>
-          </a:xfrm>
-          <a:prstGeom prst="rect">
-            <a:avLst/>
-          </a:prstGeom>
-          <a:noFill/>
-          <a:ln/>
-        </p:spPr>
-        <p:txBody>
-          <a:bodyPr wrap="square" rtlCol="0" anchor="ctr"/>
-          <a:lstStyle/>
-          <a:p>
-            <a:pPr algn="ctr" indent="0" marL="0">
-              <a:buNone/>
-            </a:pPr>
-            <a:r>
-              <a:rPr lang="en-US" sz="1300" b="1" dirty="0">
-                <a:solidFill>
-                  <a:srgbClr val="FFFFFF"/>
-                </a:solidFill>
-                <a:latin typeface="Georgia" pitchFamily="34" charset="0"/>
-                <a:ea typeface="Georgia" pitchFamily="34" charset="-122"/>
-                <a:cs typeface="Georgia" pitchFamily="34" charset="-120"/>
-              </a:rPr>
-              <a:t>4</a:t>
-            </a:r>
-            <a:endParaRPr lang="en-US" sz="1300" dirty="0"/>
-          </a:p>
-        </p:txBody>
-      </p:sp>
-      <p:sp>
-        <p:nvSpPr>
-          <p:cNvPr id="29" name="Shape 27"/>
-          <p:cNvSpPr/>
-          <p:nvPr/>
-        </p:nvSpPr>
-        <p:spPr>
-          <a:xfrm>
-            <a:off x="9006840" y="2926080"/>
-            <a:ext cx="2606040" cy="2651760"/>
-          </a:xfrm>
-          <a:prstGeom prst="rect">
-            <a:avLst/>
-          </a:prstGeom>
-          <a:solidFill>
-            <a:srgbClr val="FFFFFF"/>
-          </a:solidFill>
-          <a:ln w="12700">
-            <a:solidFill>
-              <a:srgbClr val="E4E6E1"/>
-            </a:solidFill>
-            <a:prstDash val="solid"/>
-          </a:ln>
-          <a:effectLst>
-            <a:outerShdw sx="100000" sy="100000" kx="0" ky="0" algn="bl" rotWithShape="0" blurRad="101600" dist="38100" dir="8100000">
-              <a:srgbClr val="000000">
-                <a:alpha val="12000"/>
-              </a:srgbClr>
-            </a:outerShdw>
-          </a:effectLst>
-        </p:spPr>
-      </p:sp>
-      <p:sp>
-        <p:nvSpPr>
-          <p:cNvPr id="30" name="Shape 28"/>
-          <p:cNvSpPr/>
-          <p:nvPr/>
-        </p:nvSpPr>
-        <p:spPr>
-          <a:xfrm>
-            <a:off x="9006840" y="2926080"/>
-            <a:ext cx="2606040" cy="109728"/>
-          </a:xfrm>
-          <a:prstGeom prst="rect">
-            <a:avLst/>
-          </a:prstGeom>
-          <a:solidFill>
-            <a:srgbClr val="093520"/>
-          </a:solidFill>
-          <a:ln/>
-        </p:spPr>
-      </p:sp>
-      <p:sp>
-        <p:nvSpPr>
-          <p:cNvPr id="31" name="Text 29"/>
-          <p:cNvSpPr/>
-          <p:nvPr/>
-        </p:nvSpPr>
-        <p:spPr>
-          <a:xfrm>
-            <a:off x="9208008" y="3127248"/>
-            <a:ext cx="2240280" cy="457200"/>
-          </a:xfrm>
-          <a:prstGeom prst="rect">
-            <a:avLst/>
-          </a:prstGeom>
-          <a:noFill/>
-          <a:ln/>
-        </p:spPr>
-        <p:txBody>
-          <a:bodyPr wrap="square" rtlCol="0" anchor="ctr"/>
-          <a:lstStyle/>
-          <a:p>
-            <a:pPr indent="0" marL="0">
-              <a:buNone/>
-            </a:pPr>
-            <a:r>
-              <a:rPr lang="en-US" sz="1600" b="1" dirty="0">
-                <a:solidFill>
-                  <a:srgbClr val="14160F"/>
-                </a:solidFill>
-                <a:latin typeface="Georgia" pitchFamily="34" charset="0"/>
-                <a:ea typeface="Georgia" pitchFamily="34" charset="-122"/>
-                <a:cs typeface="Georgia" pitchFamily="34" charset="-120"/>
-              </a:rPr>
-              <a:t>Масштаб B2B</a:t>
-            </a:r>
-            <a:endParaRPr lang="en-US" sz="1600" dirty="0"/>
-          </a:p>
-        </p:txBody>
-      </p:sp>
-      <p:sp>
-        <p:nvSpPr>
-          <p:cNvPr id="32" name="Text 30"/>
-          <p:cNvSpPr/>
-          <p:nvPr/>
-        </p:nvSpPr>
-        <p:spPr>
-          <a:xfrm>
-            <a:off x="9235440" y="3657600"/>
-            <a:ext cx="2194560" cy="1828800"/>
-          </a:xfrm>
-          <a:prstGeom prst="rect">
-            <a:avLst/>
-          </a:prstGeom>
-          <a:noFill/>
-          <a:ln/>
-        </p:spPr>
-        <p:txBody>
-          <a:bodyPr wrap="square" rtlCol="0" anchor="t"/>
-          <a:lstStyle/>
-          <a:p>
-            <a:pPr marL="342900" indent="-342900">
-              <a:spcAft>
-                <a:spcPts val="800"/>
-              </a:spcAft>
-              <a:buSzPct val="100000"/>
-              <a:buChar char="•"/>
-            </a:pPr>
-            <a:r>
-              <a:rPr lang="en-US" sz="1200" dirty="0">
-                <a:solidFill>
-                  <a:srgbClr val="717670"/>
-                </a:solidFill>
-                <a:latin typeface="Calibri" pitchFamily="34" charset="0"/>
-                <a:ea typeface="Calibri" pitchFamily="34" charset="-122"/>
-                <a:cs typeface="Calibri" pitchFamily="34" charset="-120"/>
-              </a:rPr>
-              <a:t>Подписка для школ и управлений образования</a:t>
-            </a:r>
-            <a:endParaRPr lang="en-US" sz="1200" dirty="0"/>
-          </a:p>
-          <a:p>
-            <a:pPr marL="342900" indent="-342900">
-              <a:spcAft>
-                <a:spcPts val="800"/>
-              </a:spcAft>
-              <a:buSzPct val="100000"/>
-              <a:buChar char="•"/>
-            </a:pPr>
-            <a:r>
-              <a:rPr lang="en-US" sz="1200" dirty="0">
-                <a:solidFill>
-                  <a:srgbClr val="717670"/>
-                </a:solidFill>
-                <a:latin typeface="Calibri" pitchFamily="34" charset="0"/>
-                <a:ea typeface="Calibri" pitchFamily="34" charset="-122"/>
-                <a:cs typeface="Calibri" pitchFamily="34" charset="-120"/>
-              </a:rPr>
-              <a:t>Интеграции с журналами · аналитика воспитания</a:t>
-            </a:r>
-            <a:endParaRPr lang="en-US" sz="1200" dirty="0"/>
-          </a:p>
-        </p:txBody>
-      </p:sp>
-      <p:sp>
-        <p:nvSpPr>
-          <p:cNvPr id="33" name="Text 31"/>
-          <p:cNvSpPr/>
-          <p:nvPr/>
-        </p:nvSpPr>
-        <p:spPr>
-          <a:xfrm>
-            <a:off x="640080" y="5852160"/>
-            <a:ext cx="10881360" cy="457200"/>
-          </a:xfrm>
-          <a:prstGeom prst="rect">
-            <a:avLst/>
-          </a:prstGeom>
-          <a:noFill/>
-          <a:ln/>
-        </p:spPr>
-        <p:txBody>
-          <a:bodyPr wrap="square" rtlCol="0" anchor="ctr"/>
-          <a:lstStyle/>
-          <a:p>
-            <a:pPr algn="ctr" indent="0" marL="0">
-              <a:buNone/>
-            </a:pPr>
-            <a:r>
-              <a:rPr lang="en-US" sz="1400" b="1" i="1" dirty="0">
-                <a:solidFill>
-                  <a:srgbClr val="21A663"/>
-                </a:solidFill>
-                <a:latin typeface="Calibri" pitchFamily="34" charset="0"/>
-                <a:ea typeface="Calibri" pitchFamily="34" charset="-122"/>
-                <a:cs typeface="Calibri" pitchFamily="34" charset="-120"/>
-              </a:rPr>
-              <a:t>Сейчас здесь →  MVP полностью реализован, идём к пилоту</a:t>
-            </a:r>
-            <a:endParaRPr lang="en-US" sz="1400" dirty="0"/>
+              <a:t>Библиотека сообщества + семантический поиск · оценка 👍/👎 · админ-статистика</a:t>
+            </a:r>
+            <a:endParaRPr lang="en-US" sz="1050" dirty="0"/>
           </a:p>
         </p:txBody>
       </p:sp>
